--- a/examples/pptx/victor-palacios-intro.pptx
+++ b/examples/pptx/victor-palacios-intro.pptx
@@ -48,7 +48,6 @@
     <p:sldId id="296" r:id="rId48"/>
     <p:sldId id="297" r:id="rId49"/>
     <p:sldId id="298" r:id="rId50"/>
-    <p:sldId id="299" r:id="rId51"/>
   </p:sldIdLst>
   <p:sldSz cx="12192000" cy="6858000" type="screen16x9"/>
   <p:notesSz cx="6858000" cy="9144000"/>
@@ -3160,76 +3159,6 @@
 </p:notes>
 </file>
 
-<file path=ppt/notesSlides/notesSlide44.xml><?xml version="1.0" encoding="utf-8"?>
-<p:notes xmlns:a="http://schemas.openxmlformats.org/drawingml/2006/main" xmlns:p="http://schemas.openxmlformats.org/presentationml/2006/main" xmlns:r="http://schemas.openxmlformats.org/officeDocument/2006/relationships">
-  <p:cSld>
-    <p:spTree>
-      <p:nvGrpSpPr>
-        <p:cNvPr id="1" name=""/>
-        <p:cNvGrpSpPr/>
-        <p:nvPr/>
-      </p:nvGrpSpPr>
-      <p:grpSpPr>
-        <a:xfrm>
-          <a:off x="0" y="0"/>
-          <a:ext cx="0" cy="0"/>
-          <a:chOff x="0" y="0"/>
-          <a:chExt cx="0" cy="0"/>
-        </a:xfrm>
-      </p:grpSpPr>
-      <p:sp>
-        <p:nvSpPr>
-          <p:cNvPr id="2" name="Slide Image Placeholder 1"/>
-          <p:cNvSpPr>
-            <a:spLocks noGrp="1"/>
-          </p:cNvSpPr>
-          <p:nvPr>
-            <p:ph type="sldImg" idx="2"/>
-          </p:nvPr>
-        </p:nvSpPr>
-        <p:spPr/>
-      </p:sp>
-      <p:sp>
-        <p:nvSpPr>
-          <p:cNvPr id="3" name="Notes Placeholder 2"/>
-          <p:cNvSpPr>
-            <a:spLocks noGrp="1"/>
-          </p:cNvSpPr>
-          <p:nvPr>
-            <p:ph type="body" idx="3" sz="quarter"/>
-          </p:nvPr>
-        </p:nvSpPr>
-        <p:spPr/>
-        <p:txBody>
-          <a:bodyPr/>
-          <a:lstStyle/>
-          <a:p>
-            <a:r>
-              <a:t>So that is my question back to you, and I would genuinely like to hear the answer. What will you build?</a:t>
-            </a:r>
-          </a:p>
-        </p:txBody>
-      </p:sp>
-      <p:sp>
-        <p:nvSpPr>
-          <p:cNvPr id="4" name="Slide Number Placeholder 3"/>
-          <p:cNvSpPr>
-            <a:spLocks noGrp="1"/>
-          </p:cNvSpPr>
-          <p:nvPr>
-            <p:ph type="sldNum" idx="5" sz="quarter"/>
-          </p:nvPr>
-        </p:nvSpPr>
-        <p:spPr/>
-      </p:sp>
-    </p:spTree>
-  </p:cSld>
-  <p:clrMapOvr>
-    <a:masterClrMapping/>
-  </p:clrMapOvr>
-</p:notes>
-</file>
-
 <file path=ppt/notesSlides/notesSlide5.xml><?xml version="1.0" encoding="utf-8"?>
 <p:notes xmlns:a="http://schemas.openxmlformats.org/drawingml/2006/main" xmlns:p="http://schemas.openxmlformats.org/presentationml/2006/main" xmlns:r="http://schemas.openxmlformats.org/officeDocument/2006/relationships">
   <p:cSld>
@@ -5043,7 +4972,7 @@
             <a:r>
               <a:rPr sz="3400" b="1" i="0">
                 <a:solidFill>
-                  <a:srgbClr val="123A6B"/>
+                  <a:srgbClr val="0072CE"/>
                 </a:solidFill>
                 <a:latin typeface="Arial"/>
               </a:rPr>
@@ -5080,7 +5009,7 @@
             <a:r>
               <a:rPr sz="3400" b="1" i="0">
                 <a:solidFill>
-                  <a:srgbClr val="123A6B"/>
+                  <a:srgbClr val="0072CE"/>
                 </a:solidFill>
                 <a:latin typeface="Arial"/>
               </a:rPr>
@@ -5972,6 +5901,43 @@
         <p:spPr>
           <a:xfrm>
             <a:off x="6233160" y="1499616"/>
+            <a:ext cx="5958840" cy="609600"/>
+          </a:xfrm>
+          <a:prstGeom prst="rect">
+            <a:avLst/>
+          </a:prstGeom>
+          <a:noFill/>
+        </p:spPr>
+        <p:txBody>
+          <a:bodyPr wrap="none" lIns="0" rIns="0">
+            <a:noAutofit/>
+          </a:bodyPr>
+          <a:lstStyle/>
+          <a:p>
+            <a:pPr algn="l"/>
+            <a:r>
+              <a:rPr sz="3400" b="0" i="0">
+                <a:solidFill>
+                  <a:srgbClr val="0A2240"/>
+                </a:solidFill>
+                <a:latin typeface="Arial"/>
+              </a:rPr>
+              <a:t>Built with customers.</a:t>
+            </a:r>
+          </a:p>
+        </p:txBody>
+      </p:sp>
+      <p:sp>
+        <p:nvSpPr>
+          <p:cNvPr id="7" name="TextBox 6"/>
+          <p:cNvSpPr/>
+          <p:nvPr>
+            <p:ph type="body" idx="2"/>
+          </p:nvPr>
+        </p:nvSpPr>
+        <p:spPr>
+          <a:xfrm>
+            <a:off x="6233160" y="2383536"/>
             <a:ext cx="5501640" cy="1127760"/>
           </a:xfrm>
           <a:prstGeom prst="rect">
@@ -5993,44 +5959,7 @@
                 </a:solidFill>
                 <a:latin typeface="Arial"/>
               </a:rPr>
-              <a:t>Built with customers, not just for them.</a:t>
-            </a:r>
-          </a:p>
-        </p:txBody>
-      </p:sp>
-      <p:sp>
-        <p:nvSpPr>
-          <p:cNvPr id="7" name="TextBox 6"/>
-          <p:cNvSpPr/>
-          <p:nvPr>
-            <p:ph type="body" idx="2"/>
-          </p:nvPr>
-        </p:nvSpPr>
-        <p:spPr>
-          <a:xfrm>
-            <a:off x="6233160" y="2901696"/>
-            <a:ext cx="5501640" cy="1127760"/>
-          </a:xfrm>
-          <a:prstGeom prst="rect">
-            <a:avLst/>
-          </a:prstGeom>
-          <a:noFill/>
-        </p:spPr>
-        <p:txBody>
-          <a:bodyPr wrap="square" lIns="0" rIns="0">
-            <a:noAutofit/>
-          </a:bodyPr>
-          <a:lstStyle/>
-          <a:p>
-            <a:pPr algn="l"/>
-            <a:r>
-              <a:rPr sz="3400" b="0" i="0">
-                <a:solidFill>
-                  <a:srgbClr val="0A2240"/>
-                </a:solidFill>
-                <a:latin typeface="Arial"/>
-              </a:rPr>
-              <a:t>60% faster rollout; 50% fewer tickets.</a:t>
+              <a:t>60% faster; 50% fewer tickets</a:t>
             </a:r>
           </a:p>
         </p:txBody>
@@ -6049,405 +5978,6 @@
 </file>
 
 <file path=ppt/slideLayouts/slideLayout18.xml><?xml version="1.0" encoding="utf-8"?>
-<p:sldLayout xmlns:a="http://schemas.openxmlformats.org/drawingml/2006/main" xmlns:r="http://schemas.openxmlformats.org/officeDocument/2006/relationships" xmlns:p="http://schemas.openxmlformats.org/presentationml/2006/main" type="blank" preserve="1">
-  <p:cSld name="slidekit · Card Grid">
-    <p:bg>
-      <p:bgPr>
-        <a:solidFill>
-          <a:srgbClr val="FFFFFF"/>
-        </a:solidFill>
-        <a:effectLst/>
-      </p:bgPr>
-    </p:bg>
-    <p:spTree>
-      <p:nvGrpSpPr>
-        <p:cNvPr id="1" name=""/>
-        <p:cNvGrpSpPr/>
-        <p:nvPr/>
-      </p:nvGrpSpPr>
-      <p:grpSpPr>
-        <a:xfrm>
-          <a:off x="0" y="0"/>
-          <a:ext cx="0" cy="0"/>
-          <a:chOff x="0" y="0"/>
-          <a:chExt cx="0" cy="0"/>
-        </a:xfrm>
-      </p:grpSpPr>
-      <p:sp>
-        <p:nvSpPr>
-          <p:cNvPr id="4" name="Slide Number Placeholder 3"/>
-          <p:cNvSpPr>
-            <a:spLocks noGrp="1"/>
-          </p:cNvSpPr>
-          <p:nvPr>
-            <p:ph type="sldNum" sz="quarter" idx="12"/>
-          </p:nvPr>
-        </p:nvSpPr>
-        <p:spPr>
-          <a:xfrm>
-            <a:off x="11186160" y="6035040"/>
-            <a:ext cx="548640" cy="365760"/>
-          </a:xfrm>
-        </p:spPr>
-        <p:txBody>
-          <a:bodyPr/>
-          <a:lstStyle/>
-          <a:p>
-            <a:fld id="{C1FF6DA9-008F-8B48-92A6-B652298478BF}" type="slidenum">
-              <a:rPr lang="en-US" smtClean="0"/>
-              <a:t>‹#›</a:t>
-            </a:fld>
-            <a:endParaRPr lang="en-US"/>
-          </a:p>
-        </p:txBody>
-      </p:sp>
-      <p:sp>
-        <p:nvSpPr>
-          <p:cNvPr id="5" name="TextBox 4"/>
-          <p:cNvSpPr/>
-          <p:nvPr>
-            <p:ph type="title"/>
-          </p:nvPr>
-        </p:nvSpPr>
-        <p:spPr>
-          <a:xfrm>
-            <a:off x="457200" y="457200"/>
-            <a:ext cx="11277600" cy="768096"/>
-          </a:xfrm>
-          <a:prstGeom prst="rect">
-            <a:avLst/>
-          </a:prstGeom>
-          <a:noFill/>
-        </p:spPr>
-        <p:txBody>
-          <a:bodyPr wrap="none" lIns="0" rIns="0">
-            <a:noAutofit/>
-          </a:bodyPr>
-          <a:lstStyle/>
-          <a:p>
-            <a:pPr algn="l"/>
-            <a:r>
-              <a:rPr sz="4200" b="1" i="0">
-                <a:solidFill>
-                  <a:srgbClr val="0072CE"/>
-                </a:solidFill>
-                <a:latin typeface="Arial"/>
-              </a:rPr>
-              <a:t>What We Offer</a:t>
-            </a:r>
-          </a:p>
-        </p:txBody>
-      </p:sp>
-      <p:sp>
-        <p:nvSpPr>
-          <p:cNvPr id="6" name="TextBox 5"/>
-          <p:cNvSpPr/>
-          <p:nvPr>
-            <p:ph type="body" idx="1"/>
-          </p:nvPr>
-        </p:nvSpPr>
-        <p:spPr>
-          <a:xfrm>
-            <a:off x="457200" y="1499616"/>
-            <a:ext cx="2831366" cy="518159"/>
-          </a:xfrm>
-          <a:prstGeom prst="rect">
-            <a:avLst/>
-          </a:prstGeom>
-          <a:noFill/>
-        </p:spPr>
-        <p:txBody>
-          <a:bodyPr wrap="none" lIns="0" rIns="0">
-            <a:noAutofit/>
-          </a:bodyPr>
-          <a:lstStyle/>
-          <a:p>
-            <a:pPr algn="l"/>
-            <a:r>
-              <a:rPr sz="3400" b="1" i="0">
-                <a:solidFill>
-                  <a:srgbClr val="0A2240"/>
-                </a:solidFill>
-                <a:latin typeface="Arial"/>
-              </a:rPr>
-              <a:t>Insights</a:t>
-            </a:r>
-          </a:p>
-        </p:txBody>
-      </p:sp>
-      <p:sp>
-        <p:nvSpPr>
-          <p:cNvPr id="7" name="TextBox 6"/>
-          <p:cNvSpPr/>
-          <p:nvPr>
-            <p:ph type="body" idx="2"/>
-          </p:nvPr>
-        </p:nvSpPr>
-        <p:spPr>
-          <a:xfrm>
-            <a:off x="457200" y="2154935"/>
-            <a:ext cx="2613660" cy="3605785"/>
-          </a:xfrm>
-          <a:prstGeom prst="rect">
-            <a:avLst/>
-          </a:prstGeom>
-          <a:noFill/>
-        </p:spPr>
-        <p:txBody>
-          <a:bodyPr wrap="square" lIns="0" rIns="0">
-            <a:noAutofit/>
-          </a:bodyPr>
-          <a:lstStyle/>
-          <a:p>
-            <a:pPr algn="l"/>
-            <a:r>
-              <a:rPr sz="3400" b="0" i="0">
-                <a:solidFill>
-                  <a:srgbClr val="0A2240"/>
-                </a:solidFill>
-                <a:latin typeface="Arial"/>
-              </a:rPr>
-              <a:t>Live data and AI analytics.</a:t>
-            </a:r>
-          </a:p>
-        </p:txBody>
-      </p:sp>
-      <p:sp>
-        <p:nvSpPr>
-          <p:cNvPr id="8" name="TextBox 7"/>
-          <p:cNvSpPr/>
-          <p:nvPr>
-            <p:ph type="body" idx="3"/>
-          </p:nvPr>
-        </p:nvSpPr>
-        <p:spPr>
-          <a:xfrm>
-            <a:off x="3345180" y="1499616"/>
-            <a:ext cx="2909292" cy="518159"/>
-          </a:xfrm>
-          <a:prstGeom prst="rect">
-            <a:avLst/>
-          </a:prstGeom>
-          <a:noFill/>
-        </p:spPr>
-        <p:txBody>
-          <a:bodyPr wrap="none" lIns="0" rIns="0">
-            <a:noAutofit/>
-          </a:bodyPr>
-          <a:lstStyle/>
-          <a:p>
-            <a:pPr algn="l"/>
-            <a:r>
-              <a:rPr sz="3400" b="1" i="0">
-                <a:solidFill>
-                  <a:srgbClr val="0A2240"/>
-                </a:solidFill>
-                <a:latin typeface="Arial"/>
-              </a:rPr>
-              <a:t>Security</a:t>
-            </a:r>
-          </a:p>
-        </p:txBody>
-      </p:sp>
-      <p:sp>
-        <p:nvSpPr>
-          <p:cNvPr id="9" name="TextBox 8"/>
-          <p:cNvSpPr/>
-          <p:nvPr>
-            <p:ph type="body" idx="4"/>
-          </p:nvPr>
-        </p:nvSpPr>
-        <p:spPr>
-          <a:xfrm>
-            <a:off x="3345180" y="2154935"/>
-            <a:ext cx="2613660" cy="3605785"/>
-          </a:xfrm>
-          <a:prstGeom prst="rect">
-            <a:avLst/>
-          </a:prstGeom>
-          <a:noFill/>
-        </p:spPr>
-        <p:txBody>
-          <a:bodyPr wrap="square" lIns="0" rIns="0">
-            <a:noAutofit/>
-          </a:bodyPr>
-          <a:lstStyle/>
-          <a:p>
-            <a:pPr algn="l"/>
-            <a:r>
-              <a:rPr sz="3400" b="0" i="0">
-                <a:solidFill>
-                  <a:srgbClr val="0A2240"/>
-                </a:solidFill>
-                <a:latin typeface="Arial"/>
-              </a:rPr>
-              <a:t>Zero-trust, SOC 2 ready.</a:t>
-            </a:r>
-          </a:p>
-        </p:txBody>
-      </p:sp>
-      <p:sp>
-        <p:nvSpPr>
-          <p:cNvPr id="10" name="TextBox 9"/>
-          <p:cNvSpPr/>
-          <p:nvPr>
-            <p:ph type="body" idx="5"/>
-          </p:nvPr>
-        </p:nvSpPr>
-        <p:spPr>
-          <a:xfrm>
-            <a:off x="6233160" y="1499616"/>
-            <a:ext cx="2613660" cy="518159"/>
-          </a:xfrm>
-          <a:prstGeom prst="rect">
-            <a:avLst/>
-          </a:prstGeom>
-          <a:noFill/>
-        </p:spPr>
-        <p:txBody>
-          <a:bodyPr wrap="none" lIns="0" rIns="0">
-            <a:noAutofit/>
-          </a:bodyPr>
-          <a:lstStyle/>
-          <a:p>
-            <a:pPr algn="l"/>
-            <a:r>
-              <a:rPr sz="3400" b="1" i="0">
-                <a:solidFill>
-                  <a:srgbClr val="0A2240"/>
-                </a:solidFill>
-                <a:latin typeface="Arial"/>
-              </a:rPr>
-              <a:t>Speed</a:t>
-            </a:r>
-          </a:p>
-        </p:txBody>
-      </p:sp>
-      <p:sp>
-        <p:nvSpPr>
-          <p:cNvPr id="11" name="TextBox 10"/>
-          <p:cNvSpPr/>
-          <p:nvPr>
-            <p:ph type="body" idx="6"/>
-          </p:nvPr>
-        </p:nvSpPr>
-        <p:spPr>
-          <a:xfrm>
-            <a:off x="6233160" y="2154935"/>
-            <a:ext cx="2613660" cy="3605785"/>
-          </a:xfrm>
-          <a:prstGeom prst="rect">
-            <a:avLst/>
-          </a:prstGeom>
-          <a:noFill/>
-        </p:spPr>
-        <p:txBody>
-          <a:bodyPr wrap="square" lIns="0" rIns="0">
-            <a:noAutofit/>
-          </a:bodyPr>
-          <a:lstStyle/>
-          <a:p>
-            <a:pPr algn="l"/>
-            <a:r>
-              <a:rPr sz="3400" b="0" i="0">
-                <a:solidFill>
-                  <a:srgbClr val="0A2240"/>
-                </a:solidFill>
-                <a:latin typeface="Arial"/>
-              </a:rPr>
-              <a:t>Sub-100ms p99 latency.</a:t>
-            </a:r>
-          </a:p>
-        </p:txBody>
-      </p:sp>
-      <p:sp>
-        <p:nvSpPr>
-          <p:cNvPr id="12" name="TextBox 11"/>
-          <p:cNvSpPr/>
-          <p:nvPr>
-            <p:ph type="body" idx="7"/>
-          </p:nvPr>
-        </p:nvSpPr>
-        <p:spPr>
-          <a:xfrm>
-            <a:off x="9121140" y="1499616"/>
-            <a:ext cx="2613660" cy="518159"/>
-          </a:xfrm>
-          <a:prstGeom prst="rect">
-            <a:avLst/>
-          </a:prstGeom>
-          <a:noFill/>
-        </p:spPr>
-        <p:txBody>
-          <a:bodyPr wrap="none" lIns="0" rIns="0">
-            <a:noAutofit/>
-          </a:bodyPr>
-          <a:lstStyle/>
-          <a:p>
-            <a:pPr algn="l"/>
-            <a:r>
-              <a:rPr sz="3400" b="1" i="0">
-                <a:solidFill>
-                  <a:srgbClr val="0A2240"/>
-                </a:solidFill>
-                <a:latin typeface="Arial"/>
-              </a:rPr>
-              <a:t>APIs</a:t>
-            </a:r>
-          </a:p>
-        </p:txBody>
-      </p:sp>
-      <p:sp>
-        <p:nvSpPr>
-          <p:cNvPr id="13" name="TextBox 12"/>
-          <p:cNvSpPr/>
-          <p:nvPr>
-            <p:ph type="body" idx="8"/>
-          </p:nvPr>
-        </p:nvSpPr>
-        <p:spPr>
-          <a:xfrm>
-            <a:off x="9121140" y="2154935"/>
-            <a:ext cx="2613660" cy="3605785"/>
-          </a:xfrm>
-          <a:prstGeom prst="rect">
-            <a:avLst/>
-          </a:prstGeom>
-          <a:noFill/>
-        </p:spPr>
-        <p:txBody>
-          <a:bodyPr wrap="square" lIns="0" rIns="0">
-            <a:noAutofit/>
-          </a:bodyPr>
-          <a:lstStyle/>
-          <a:p>
-            <a:pPr algn="l"/>
-            <a:r>
-              <a:rPr sz="3400" b="0" i="0">
-                <a:solidFill>
-                  <a:srgbClr val="0A2240"/>
-                </a:solidFill>
-                <a:latin typeface="Arial"/>
-              </a:rPr>
-              <a:t>300+ open connectors.</a:t>
-            </a:r>
-          </a:p>
-        </p:txBody>
-      </p:sp>
-    </p:spTree>
-    <p:extLst>
-      <p:ext uri="{BB962C8B-B14F-4D97-AF65-F5344CB8AC3E}">
-        <p14:creationId xmlns:p14="http://schemas.microsoft.com/office/powerpoint/2010/main" val="1212999818"/>
-      </p:ext>
-    </p:extLst>
-  </p:cSld>
-  <p:clrMapOvr>
-    <a:masterClrMapping/>
-  </p:clrMapOvr>
-</p:sldLayout>
-</file>
-
-<file path=ppt/slideLayouts/slideLayout19.xml><?xml version="1.0" encoding="utf-8"?>
 <p:sldLayout xmlns:a="http://schemas.openxmlformats.org/drawingml/2006/main" xmlns:r="http://schemas.openxmlformats.org/officeDocument/2006/relationships" xmlns:p="http://schemas.openxmlformats.org/presentationml/2006/main" type="blank" preserve="1">
   <p:cSld name="slidekit · Section Divider">
     <p:bg>
@@ -6602,6 +6132,511 @@
                 <a:latin typeface="Arial"/>
               </a:rPr>
               <a:t>Where We Stand Today</a:t>
+            </a:r>
+          </a:p>
+        </p:txBody>
+      </p:sp>
+    </p:spTree>
+    <p:extLst>
+      <p:ext uri="{BB962C8B-B14F-4D97-AF65-F5344CB8AC3E}">
+        <p14:creationId xmlns:p14="http://schemas.microsoft.com/office/powerpoint/2010/main" val="1212999818"/>
+      </p:ext>
+    </p:extLst>
+  </p:cSld>
+  <p:clrMapOvr>
+    <a:masterClrMapping/>
+  </p:clrMapOvr>
+</p:sldLayout>
+</file>
+
+<file path=ppt/slideLayouts/slideLayout19.xml><?xml version="1.0" encoding="utf-8"?>
+<p:sldLayout xmlns:a="http://schemas.openxmlformats.org/drawingml/2006/main" xmlns:r="http://schemas.openxmlformats.org/officeDocument/2006/relationships" xmlns:p="http://schemas.openxmlformats.org/presentationml/2006/main" type="blank" preserve="1">
+  <p:cSld name="slidekit · Agenda">
+    <p:bg>
+      <p:bgPr>
+        <a:solidFill>
+          <a:srgbClr val="FFFFFF"/>
+        </a:solidFill>
+        <a:effectLst/>
+      </p:bgPr>
+    </p:bg>
+    <p:spTree>
+      <p:nvGrpSpPr>
+        <p:cNvPr id="1" name=""/>
+        <p:cNvGrpSpPr/>
+        <p:nvPr/>
+      </p:nvGrpSpPr>
+      <p:grpSpPr>
+        <a:xfrm>
+          <a:off x="0" y="0"/>
+          <a:ext cx="0" cy="0"/>
+          <a:chOff x="0" y="0"/>
+          <a:chExt cx="0" cy="0"/>
+        </a:xfrm>
+      </p:grpSpPr>
+      <p:sp>
+        <p:nvSpPr>
+          <p:cNvPr id="4" name="Slide Number Placeholder 3"/>
+          <p:cNvSpPr>
+            <a:spLocks noGrp="1"/>
+          </p:cNvSpPr>
+          <p:nvPr>
+            <p:ph type="sldNum" sz="quarter" idx="12"/>
+          </p:nvPr>
+        </p:nvSpPr>
+        <p:spPr>
+          <a:xfrm>
+            <a:off x="11186160" y="6035040"/>
+            <a:ext cx="548640" cy="365760"/>
+          </a:xfrm>
+        </p:spPr>
+        <p:txBody>
+          <a:bodyPr/>
+          <a:lstStyle/>
+          <a:p>
+            <a:fld id="{C1FF6DA9-008F-8B48-92A6-B652298478BF}" type="slidenum">
+              <a:rPr lang="en-US" smtClean="0"/>
+              <a:t>‹#›</a:t>
+            </a:fld>
+            <a:endParaRPr lang="en-US"/>
+          </a:p>
+        </p:txBody>
+      </p:sp>
+      <p:sp>
+        <p:nvSpPr>
+          <p:cNvPr id="5" name="TextBox 4"/>
+          <p:cNvSpPr/>
+          <p:nvPr>
+            <p:ph type="title"/>
+          </p:nvPr>
+        </p:nvSpPr>
+        <p:spPr>
+          <a:xfrm>
+            <a:off x="457200" y="457200"/>
+            <a:ext cx="11277600" cy="768096"/>
+          </a:xfrm>
+          <a:prstGeom prst="rect">
+            <a:avLst/>
+          </a:prstGeom>
+          <a:noFill/>
+        </p:spPr>
+        <p:txBody>
+          <a:bodyPr wrap="none" lIns="0" rIns="0">
+            <a:noAutofit/>
+          </a:bodyPr>
+          <a:lstStyle/>
+          <a:p>
+            <a:pPr algn="l"/>
+            <a:r>
+              <a:rPr sz="4200" b="1" i="0">
+                <a:solidFill>
+                  <a:srgbClr val="0072CE"/>
+                </a:solidFill>
+                <a:latin typeface="Arial"/>
+              </a:rPr>
+              <a:t>What We Will Cover</a:t>
+            </a:r>
+          </a:p>
+        </p:txBody>
+      </p:sp>
+      <p:sp>
+        <p:nvSpPr>
+          <p:cNvPr id="6" name="Rectangle 5"/>
+          <p:cNvSpPr/>
+          <p:nvPr>
+            <p:ph type="body" idx="1"/>
+          </p:nvPr>
+        </p:nvSpPr>
+        <p:spPr>
+          <a:xfrm>
+            <a:off x="457200" y="1280160"/>
+            <a:ext cx="11277600" cy="64008"/>
+          </a:xfrm>
+          <a:prstGeom prst="rect">
+            <a:avLst/>
+          </a:prstGeom>
+          <a:solidFill>
+            <a:srgbClr val="0072CE"/>
+          </a:solidFill>
+          <a:ln>
+            <a:noFill/>
+          </a:ln>
+          <a:effectLst/>
+        </p:spPr>
+        <p:txBody>
+          <a:bodyPr rtlCol="0" anchor="ctr"/>
+          <a:lstStyle/>
+          <a:p>
+            <a:pPr algn="ctr"/>
+          </a:p>
+        </p:txBody>
+      </p:sp>
+      <p:sp>
+        <p:nvSpPr>
+          <p:cNvPr id="7" name="TextBox 6"/>
+          <p:cNvSpPr/>
+          <p:nvPr>
+            <p:ph type="body" idx="2"/>
+          </p:nvPr>
+        </p:nvSpPr>
+        <p:spPr>
+          <a:xfrm>
+            <a:off x="457200" y="1618488"/>
+            <a:ext cx="951348" cy="518159"/>
+          </a:xfrm>
+          <a:prstGeom prst="rect">
+            <a:avLst/>
+          </a:prstGeom>
+          <a:noFill/>
+        </p:spPr>
+        <p:txBody>
+          <a:bodyPr wrap="none" lIns="0" rIns="0">
+            <a:noAutofit/>
+          </a:bodyPr>
+          <a:lstStyle/>
+          <a:p>
+            <a:pPr algn="l"/>
+            <a:r>
+              <a:rPr sz="3400" b="1" i="0">
+                <a:solidFill>
+                  <a:srgbClr val="0072CE"/>
+                </a:solidFill>
+                <a:latin typeface="Arial"/>
+              </a:rPr>
+              <a:t>01</a:t>
+            </a:r>
+          </a:p>
+        </p:txBody>
+      </p:sp>
+      <p:sp>
+        <p:nvSpPr>
+          <p:cNvPr id="8" name="TextBox 7"/>
+          <p:cNvSpPr/>
+          <p:nvPr>
+            <p:ph type="body" idx="3"/>
+          </p:nvPr>
+        </p:nvSpPr>
+        <p:spPr>
+          <a:xfrm>
+            <a:off x="1371600" y="1618488"/>
+            <a:ext cx="10363200" cy="518159"/>
+          </a:xfrm>
+          <a:prstGeom prst="rect">
+            <a:avLst/>
+          </a:prstGeom>
+          <a:noFill/>
+        </p:spPr>
+        <p:txBody>
+          <a:bodyPr wrap="none" lIns="0" rIns="0">
+            <a:noAutofit/>
+          </a:bodyPr>
+          <a:lstStyle/>
+          <a:p>
+            <a:pPr algn="l"/>
+            <a:r>
+              <a:rPr sz="3400" b="0" i="0">
+                <a:solidFill>
+                  <a:srgbClr val="0A2240"/>
+                </a:solidFill>
+                <a:latin typeface="Arial"/>
+              </a:rPr>
+              <a:t>Performance against targets</a:t>
+            </a:r>
+          </a:p>
+        </p:txBody>
+      </p:sp>
+      <p:sp>
+        <p:nvSpPr>
+          <p:cNvPr id="9" name="TextBox 8"/>
+          <p:cNvSpPr/>
+          <p:nvPr>
+            <p:ph type="body" idx="4"/>
+          </p:nvPr>
+        </p:nvSpPr>
+        <p:spPr>
+          <a:xfrm>
+            <a:off x="457200" y="2501798"/>
+            <a:ext cx="951348" cy="518159"/>
+          </a:xfrm>
+          <a:prstGeom prst="rect">
+            <a:avLst/>
+          </a:prstGeom>
+          <a:noFill/>
+        </p:spPr>
+        <p:txBody>
+          <a:bodyPr wrap="none" lIns="0" rIns="0">
+            <a:noAutofit/>
+          </a:bodyPr>
+          <a:lstStyle/>
+          <a:p>
+            <a:pPr algn="l"/>
+            <a:r>
+              <a:rPr sz="3400" b="1" i="0">
+                <a:solidFill>
+                  <a:srgbClr val="0072CE"/>
+                </a:solidFill>
+                <a:latin typeface="Arial"/>
+              </a:rPr>
+              <a:t>02</a:t>
+            </a:r>
+          </a:p>
+        </p:txBody>
+      </p:sp>
+      <p:sp>
+        <p:nvSpPr>
+          <p:cNvPr id="10" name="TextBox 9"/>
+          <p:cNvSpPr/>
+          <p:nvPr>
+            <p:ph type="body" idx="5"/>
+          </p:nvPr>
+        </p:nvSpPr>
+        <p:spPr>
+          <a:xfrm>
+            <a:off x="1371600" y="2501798"/>
+            <a:ext cx="10363200" cy="518159"/>
+          </a:xfrm>
+          <a:prstGeom prst="rect">
+            <a:avLst/>
+          </a:prstGeom>
+          <a:noFill/>
+        </p:spPr>
+        <p:txBody>
+          <a:bodyPr wrap="none" lIns="0" rIns="0">
+            <a:noAutofit/>
+          </a:bodyPr>
+          <a:lstStyle/>
+          <a:p>
+            <a:pPr algn="l"/>
+            <a:r>
+              <a:rPr sz="3400" b="0" i="0">
+                <a:solidFill>
+                  <a:srgbClr val="0A2240"/>
+                </a:solidFill>
+                <a:latin typeface="Arial"/>
+              </a:rPr>
+              <a:t>Customer and market signals</a:t>
+            </a:r>
+          </a:p>
+        </p:txBody>
+      </p:sp>
+      <p:sp>
+        <p:nvSpPr>
+          <p:cNvPr id="11" name="TextBox 10"/>
+          <p:cNvSpPr/>
+          <p:nvPr>
+            <p:ph type="body" idx="6"/>
+          </p:nvPr>
+        </p:nvSpPr>
+        <p:spPr>
+          <a:xfrm>
+            <a:off x="457200" y="3385108"/>
+            <a:ext cx="951348" cy="518159"/>
+          </a:xfrm>
+          <a:prstGeom prst="rect">
+            <a:avLst/>
+          </a:prstGeom>
+          <a:noFill/>
+        </p:spPr>
+        <p:txBody>
+          <a:bodyPr wrap="none" lIns="0" rIns="0">
+            <a:noAutofit/>
+          </a:bodyPr>
+          <a:lstStyle/>
+          <a:p>
+            <a:pPr algn="l"/>
+            <a:r>
+              <a:rPr sz="3400" b="1" i="0">
+                <a:solidFill>
+                  <a:srgbClr val="0072CE"/>
+                </a:solidFill>
+                <a:latin typeface="Arial"/>
+              </a:rPr>
+              <a:t>03</a:t>
+            </a:r>
+          </a:p>
+        </p:txBody>
+      </p:sp>
+      <p:sp>
+        <p:nvSpPr>
+          <p:cNvPr id="12" name="TextBox 11"/>
+          <p:cNvSpPr/>
+          <p:nvPr>
+            <p:ph type="body" idx="7"/>
+          </p:nvPr>
+        </p:nvSpPr>
+        <p:spPr>
+          <a:xfrm>
+            <a:off x="1371600" y="3385108"/>
+            <a:ext cx="10363200" cy="518159"/>
+          </a:xfrm>
+          <a:prstGeom prst="rect">
+            <a:avLst/>
+          </a:prstGeom>
+          <a:noFill/>
+        </p:spPr>
+        <p:txBody>
+          <a:bodyPr wrap="none" lIns="0" rIns="0">
+            <a:noAutofit/>
+          </a:bodyPr>
+          <a:lstStyle/>
+          <a:p>
+            <a:pPr algn="l"/>
+            <a:r>
+              <a:rPr sz="3400" b="0" i="0">
+                <a:solidFill>
+                  <a:srgbClr val="0A2240"/>
+                </a:solidFill>
+                <a:latin typeface="Arial"/>
+              </a:rPr>
+              <a:t>Operational health and risks</a:t>
+            </a:r>
+          </a:p>
+        </p:txBody>
+      </p:sp>
+      <p:sp>
+        <p:nvSpPr>
+          <p:cNvPr id="13" name="TextBox 12"/>
+          <p:cNvSpPr/>
+          <p:nvPr>
+            <p:ph type="body" idx="8"/>
+          </p:nvPr>
+        </p:nvSpPr>
+        <p:spPr>
+          <a:xfrm>
+            <a:off x="457200" y="4268418"/>
+            <a:ext cx="951348" cy="518159"/>
+          </a:xfrm>
+          <a:prstGeom prst="rect">
+            <a:avLst/>
+          </a:prstGeom>
+          <a:noFill/>
+        </p:spPr>
+        <p:txBody>
+          <a:bodyPr wrap="none" lIns="0" rIns="0">
+            <a:noAutofit/>
+          </a:bodyPr>
+          <a:lstStyle/>
+          <a:p>
+            <a:pPr algn="l"/>
+            <a:r>
+              <a:rPr sz="3400" b="1" i="0">
+                <a:solidFill>
+                  <a:srgbClr val="0072CE"/>
+                </a:solidFill>
+                <a:latin typeface="Arial"/>
+              </a:rPr>
+              <a:t>04</a:t>
+            </a:r>
+          </a:p>
+        </p:txBody>
+      </p:sp>
+      <p:sp>
+        <p:nvSpPr>
+          <p:cNvPr id="14" name="TextBox 13"/>
+          <p:cNvSpPr/>
+          <p:nvPr>
+            <p:ph type="body" idx="9"/>
+          </p:nvPr>
+        </p:nvSpPr>
+        <p:spPr>
+          <a:xfrm>
+            <a:off x="1371600" y="4268418"/>
+            <a:ext cx="10363200" cy="518159"/>
+          </a:xfrm>
+          <a:prstGeom prst="rect">
+            <a:avLst/>
+          </a:prstGeom>
+          <a:noFill/>
+        </p:spPr>
+        <p:txBody>
+          <a:bodyPr wrap="none" lIns="0" rIns="0">
+            <a:noAutofit/>
+          </a:bodyPr>
+          <a:lstStyle/>
+          <a:p>
+            <a:pPr algn="l"/>
+            <a:r>
+              <a:rPr sz="3400" b="0" i="0">
+                <a:solidFill>
+                  <a:srgbClr val="0A2240"/>
+                </a:solidFill>
+                <a:latin typeface="Arial"/>
+              </a:rPr>
+              <a:t>Roadmap for next quarter</a:t>
+            </a:r>
+          </a:p>
+        </p:txBody>
+      </p:sp>
+      <p:sp>
+        <p:nvSpPr>
+          <p:cNvPr id="15" name="TextBox 14"/>
+          <p:cNvSpPr/>
+          <p:nvPr>
+            <p:ph type="body" idx="13"/>
+          </p:nvPr>
+        </p:nvSpPr>
+        <p:spPr>
+          <a:xfrm>
+            <a:off x="457200" y="5151728"/>
+            <a:ext cx="951348" cy="518159"/>
+          </a:xfrm>
+          <a:prstGeom prst="rect">
+            <a:avLst/>
+          </a:prstGeom>
+          <a:noFill/>
+        </p:spPr>
+        <p:txBody>
+          <a:bodyPr wrap="none" lIns="0" rIns="0">
+            <a:noAutofit/>
+          </a:bodyPr>
+          <a:lstStyle/>
+          <a:p>
+            <a:pPr algn="l"/>
+            <a:r>
+              <a:rPr sz="3400" b="1" i="0">
+                <a:solidFill>
+                  <a:srgbClr val="0072CE"/>
+                </a:solidFill>
+                <a:latin typeface="Arial"/>
+              </a:rPr>
+              <a:t>05</a:t>
+            </a:r>
+          </a:p>
+        </p:txBody>
+      </p:sp>
+      <p:sp>
+        <p:nvSpPr>
+          <p:cNvPr id="16" name="TextBox 15"/>
+          <p:cNvSpPr/>
+          <p:nvPr>
+            <p:ph type="body" idx="14"/>
+          </p:nvPr>
+        </p:nvSpPr>
+        <p:spPr>
+          <a:xfrm>
+            <a:off x="1371600" y="5151728"/>
+            <a:ext cx="10363200" cy="518159"/>
+          </a:xfrm>
+          <a:prstGeom prst="rect">
+            <a:avLst/>
+          </a:prstGeom>
+          <a:noFill/>
+        </p:spPr>
+        <p:txBody>
+          <a:bodyPr wrap="none" lIns="0" rIns="0">
+            <a:noAutofit/>
+          </a:bodyPr>
+          <a:lstStyle/>
+          <a:p>
+            <a:pPr algn="l"/>
+            <a:r>
+              <a:rPr sz="3400" b="0" i="0">
+                <a:solidFill>
+                  <a:srgbClr val="0A2240"/>
+                </a:solidFill>
+                <a:latin typeface="Arial"/>
+              </a:rPr>
+              <a:t>Decisions we need today</a:t>
             </a:r>
           </a:p>
         </p:txBody>
@@ -6791,511 +6826,6 @@
 
 <file path=ppt/slideLayouts/slideLayout20.xml><?xml version="1.0" encoding="utf-8"?>
 <p:sldLayout xmlns:a="http://schemas.openxmlformats.org/drawingml/2006/main" xmlns:r="http://schemas.openxmlformats.org/officeDocument/2006/relationships" xmlns:p="http://schemas.openxmlformats.org/presentationml/2006/main" type="blank" preserve="1">
-  <p:cSld name="slidekit · Agenda">
-    <p:bg>
-      <p:bgPr>
-        <a:solidFill>
-          <a:srgbClr val="FFFFFF"/>
-        </a:solidFill>
-        <a:effectLst/>
-      </p:bgPr>
-    </p:bg>
-    <p:spTree>
-      <p:nvGrpSpPr>
-        <p:cNvPr id="1" name=""/>
-        <p:cNvGrpSpPr/>
-        <p:nvPr/>
-      </p:nvGrpSpPr>
-      <p:grpSpPr>
-        <a:xfrm>
-          <a:off x="0" y="0"/>
-          <a:ext cx="0" cy="0"/>
-          <a:chOff x="0" y="0"/>
-          <a:chExt cx="0" cy="0"/>
-        </a:xfrm>
-      </p:grpSpPr>
-      <p:sp>
-        <p:nvSpPr>
-          <p:cNvPr id="4" name="Slide Number Placeholder 3"/>
-          <p:cNvSpPr>
-            <a:spLocks noGrp="1"/>
-          </p:cNvSpPr>
-          <p:nvPr>
-            <p:ph type="sldNum" sz="quarter" idx="12"/>
-          </p:nvPr>
-        </p:nvSpPr>
-        <p:spPr>
-          <a:xfrm>
-            <a:off x="11186160" y="6035040"/>
-            <a:ext cx="548640" cy="365760"/>
-          </a:xfrm>
-        </p:spPr>
-        <p:txBody>
-          <a:bodyPr/>
-          <a:lstStyle/>
-          <a:p>
-            <a:fld id="{C1FF6DA9-008F-8B48-92A6-B652298478BF}" type="slidenum">
-              <a:rPr lang="en-US" smtClean="0"/>
-              <a:t>‹#›</a:t>
-            </a:fld>
-            <a:endParaRPr lang="en-US"/>
-          </a:p>
-        </p:txBody>
-      </p:sp>
-      <p:sp>
-        <p:nvSpPr>
-          <p:cNvPr id="5" name="TextBox 4"/>
-          <p:cNvSpPr/>
-          <p:nvPr>
-            <p:ph type="title"/>
-          </p:nvPr>
-        </p:nvSpPr>
-        <p:spPr>
-          <a:xfrm>
-            <a:off x="457200" y="457200"/>
-            <a:ext cx="11277600" cy="768096"/>
-          </a:xfrm>
-          <a:prstGeom prst="rect">
-            <a:avLst/>
-          </a:prstGeom>
-          <a:noFill/>
-        </p:spPr>
-        <p:txBody>
-          <a:bodyPr wrap="none" lIns="0" rIns="0">
-            <a:noAutofit/>
-          </a:bodyPr>
-          <a:lstStyle/>
-          <a:p>
-            <a:pPr algn="l"/>
-            <a:r>
-              <a:rPr sz="4200" b="1" i="0">
-                <a:solidFill>
-                  <a:srgbClr val="0072CE"/>
-                </a:solidFill>
-                <a:latin typeface="Arial"/>
-              </a:rPr>
-              <a:t>What We Will Cover</a:t>
-            </a:r>
-          </a:p>
-        </p:txBody>
-      </p:sp>
-      <p:sp>
-        <p:nvSpPr>
-          <p:cNvPr id="6" name="Rectangle 5"/>
-          <p:cNvSpPr/>
-          <p:nvPr>
-            <p:ph type="body" idx="1"/>
-          </p:nvPr>
-        </p:nvSpPr>
-        <p:spPr>
-          <a:xfrm>
-            <a:off x="457200" y="1280160"/>
-            <a:ext cx="11277600" cy="64008"/>
-          </a:xfrm>
-          <a:prstGeom prst="rect">
-            <a:avLst/>
-          </a:prstGeom>
-          <a:solidFill>
-            <a:srgbClr val="0072CE"/>
-          </a:solidFill>
-          <a:ln>
-            <a:noFill/>
-          </a:ln>
-          <a:effectLst/>
-        </p:spPr>
-        <p:txBody>
-          <a:bodyPr rtlCol="0" anchor="ctr"/>
-          <a:lstStyle/>
-          <a:p>
-            <a:pPr algn="ctr"/>
-          </a:p>
-        </p:txBody>
-      </p:sp>
-      <p:sp>
-        <p:nvSpPr>
-          <p:cNvPr id="7" name="TextBox 6"/>
-          <p:cNvSpPr/>
-          <p:nvPr>
-            <p:ph type="body" idx="2"/>
-          </p:nvPr>
-        </p:nvSpPr>
-        <p:spPr>
-          <a:xfrm>
-            <a:off x="457200" y="1618488"/>
-            <a:ext cx="951348" cy="518159"/>
-          </a:xfrm>
-          <a:prstGeom prst="rect">
-            <a:avLst/>
-          </a:prstGeom>
-          <a:noFill/>
-        </p:spPr>
-        <p:txBody>
-          <a:bodyPr wrap="none" lIns="0" rIns="0">
-            <a:noAutofit/>
-          </a:bodyPr>
-          <a:lstStyle/>
-          <a:p>
-            <a:pPr algn="l"/>
-            <a:r>
-              <a:rPr sz="3400" b="1" i="0">
-                <a:solidFill>
-                  <a:srgbClr val="0072CE"/>
-                </a:solidFill>
-                <a:latin typeface="Arial"/>
-              </a:rPr>
-              <a:t>01</a:t>
-            </a:r>
-          </a:p>
-        </p:txBody>
-      </p:sp>
-      <p:sp>
-        <p:nvSpPr>
-          <p:cNvPr id="8" name="TextBox 7"/>
-          <p:cNvSpPr/>
-          <p:nvPr>
-            <p:ph type="body" idx="3"/>
-          </p:nvPr>
-        </p:nvSpPr>
-        <p:spPr>
-          <a:xfrm>
-            <a:off x="1371600" y="1618488"/>
-            <a:ext cx="10363200" cy="518159"/>
-          </a:xfrm>
-          <a:prstGeom prst="rect">
-            <a:avLst/>
-          </a:prstGeom>
-          <a:noFill/>
-        </p:spPr>
-        <p:txBody>
-          <a:bodyPr wrap="none" lIns="0" rIns="0">
-            <a:noAutofit/>
-          </a:bodyPr>
-          <a:lstStyle/>
-          <a:p>
-            <a:pPr algn="l"/>
-            <a:r>
-              <a:rPr sz="3400" b="0" i="0">
-                <a:solidFill>
-                  <a:srgbClr val="0A2240"/>
-                </a:solidFill>
-                <a:latin typeface="Arial"/>
-              </a:rPr>
-              <a:t>Performance against targets</a:t>
-            </a:r>
-          </a:p>
-        </p:txBody>
-      </p:sp>
-      <p:sp>
-        <p:nvSpPr>
-          <p:cNvPr id="9" name="TextBox 8"/>
-          <p:cNvSpPr/>
-          <p:nvPr>
-            <p:ph type="body" idx="4"/>
-          </p:nvPr>
-        </p:nvSpPr>
-        <p:spPr>
-          <a:xfrm>
-            <a:off x="457200" y="2501798"/>
-            <a:ext cx="951348" cy="518159"/>
-          </a:xfrm>
-          <a:prstGeom prst="rect">
-            <a:avLst/>
-          </a:prstGeom>
-          <a:noFill/>
-        </p:spPr>
-        <p:txBody>
-          <a:bodyPr wrap="none" lIns="0" rIns="0">
-            <a:noAutofit/>
-          </a:bodyPr>
-          <a:lstStyle/>
-          <a:p>
-            <a:pPr algn="l"/>
-            <a:r>
-              <a:rPr sz="3400" b="1" i="0">
-                <a:solidFill>
-                  <a:srgbClr val="0072CE"/>
-                </a:solidFill>
-                <a:latin typeface="Arial"/>
-              </a:rPr>
-              <a:t>02</a:t>
-            </a:r>
-          </a:p>
-        </p:txBody>
-      </p:sp>
-      <p:sp>
-        <p:nvSpPr>
-          <p:cNvPr id="10" name="TextBox 9"/>
-          <p:cNvSpPr/>
-          <p:nvPr>
-            <p:ph type="body" idx="5"/>
-          </p:nvPr>
-        </p:nvSpPr>
-        <p:spPr>
-          <a:xfrm>
-            <a:off x="1371600" y="2501798"/>
-            <a:ext cx="10363200" cy="518159"/>
-          </a:xfrm>
-          <a:prstGeom prst="rect">
-            <a:avLst/>
-          </a:prstGeom>
-          <a:noFill/>
-        </p:spPr>
-        <p:txBody>
-          <a:bodyPr wrap="none" lIns="0" rIns="0">
-            <a:noAutofit/>
-          </a:bodyPr>
-          <a:lstStyle/>
-          <a:p>
-            <a:pPr algn="l"/>
-            <a:r>
-              <a:rPr sz="3400" b="0" i="0">
-                <a:solidFill>
-                  <a:srgbClr val="0A2240"/>
-                </a:solidFill>
-                <a:latin typeface="Arial"/>
-              </a:rPr>
-              <a:t>Customer and market signals</a:t>
-            </a:r>
-          </a:p>
-        </p:txBody>
-      </p:sp>
-      <p:sp>
-        <p:nvSpPr>
-          <p:cNvPr id="11" name="TextBox 10"/>
-          <p:cNvSpPr/>
-          <p:nvPr>
-            <p:ph type="body" idx="6"/>
-          </p:nvPr>
-        </p:nvSpPr>
-        <p:spPr>
-          <a:xfrm>
-            <a:off x="457200" y="3385108"/>
-            <a:ext cx="951348" cy="518159"/>
-          </a:xfrm>
-          <a:prstGeom prst="rect">
-            <a:avLst/>
-          </a:prstGeom>
-          <a:noFill/>
-        </p:spPr>
-        <p:txBody>
-          <a:bodyPr wrap="none" lIns="0" rIns="0">
-            <a:noAutofit/>
-          </a:bodyPr>
-          <a:lstStyle/>
-          <a:p>
-            <a:pPr algn="l"/>
-            <a:r>
-              <a:rPr sz="3400" b="1" i="0">
-                <a:solidFill>
-                  <a:srgbClr val="0072CE"/>
-                </a:solidFill>
-                <a:latin typeface="Arial"/>
-              </a:rPr>
-              <a:t>03</a:t>
-            </a:r>
-          </a:p>
-        </p:txBody>
-      </p:sp>
-      <p:sp>
-        <p:nvSpPr>
-          <p:cNvPr id="12" name="TextBox 11"/>
-          <p:cNvSpPr/>
-          <p:nvPr>
-            <p:ph type="body" idx="7"/>
-          </p:nvPr>
-        </p:nvSpPr>
-        <p:spPr>
-          <a:xfrm>
-            <a:off x="1371600" y="3385108"/>
-            <a:ext cx="10363200" cy="518159"/>
-          </a:xfrm>
-          <a:prstGeom prst="rect">
-            <a:avLst/>
-          </a:prstGeom>
-          <a:noFill/>
-        </p:spPr>
-        <p:txBody>
-          <a:bodyPr wrap="none" lIns="0" rIns="0">
-            <a:noAutofit/>
-          </a:bodyPr>
-          <a:lstStyle/>
-          <a:p>
-            <a:pPr algn="l"/>
-            <a:r>
-              <a:rPr sz="3400" b="0" i="0">
-                <a:solidFill>
-                  <a:srgbClr val="0A2240"/>
-                </a:solidFill>
-                <a:latin typeface="Arial"/>
-              </a:rPr>
-              <a:t>Operational health and risks</a:t>
-            </a:r>
-          </a:p>
-        </p:txBody>
-      </p:sp>
-      <p:sp>
-        <p:nvSpPr>
-          <p:cNvPr id="13" name="TextBox 12"/>
-          <p:cNvSpPr/>
-          <p:nvPr>
-            <p:ph type="body" idx="8"/>
-          </p:nvPr>
-        </p:nvSpPr>
-        <p:spPr>
-          <a:xfrm>
-            <a:off x="457200" y="4268418"/>
-            <a:ext cx="951348" cy="518159"/>
-          </a:xfrm>
-          <a:prstGeom prst="rect">
-            <a:avLst/>
-          </a:prstGeom>
-          <a:noFill/>
-        </p:spPr>
-        <p:txBody>
-          <a:bodyPr wrap="none" lIns="0" rIns="0">
-            <a:noAutofit/>
-          </a:bodyPr>
-          <a:lstStyle/>
-          <a:p>
-            <a:pPr algn="l"/>
-            <a:r>
-              <a:rPr sz="3400" b="1" i="0">
-                <a:solidFill>
-                  <a:srgbClr val="0072CE"/>
-                </a:solidFill>
-                <a:latin typeface="Arial"/>
-              </a:rPr>
-              <a:t>04</a:t>
-            </a:r>
-          </a:p>
-        </p:txBody>
-      </p:sp>
-      <p:sp>
-        <p:nvSpPr>
-          <p:cNvPr id="14" name="TextBox 13"/>
-          <p:cNvSpPr/>
-          <p:nvPr>
-            <p:ph type="body" idx="9"/>
-          </p:nvPr>
-        </p:nvSpPr>
-        <p:spPr>
-          <a:xfrm>
-            <a:off x="1371600" y="4268418"/>
-            <a:ext cx="10363200" cy="518159"/>
-          </a:xfrm>
-          <a:prstGeom prst="rect">
-            <a:avLst/>
-          </a:prstGeom>
-          <a:noFill/>
-        </p:spPr>
-        <p:txBody>
-          <a:bodyPr wrap="none" lIns="0" rIns="0">
-            <a:noAutofit/>
-          </a:bodyPr>
-          <a:lstStyle/>
-          <a:p>
-            <a:pPr algn="l"/>
-            <a:r>
-              <a:rPr sz="3400" b="0" i="0">
-                <a:solidFill>
-                  <a:srgbClr val="0A2240"/>
-                </a:solidFill>
-                <a:latin typeface="Arial"/>
-              </a:rPr>
-              <a:t>Roadmap for next quarter</a:t>
-            </a:r>
-          </a:p>
-        </p:txBody>
-      </p:sp>
-      <p:sp>
-        <p:nvSpPr>
-          <p:cNvPr id="15" name="TextBox 14"/>
-          <p:cNvSpPr/>
-          <p:nvPr>
-            <p:ph type="body" idx="13"/>
-          </p:nvPr>
-        </p:nvSpPr>
-        <p:spPr>
-          <a:xfrm>
-            <a:off x="457200" y="5151728"/>
-            <a:ext cx="951348" cy="518159"/>
-          </a:xfrm>
-          <a:prstGeom prst="rect">
-            <a:avLst/>
-          </a:prstGeom>
-          <a:noFill/>
-        </p:spPr>
-        <p:txBody>
-          <a:bodyPr wrap="none" lIns="0" rIns="0">
-            <a:noAutofit/>
-          </a:bodyPr>
-          <a:lstStyle/>
-          <a:p>
-            <a:pPr algn="l"/>
-            <a:r>
-              <a:rPr sz="3400" b="1" i="0">
-                <a:solidFill>
-                  <a:srgbClr val="0072CE"/>
-                </a:solidFill>
-                <a:latin typeface="Arial"/>
-              </a:rPr>
-              <a:t>05</a:t>
-            </a:r>
-          </a:p>
-        </p:txBody>
-      </p:sp>
-      <p:sp>
-        <p:nvSpPr>
-          <p:cNvPr id="16" name="TextBox 15"/>
-          <p:cNvSpPr/>
-          <p:nvPr>
-            <p:ph type="body" idx="14"/>
-          </p:nvPr>
-        </p:nvSpPr>
-        <p:spPr>
-          <a:xfrm>
-            <a:off x="1371600" y="5151728"/>
-            <a:ext cx="10363200" cy="518159"/>
-          </a:xfrm>
-          <a:prstGeom prst="rect">
-            <a:avLst/>
-          </a:prstGeom>
-          <a:noFill/>
-        </p:spPr>
-        <p:txBody>
-          <a:bodyPr wrap="none" lIns="0" rIns="0">
-            <a:noAutofit/>
-          </a:bodyPr>
-          <a:lstStyle/>
-          <a:p>
-            <a:pPr algn="l"/>
-            <a:r>
-              <a:rPr sz="3400" b="0" i="0">
-                <a:solidFill>
-                  <a:srgbClr val="0A2240"/>
-                </a:solidFill>
-                <a:latin typeface="Arial"/>
-              </a:rPr>
-              <a:t>Decisions we need today</a:t>
-            </a:r>
-          </a:p>
-        </p:txBody>
-      </p:sp>
-    </p:spTree>
-    <p:extLst>
-      <p:ext uri="{BB962C8B-B14F-4D97-AF65-F5344CB8AC3E}">
-        <p14:creationId xmlns:p14="http://schemas.microsoft.com/office/powerpoint/2010/main" val="1212999818"/>
-      </p:ext>
-    </p:extLst>
-  </p:cSld>
-  <p:clrMapOvr>
-    <a:masterClrMapping/>
-  </p:clrMapOvr>
-</p:sldLayout>
-</file>
-
-<file path=ppt/slideLayouts/slideLayout21.xml><?xml version="1.0" encoding="utf-8"?>
-<p:sldLayout xmlns:a="http://schemas.openxmlformats.org/drawingml/2006/main" xmlns:r="http://schemas.openxmlformats.org/officeDocument/2006/relationships" xmlns:p="http://schemas.openxmlformats.org/presentationml/2006/main" type="blank" preserve="1">
   <p:cSld name="slidekit · Big Number">
     <p:bg>
       <p:bgPr>
@@ -7466,7 +6996,7 @@
 </p:sldLayout>
 </file>
 
-<file path=ppt/slideLayouts/slideLayout22.xml><?xml version="1.0" encoding="utf-8"?>
+<file path=ppt/slideLayouts/slideLayout21.xml><?xml version="1.0" encoding="utf-8"?>
 <p:sldLayout xmlns:a="http://schemas.openxmlformats.org/drawingml/2006/main" xmlns:r="http://schemas.openxmlformats.org/officeDocument/2006/relationships" xmlns:p="http://schemas.openxmlformats.org/presentationml/2006/main" type="blank" preserve="1">
   <p:cSld name="slidekit · Pull Quote">
     <p:bg>
@@ -7529,8 +7059,8 @@
         </p:nvSpPr>
         <p:spPr>
           <a:xfrm>
-            <a:off x="457200" y="2301240"/>
-            <a:ext cx="128016" cy="2255520"/>
+            <a:off x="457200" y="2621280"/>
+            <a:ext cx="128016" cy="1615440"/>
           </a:xfrm>
           <a:prstGeom prst="rect">
             <a:avLst/>
@@ -7561,16 +7091,16 @@
         </p:nvSpPr>
         <p:spPr>
           <a:xfrm>
-            <a:off x="996696" y="2301240"/>
-            <a:ext cx="10738104" cy="1371600"/>
-          </a:xfrm>
-          <a:prstGeom prst="rect">
-            <a:avLst/>
-          </a:prstGeom>
-          <a:noFill/>
-        </p:spPr>
-        <p:txBody>
-          <a:bodyPr wrap="square" lIns="0" rIns="0">
+            <a:off x="996696" y="2621280"/>
+            <a:ext cx="11195304" cy="731520"/>
+          </a:xfrm>
+          <a:prstGeom prst="rect">
+            <a:avLst/>
+          </a:prstGeom>
+          <a:noFill/>
+        </p:spPr>
+        <p:txBody>
+          <a:bodyPr wrap="none" lIns="0" rIns="0">
             <a:noAutofit/>
           </a:bodyPr>
           <a:lstStyle/>
@@ -7583,7 +7113,7 @@
                 </a:solidFill>
                 <a:latin typeface="Arial"/>
               </a:rPr>
-              <a:t>"We stopped buying tools and started buying outcomes."</a:t>
+              <a:t>"We buy outcomes, not tools."</a:t>
             </a:r>
           </a:p>
         </p:txBody>
@@ -7598,7 +7128,7 @@
         </p:nvSpPr>
         <p:spPr>
           <a:xfrm>
-            <a:off x="996696" y="3947160"/>
+            <a:off x="996696" y="3627120"/>
             <a:ext cx="11195304" cy="609600"/>
           </a:xfrm>
           <a:prstGeom prst="rect">
@@ -7616,7 +7146,7 @@
             <a:r>
               <a:rPr sz="3400" b="0" i="0">
                 <a:solidFill>
-                  <a:srgbClr val="5B6B82"/>
+                  <a:srgbClr val="0A2240"/>
                 </a:solidFill>
                 <a:latin typeface="Arial"/>
               </a:rPr>
@@ -7638,7 +7168,7 @@
 </p:sldLayout>
 </file>
 
-<file path=ppt/slideLayouts/slideLayout23.xml><?xml version="1.0" encoding="utf-8"?>
+<file path=ppt/slideLayouts/slideLayout22.xml><?xml version="1.0" encoding="utf-8"?>
 <p:sldLayout xmlns:a="http://schemas.openxmlformats.org/drawingml/2006/main" xmlns:r="http://schemas.openxmlformats.org/officeDocument/2006/relationships" xmlns:p="http://schemas.openxmlformats.org/presentationml/2006/main" type="blank" preserve="1">
   <p:cSld name="slidekit · Definition">
     <p:bg>
@@ -7701,8 +7231,8 @@
         </p:nvSpPr>
         <p:spPr>
           <a:xfrm>
-            <a:off x="457200" y="1965960"/>
-            <a:ext cx="128016" cy="2926080"/>
+            <a:off x="457200" y="2484120"/>
+            <a:ext cx="128016" cy="1889760"/>
           </a:xfrm>
           <a:prstGeom prst="rect">
             <a:avLst/>
@@ -7733,7 +7263,7 @@
         </p:nvSpPr>
         <p:spPr>
           <a:xfrm>
-            <a:off x="996696" y="1965960"/>
+            <a:off x="996696" y="2484120"/>
             <a:ext cx="11195304" cy="1005840"/>
           </a:xfrm>
           <a:prstGeom prst="rect">
@@ -7770,16 +7300,16 @@
         </p:nvSpPr>
         <p:spPr>
           <a:xfrm>
-            <a:off x="996696" y="3246120"/>
-            <a:ext cx="10738104" cy="1645920"/>
-          </a:xfrm>
-          <a:prstGeom prst="rect">
-            <a:avLst/>
-          </a:prstGeom>
-          <a:noFill/>
-        </p:spPr>
-        <p:txBody>
-          <a:bodyPr wrap="square" lIns="0" rIns="0">
+            <a:off x="996696" y="3764280"/>
+            <a:ext cx="11195304" cy="609600"/>
+          </a:xfrm>
+          <a:prstGeom prst="rect">
+            <a:avLst/>
+          </a:prstGeom>
+          <a:noFill/>
+        </p:spPr>
+        <p:txBody>
+          <a:bodyPr wrap="none" lIns="0" rIns="0">
             <a:noAutofit/>
           </a:bodyPr>
           <a:lstStyle/>
@@ -7792,7 +7322,7 @@
                 </a:solidFill>
                 <a:latin typeface="Arial"/>
               </a:rPr>
-              <a:t>The percentage of recurring revenue retained from existing customers over a period, including expansion and after churn.</a:t>
+              <a:t>Revenue kept from existing customers.</a:t>
             </a:r>
           </a:p>
         </p:txBody>
@@ -7810,7 +7340,7 @@
 </p:sldLayout>
 </file>
 
-<file path=ppt/slideLayouts/slideLayout24.xml><?xml version="1.0" encoding="utf-8"?>
+<file path=ppt/slideLayouts/slideLayout23.xml><?xml version="1.0" encoding="utf-8"?>
 <p:sldLayout xmlns:a="http://schemas.openxmlformats.org/drawingml/2006/main" xmlns:r="http://schemas.openxmlformats.org/officeDocument/2006/relationships" xmlns:p="http://schemas.openxmlformats.org/presentationml/2006/main" type="blank" preserve="1">
   <p:cSld name="slidekit · Question">
     <p:bg>
@@ -7873,8 +7403,8 @@
         </p:nvSpPr>
         <p:spPr>
           <a:xfrm>
-            <a:off x="457200" y="2011680"/>
-            <a:ext cx="128016" cy="2834640"/>
+            <a:off x="457200" y="2926080"/>
+            <a:ext cx="128016" cy="1005840"/>
           </a:xfrm>
           <a:prstGeom prst="rect">
             <a:avLst/>
@@ -7905,16 +7435,16 @@
         </p:nvSpPr>
         <p:spPr>
           <a:xfrm>
-            <a:off x="996696" y="2011680"/>
-            <a:ext cx="10738104" cy="2834640"/>
-          </a:xfrm>
-          <a:prstGeom prst="rect">
-            <a:avLst/>
-          </a:prstGeom>
-          <a:noFill/>
-        </p:spPr>
-        <p:txBody>
-          <a:bodyPr wrap="square" lIns="0" rIns="0">
+            <a:off x="996696" y="2926080"/>
+            <a:ext cx="11195304" cy="1005840"/>
+          </a:xfrm>
+          <a:prstGeom prst="rect">
+            <a:avLst/>
+          </a:prstGeom>
+          <a:noFill/>
+        </p:spPr>
+        <p:txBody>
+          <a:bodyPr wrap="none" lIns="0" rIns="0">
             <a:noAutofit/>
           </a:bodyPr>
           <a:lstStyle/>
@@ -7927,7 +7457,7 @@
                 </a:solidFill>
                 <a:latin typeface="Arial"/>
               </a:rPr>
-              <a:t>What would we build if we trusted our customers completely?</a:t>
+              <a:t>What if we trusted users?</a:t>
             </a:r>
           </a:p>
         </p:txBody>
@@ -7945,7 +7475,7 @@
 </p:sldLayout>
 </file>
 
-<file path=ppt/slideLayouts/slideLayout25.xml><?xml version="1.0" encoding="utf-8"?>
+<file path=ppt/slideLayouts/slideLayout24.xml><?xml version="1.0" encoding="utf-8"?>
 <p:sldLayout xmlns:a="http://schemas.openxmlformats.org/drawingml/2006/main" xmlns:r="http://schemas.openxmlformats.org/officeDocument/2006/relationships" xmlns:p="http://schemas.openxmlformats.org/presentationml/2006/main" type="blank" preserve="1">
   <p:cSld name="slidekit · Bullet List">
     <p:bg>
@@ -8159,7 +7689,7 @@
 </p:sldLayout>
 </file>
 
-<file path=ppt/slideLayouts/slideLayout26.xml><?xml version="1.0" encoding="utf-8"?>
+<file path=ppt/slideLayouts/slideLayout25.xml><?xml version="1.0" encoding="utf-8"?>
 <p:sldLayout xmlns:a="http://schemas.openxmlformats.org/drawingml/2006/main" xmlns:r="http://schemas.openxmlformats.org/officeDocument/2006/relationships" xmlns:p="http://schemas.openxmlformats.org/presentationml/2006/main" type="blank" preserve="1">
   <p:cSld name="slidekit · Code Block">
     <p:bg>
@@ -8229,7 +7759,7 @@
             <a:avLst/>
           </a:prstGeom>
           <a:solidFill>
-            <a:srgbClr val="FF5F56"/>
+            <a:srgbClr val="FFFFFF"/>
           </a:solidFill>
           <a:ln>
             <a:noFill/>
@@ -8261,7 +7791,7 @@
             <a:avLst/>
           </a:prstGeom>
           <a:solidFill>
-            <a:srgbClr val="FFBD2E"/>
+            <a:srgbClr val="FFFFFF"/>
           </a:solidFill>
           <a:ln>
             <a:noFill/>
@@ -8293,7 +7823,7 @@
             <a:avLst/>
           </a:prstGeom>
           <a:solidFill>
-            <a:srgbClr val="27C93F"/>
+            <a:srgbClr val="FFFFFF"/>
           </a:solidFill>
           <a:ln>
             <a:noFill/>
@@ -8336,7 +7866,7 @@
             <a:r>
               <a:rPr sz="4200" b="0" i="0">
                 <a:solidFill>
-                  <a:srgbClr val="D4D4D4"/>
+                  <a:srgbClr val="FFFFFF"/>
                 </a:solidFill>
                 <a:latin typeface="Arial"/>
               </a:rPr>
@@ -8373,7 +7903,7 @@
             <a:r>
               <a:rPr sz="3400" b="0" i="0">
                 <a:solidFill>
-                  <a:srgbClr val="6A9955"/>
+                  <a:srgbClr val="FFFFFF"/>
                 </a:solidFill>
                 <a:latin typeface="Arial"/>
               </a:rPr>
@@ -8430,7 +7960,7 @@
         <p:spPr>
           <a:xfrm>
             <a:off x="1057461" y="2356103"/>
-            <a:ext cx="302848" cy="518159"/>
+            <a:ext cx="2524382" cy="518159"/>
           </a:xfrm>
           <a:prstGeom prst="rect">
             <a:avLst/>
@@ -8447,11 +7977,11 @@
             <a:r>
               <a:rPr sz="3400" b="0" i="0">
                 <a:solidFill>
-                  <a:srgbClr val="D4D4D4"/>
-                </a:solidFill>
-                <a:latin typeface="Arial"/>
-              </a:rPr>
-              <a:t> </a:t>
+                  <a:srgbClr val="FFFFFF"/>
+                </a:solidFill>
+                <a:latin typeface="Arial"/>
+              </a:rPr>
+              <a:t> main():</a:t>
             </a:r>
           </a:p>
         </p:txBody>
@@ -8466,8 +7996,8 @@
         </p:nvSpPr>
         <p:spPr>
           <a:xfrm>
-            <a:off x="1177429" y="2356103"/>
-            <a:ext cx="1680348" cy="518159"/>
+            <a:off x="457200" y="2874262"/>
+            <a:ext cx="7046475" cy="518159"/>
           </a:xfrm>
           <a:prstGeom prst="rect">
             <a:avLst/>
@@ -8484,11 +8014,11 @@
             <a:r>
               <a:rPr sz="3400" b="0" i="0">
                 <a:solidFill>
-                  <a:srgbClr val="DCDCAA"/>
-                </a:solidFill>
-                <a:latin typeface="Arial"/>
-              </a:rPr>
-              <a:t>main</a:t>
+                  <a:srgbClr val="FFFFFF"/>
+                </a:solidFill>
+                <a:latin typeface="Arial"/>
+              </a:rPr>
+              <a:t>    print("Hello, world!")</a:t>
             </a:r>
           </a:p>
         </p:txBody>
@@ -8503,8 +8033,8 @@
         </p:nvSpPr>
         <p:spPr>
           <a:xfrm>
-            <a:off x="2113347" y="2356103"/>
-            <a:ext cx="834964" cy="518159"/>
+            <a:off x="457200" y="3910580"/>
+            <a:ext cx="2140486" cy="518159"/>
           </a:xfrm>
           <a:prstGeom prst="rect">
             <a:avLst/>
@@ -8521,11 +8051,11 @@
             <a:r>
               <a:rPr sz="3400" b="0" i="0">
                 <a:solidFill>
-                  <a:srgbClr val="D4D4D4"/>
-                </a:solidFill>
-                <a:latin typeface="Arial"/>
-              </a:rPr>
-              <a:t>():</a:t>
+                  <a:srgbClr val="FFFFFF"/>
+                </a:solidFill>
+                <a:latin typeface="Arial"/>
+              </a:rPr>
+              <a:t>main()</a:t>
             </a:r>
           </a:p>
         </p:txBody>
@@ -8536,265 +8066,6 @@
           <p:cNvSpPr/>
           <p:nvPr>
             <p:ph type="body" idx="13"/>
-          </p:nvPr>
-        </p:nvSpPr>
-        <p:spPr>
-          <a:xfrm>
-            <a:off x="457200" y="2874262"/>
-            <a:ext cx="662751" cy="518159"/>
-          </a:xfrm>
-          <a:prstGeom prst="rect">
-            <a:avLst/>
-          </a:prstGeom>
-          <a:noFill/>
-        </p:spPr>
-        <p:txBody>
-          <a:bodyPr wrap="none" lIns="0" rIns="0">
-            <a:noAutofit/>
-          </a:bodyPr>
-          <a:lstStyle/>
-          <a:p>
-            <a:pPr algn="l"/>
-            <a:r>
-              <a:rPr sz="3400" b="0" i="0">
-                <a:solidFill>
-                  <a:srgbClr val="D4D4D4"/>
-                </a:solidFill>
-                <a:latin typeface="Arial"/>
-              </a:rPr>
-              <a:t>    </a:t>
-            </a:r>
-          </a:p>
-        </p:txBody>
-      </p:sp>
-      <p:sp>
-        <p:nvSpPr>
-          <p:cNvPr id="15" name="TextBox 14"/>
-          <p:cNvSpPr/>
-          <p:nvPr>
-            <p:ph type="body" idx="14"/>
-          </p:nvPr>
-        </p:nvSpPr>
-        <p:spPr>
-          <a:xfrm>
-            <a:off x="937071" y="2874262"/>
-            <a:ext cx="1526857" cy="518159"/>
-          </a:xfrm>
-          <a:prstGeom prst="rect">
-            <a:avLst/>
-          </a:prstGeom>
-          <a:noFill/>
-        </p:spPr>
-        <p:txBody>
-          <a:bodyPr wrap="none" lIns="0" rIns="0">
-            <a:noAutofit/>
-          </a:bodyPr>
-          <a:lstStyle/>
-          <a:p>
-            <a:pPr algn="l"/>
-            <a:r>
-              <a:rPr sz="3400" b="0" i="0">
-                <a:solidFill>
-                  <a:srgbClr val="DCDCAA"/>
-                </a:solidFill>
-                <a:latin typeface="Arial"/>
-              </a:rPr>
-              <a:t>print</a:t>
-            </a:r>
-          </a:p>
-        </p:txBody>
-      </p:sp>
-      <p:sp>
-        <p:nvSpPr>
-          <p:cNvPr id="16" name="TextBox 15"/>
-          <p:cNvSpPr/>
-          <p:nvPr>
-            <p:ph type="body" idx="15"/>
-          </p:nvPr>
-        </p:nvSpPr>
-        <p:spPr>
-          <a:xfrm>
-            <a:off x="1777057" y="2874262"/>
-            <a:ext cx="412948" cy="518159"/>
-          </a:xfrm>
-          <a:prstGeom prst="rect">
-            <a:avLst/>
-          </a:prstGeom>
-          <a:noFill/>
-        </p:spPr>
-        <p:txBody>
-          <a:bodyPr wrap="none" lIns="0" rIns="0">
-            <a:noAutofit/>
-          </a:bodyPr>
-          <a:lstStyle/>
-          <a:p>
-            <a:pPr algn="l"/>
-            <a:r>
-              <a:rPr sz="3400" b="0" i="0">
-                <a:solidFill>
-                  <a:srgbClr val="D4D4D4"/>
-                </a:solidFill>
-                <a:latin typeface="Arial"/>
-              </a:rPr>
-              <a:t>(</a:t>
-            </a:r>
-          </a:p>
-        </p:txBody>
-      </p:sp>
-      <p:sp>
-        <p:nvSpPr>
-          <p:cNvPr id="17" name="TextBox 16"/>
-          <p:cNvSpPr/>
-          <p:nvPr>
-            <p:ph type="body" idx="16"/>
-          </p:nvPr>
-        </p:nvSpPr>
-        <p:spPr>
-          <a:xfrm>
-            <a:off x="1920850" y="2874262"/>
-            <a:ext cx="4474566" cy="518159"/>
-          </a:xfrm>
-          <a:prstGeom prst="rect">
-            <a:avLst/>
-          </a:prstGeom>
-          <a:noFill/>
-        </p:spPr>
-        <p:txBody>
-          <a:bodyPr wrap="none" lIns="0" rIns="0">
-            <a:noAutofit/>
-          </a:bodyPr>
-          <a:lstStyle/>
-          <a:p>
-            <a:pPr algn="l"/>
-            <a:r>
-              <a:rPr sz="3400" b="0" i="0">
-                <a:solidFill>
-                  <a:srgbClr val="CE9178"/>
-                </a:solidFill>
-                <a:latin typeface="Arial"/>
-              </a:rPr>
-              <a:t>"Hello, world!"</a:t>
-            </a:r>
-          </a:p>
-        </p:txBody>
-      </p:sp>
-      <p:sp>
-        <p:nvSpPr>
-          <p:cNvPr id="18" name="TextBox 17"/>
-          <p:cNvSpPr/>
-          <p:nvPr>
-            <p:ph type="body" idx="17"/>
-          </p:nvPr>
-        </p:nvSpPr>
-        <p:spPr>
-          <a:xfrm>
-            <a:off x="4603155" y="2874262"/>
-            <a:ext cx="412948" cy="518159"/>
-          </a:xfrm>
-          <a:prstGeom prst="rect">
-            <a:avLst/>
-          </a:prstGeom>
-          <a:noFill/>
-        </p:spPr>
-        <p:txBody>
-          <a:bodyPr wrap="none" lIns="0" rIns="0">
-            <a:noAutofit/>
-          </a:bodyPr>
-          <a:lstStyle/>
-          <a:p>
-            <a:pPr algn="l"/>
-            <a:r>
-              <a:rPr sz="3400" b="0" i="0">
-                <a:solidFill>
-                  <a:srgbClr val="D4D4D4"/>
-                </a:solidFill>
-                <a:latin typeface="Arial"/>
-              </a:rPr>
-              <a:t>)</a:t>
-            </a:r>
-          </a:p>
-        </p:txBody>
-      </p:sp>
-      <p:sp>
-        <p:nvSpPr>
-          <p:cNvPr id="19" name="TextBox 18"/>
-          <p:cNvSpPr/>
-          <p:nvPr>
-            <p:ph type="body" idx="18"/>
-          </p:nvPr>
-        </p:nvSpPr>
-        <p:spPr>
-          <a:xfrm>
-            <a:off x="457200" y="3910580"/>
-            <a:ext cx="1680348" cy="518159"/>
-          </a:xfrm>
-          <a:prstGeom prst="rect">
-            <a:avLst/>
-          </a:prstGeom>
-          <a:noFill/>
-        </p:spPr>
-        <p:txBody>
-          <a:bodyPr wrap="none" lIns="0" rIns="0">
-            <a:noAutofit/>
-          </a:bodyPr>
-          <a:lstStyle/>
-          <a:p>
-            <a:pPr algn="l"/>
-            <a:r>
-              <a:rPr sz="3400" b="0" i="0">
-                <a:solidFill>
-                  <a:srgbClr val="DCDCAA"/>
-                </a:solidFill>
-                <a:latin typeface="Arial"/>
-              </a:rPr>
-              <a:t>main</a:t>
-            </a:r>
-          </a:p>
-        </p:txBody>
-      </p:sp>
-      <p:sp>
-        <p:nvSpPr>
-          <p:cNvPr id="20" name="TextBox 19"/>
-          <p:cNvSpPr/>
-          <p:nvPr>
-            <p:ph type="body" idx="19"/>
-          </p:nvPr>
-        </p:nvSpPr>
-        <p:spPr>
-          <a:xfrm>
-            <a:off x="1393118" y="3910580"/>
-            <a:ext cx="643017" cy="518159"/>
-          </a:xfrm>
-          <a:prstGeom prst="rect">
-            <a:avLst/>
-          </a:prstGeom>
-          <a:noFill/>
-        </p:spPr>
-        <p:txBody>
-          <a:bodyPr wrap="none" lIns="0" rIns="0">
-            <a:noAutofit/>
-          </a:bodyPr>
-          <a:lstStyle/>
-          <a:p>
-            <a:pPr algn="l"/>
-            <a:r>
-              <a:rPr sz="3400" b="0" i="0">
-                <a:solidFill>
-                  <a:srgbClr val="D4D4D4"/>
-                </a:solidFill>
-                <a:latin typeface="Arial"/>
-              </a:rPr>
-              <a:t>()</a:t>
-            </a:r>
-          </a:p>
-        </p:txBody>
-      </p:sp>
-      <p:sp>
-        <p:nvSpPr>
-          <p:cNvPr id="21" name="TextBox 20"/>
-          <p:cNvSpPr/>
-          <p:nvPr>
-            <p:ph type="body" idx="20"/>
           </p:nvPr>
         </p:nvSpPr>
         <p:spPr>
@@ -8817,7 +8088,7 @@
             <a:r>
               <a:rPr sz="3400" b="0" i="0">
                 <a:solidFill>
-                  <a:srgbClr val="4EC9B0"/>
+                  <a:srgbClr val="569CD6"/>
                 </a:solidFill>
                 <a:latin typeface="Arial"/>
               </a:rPr>
@@ -8828,10 +8099,10 @@
       </p:sp>
       <p:sp>
         <p:nvSpPr>
-          <p:cNvPr id="22" name="TextBox 21"/>
-          <p:cNvSpPr/>
-          <p:nvPr>
-            <p:ph type="body" idx="21"/>
+          <p:cNvPr id="15" name="TextBox 14"/>
+          <p:cNvSpPr/>
+          <p:nvPr>
+            <p:ph type="body" idx="14"/>
           </p:nvPr>
         </p:nvSpPr>
         <p:spPr>
@@ -8854,7 +8125,7 @@
             <a:r>
               <a:rPr sz="3400" b="0" i="0">
                 <a:solidFill>
-                  <a:srgbClr val="D4D4D4"/>
+                  <a:srgbClr val="FFFFFF"/>
                 </a:solidFill>
                 <a:latin typeface="Arial"/>
               </a:rPr>
@@ -8865,10 +8136,10 @@
       </p:sp>
       <p:sp>
         <p:nvSpPr>
-          <p:cNvPr id="23" name="TextBox 22"/>
-          <p:cNvSpPr/>
-          <p:nvPr>
-            <p:ph type="body" idx="22"/>
+          <p:cNvPr id="16" name="TextBox 15"/>
+          <p:cNvSpPr/>
+          <p:nvPr>
+            <p:ph type="body" idx="15"/>
           </p:nvPr>
         </p:nvSpPr>
         <p:spPr>
@@ -8891,7 +8162,7 @@
             <a:r>
               <a:rPr sz="3400" b="0" i="0">
                 <a:solidFill>
-                  <a:srgbClr val="D4D4D4"/>
+                  <a:srgbClr val="FFFFFF"/>
                 </a:solidFill>
                 <a:latin typeface="Arial"/>
               </a:rPr>
@@ -8913,7 +8184,7 @@
 </p:sldLayout>
 </file>
 
-<file path=ppt/slideLayouts/slideLayout27.xml><?xml version="1.0" encoding="utf-8"?>
+<file path=ppt/slideLayouts/slideLayout26.xml><?xml version="1.0" encoding="utf-8"?>
 <p:sldLayout xmlns:a="http://schemas.openxmlformats.org/drawingml/2006/main" xmlns:r="http://schemas.openxmlformats.org/officeDocument/2006/relationships" xmlns:p="http://schemas.openxmlformats.org/presentationml/2006/main" type="blank" preserve="1">
   <p:cSld name="slidekit · File Tree">
     <p:bg>
@@ -9022,7 +8293,7 @@
             </a:avLst>
           </a:prstGeom>
           <a:solidFill>
-            <a:srgbClr val="0C1A1C"/>
+            <a:srgbClr val="0A2240"/>
           </a:solidFill>
           <a:ln>
             <a:noFill/>
@@ -9065,7 +8336,7 @@
             <a:r>
               <a:rPr sz="2600" b="1" i="0">
                 <a:solidFill>
-                  <a:srgbClr val="569CD6"/>
+                  <a:srgbClr val="0072CE"/>
                 </a:solidFill>
                 <a:latin typeface="Courier New"/>
               </a:rPr>
@@ -9102,7 +8373,7 @@
             <a:r>
               <a:rPr sz="2600" b="0" i="0">
                 <a:solidFill>
-                  <a:srgbClr val="55707A"/>
+                  <a:srgbClr val="0072CE"/>
                 </a:solidFill>
                 <a:latin typeface="Courier New"/>
               </a:rPr>
@@ -9139,7 +8410,7 @@
             <a:r>
               <a:rPr sz="2600" b="1" i="0">
                 <a:solidFill>
-                  <a:srgbClr val="569CD6"/>
+                  <a:srgbClr val="0072CE"/>
                 </a:solidFill>
                 <a:latin typeface="Courier New"/>
               </a:rPr>
@@ -9176,7 +8447,7 @@
             <a:r>
               <a:rPr sz="2600" b="0" i="0">
                 <a:solidFill>
-                  <a:srgbClr val="55707A"/>
+                  <a:srgbClr val="0072CE"/>
                 </a:solidFill>
                 <a:latin typeface="Courier New"/>
               </a:rPr>
@@ -9213,7 +8484,7 @@
             <a:r>
               <a:rPr sz="2600" b="1" i="0">
                 <a:solidFill>
-                  <a:srgbClr val="569CD6"/>
+                  <a:srgbClr val="0072CE"/>
                 </a:solidFill>
                 <a:latin typeface="Courier New"/>
               </a:rPr>
@@ -9250,7 +8521,7 @@
             <a:r>
               <a:rPr sz="2600" b="0" i="0">
                 <a:solidFill>
-                  <a:srgbClr val="55707A"/>
+                  <a:srgbClr val="0072CE"/>
                 </a:solidFill>
                 <a:latin typeface="Courier New"/>
               </a:rPr>
@@ -9287,7 +8558,7 @@
             <a:r>
               <a:rPr sz="2600" b="0" i="0">
                 <a:solidFill>
-                  <a:srgbClr val="D4D4D4"/>
+                  <a:srgbClr val="FFFFFF"/>
                 </a:solidFill>
                 <a:latin typeface="Courier New"/>
               </a:rPr>
@@ -9324,7 +8595,7 @@
             <a:r>
               <a:rPr sz="2600" b="0" i="0">
                 <a:solidFill>
-                  <a:srgbClr val="55707A"/>
+                  <a:srgbClr val="0072CE"/>
                 </a:solidFill>
                 <a:latin typeface="Courier New"/>
               </a:rPr>
@@ -9361,7 +8632,7 @@
             <a:r>
               <a:rPr sz="2600" b="0" i="0">
                 <a:solidFill>
-                  <a:srgbClr val="D4D4D4"/>
+                  <a:srgbClr val="FFFFFF"/>
                 </a:solidFill>
                 <a:latin typeface="Courier New"/>
               </a:rPr>
@@ -9398,7 +8669,7 @@
             <a:r>
               <a:rPr sz="2600" b="0" i="0">
                 <a:solidFill>
-                  <a:srgbClr val="55707A"/>
+                  <a:srgbClr val="0072CE"/>
                 </a:solidFill>
                 <a:latin typeface="Courier New"/>
               </a:rPr>
@@ -9435,7 +8706,7 @@
             <a:r>
               <a:rPr sz="2600" b="0" i="0">
                 <a:solidFill>
-                  <a:srgbClr val="D4D4D4"/>
+                  <a:srgbClr val="FFFFFF"/>
                 </a:solidFill>
                 <a:latin typeface="Courier New"/>
               </a:rPr>
@@ -9472,7 +8743,7 @@
             <a:r>
               <a:rPr sz="2600" b="0" i="0">
                 <a:solidFill>
-                  <a:srgbClr val="55707A"/>
+                  <a:srgbClr val="0072CE"/>
                 </a:solidFill>
                 <a:latin typeface="Courier New"/>
               </a:rPr>
@@ -9509,7 +8780,7 @@
             <a:r>
               <a:rPr sz="2600" b="0" i="0">
                 <a:solidFill>
-                  <a:srgbClr val="D4D4D4"/>
+                  <a:srgbClr val="FFFFFF"/>
                 </a:solidFill>
                 <a:latin typeface="Courier New"/>
               </a:rPr>
@@ -9546,7 +8817,7 @@
             <a:r>
               <a:rPr sz="2600" b="0" i="0">
                 <a:solidFill>
-                  <a:srgbClr val="55707A"/>
+                  <a:srgbClr val="0072CE"/>
                 </a:solidFill>
                 <a:latin typeface="Courier New"/>
               </a:rPr>
@@ -9583,7 +8854,7 @@
             <a:r>
               <a:rPr sz="2600" b="0" i="0">
                 <a:solidFill>
-                  <a:srgbClr val="D4D4D4"/>
+                  <a:srgbClr val="FFFFFF"/>
                 </a:solidFill>
                 <a:latin typeface="Courier New"/>
               </a:rPr>
@@ -9605,7 +8876,7 @@
 </p:sldLayout>
 </file>
 
-<file path=ppt/slideLayouts/slideLayout28.xml><?xml version="1.0" encoding="utf-8"?>
+<file path=ppt/slideLayouts/slideLayout27.xml><?xml version="1.0" encoding="utf-8"?>
 <p:sldLayout xmlns:a="http://schemas.openxmlformats.org/drawingml/2006/main" xmlns:r="http://schemas.openxmlformats.org/officeDocument/2006/relationships" xmlns:p="http://schemas.openxmlformats.org/presentationml/2006/main" type="blank" preserve="1">
   <p:cSld name="slidekit · Numbered Steps">
     <p:bg>
@@ -9723,7 +8994,7 @@
             <a:r>
               <a:rPr sz="4200" b="1" i="0">
                 <a:solidFill>
-                  <a:srgbClr val="123A6B"/>
+                  <a:srgbClr val="0072CE"/>
                 </a:solidFill>
                 <a:latin typeface="Arial"/>
               </a:rPr>
@@ -9760,7 +9031,7 @@
             <a:r>
               <a:rPr sz="4200" b="1" i="0">
                 <a:solidFill>
-                  <a:srgbClr val="123A6B"/>
+                  <a:srgbClr val="0072CE"/>
                 </a:solidFill>
                 <a:latin typeface="Arial"/>
               </a:rPr>
@@ -9834,7 +9105,7 @@
             <a:r>
               <a:rPr sz="4200" b="1" i="0">
                 <a:solidFill>
-                  <a:srgbClr val="123A6B"/>
+                  <a:srgbClr val="0072CE"/>
                 </a:solidFill>
                 <a:latin typeface="Arial"/>
               </a:rPr>
@@ -9871,7 +9142,7 @@
             <a:r>
               <a:rPr sz="4200" b="1" i="0">
                 <a:solidFill>
-                  <a:srgbClr val="123A6B"/>
+                  <a:srgbClr val="0072CE"/>
                 </a:solidFill>
                 <a:latin typeface="Arial"/>
               </a:rPr>
@@ -9945,7 +9216,7 @@
             <a:r>
               <a:rPr sz="4200" b="1" i="0">
                 <a:solidFill>
-                  <a:srgbClr val="123A6B"/>
+                  <a:srgbClr val="0072CE"/>
                 </a:solidFill>
                 <a:latin typeface="Arial"/>
               </a:rPr>
@@ -9982,7 +9253,7 @@
             <a:r>
               <a:rPr sz="4200" b="1" i="0">
                 <a:solidFill>
-                  <a:srgbClr val="123A6B"/>
+                  <a:srgbClr val="0072CE"/>
                 </a:solidFill>
                 <a:latin typeface="Arial"/>
               </a:rPr>
@@ -10041,7 +9312,7 @@
 </p:sldLayout>
 </file>
 
-<file path=ppt/slideLayouts/slideLayout29.xml><?xml version="1.0" encoding="utf-8"?>
+<file path=ppt/slideLayouts/slideLayout28.xml><?xml version="1.0" encoding="utf-8"?>
 <p:sldLayout xmlns:a="http://schemas.openxmlformats.org/drawingml/2006/main" xmlns:r="http://schemas.openxmlformats.org/officeDocument/2006/relationships" xmlns:p="http://schemas.openxmlformats.org/presentationml/2006/main" type="blank" preserve="1">
   <p:cSld name="slidekit · Two Panel List">
     <p:bg>
@@ -10159,7 +9430,7 @@
             <a:r>
               <a:rPr sz="3400" b="1" i="0">
                 <a:solidFill>
-                  <a:srgbClr val="123A6B"/>
+                  <a:srgbClr val="0072CE"/>
                 </a:solidFill>
                 <a:latin typeface="Arial"/>
               </a:rPr>
@@ -10178,14 +9449,14 @@
         </p:nvSpPr>
         <p:spPr>
           <a:xfrm>
-            <a:off x="548640" y="2176271"/>
-            <a:ext cx="1650492" cy="54864"/>
+            <a:off x="457200" y="2176271"/>
+            <a:ext cx="1367718" cy="54864"/>
           </a:xfrm>
           <a:prstGeom prst="rect">
             <a:avLst/>
           </a:prstGeom>
           <a:solidFill>
-            <a:srgbClr val="123A6B"/>
+            <a:srgbClr val="0072CE"/>
           </a:solidFill>
           <a:ln>
             <a:noFill/>
@@ -10228,7 +9499,7 @@
             <a:r>
               <a:rPr sz="3400" b="1" i="0">
                 <a:solidFill>
-                  <a:srgbClr val="5B6B82"/>
+                  <a:srgbClr val="0A2240"/>
                 </a:solidFill>
                 <a:latin typeface="Arial"/>
               </a:rPr>
@@ -10247,14 +9518,14 @@
         </p:nvSpPr>
         <p:spPr>
           <a:xfrm>
-            <a:off x="6324600" y="2176271"/>
-            <a:ext cx="1650492" cy="54864"/>
+            <a:off x="6233160" y="2176271"/>
+            <a:ext cx="1007604" cy="54864"/>
           </a:xfrm>
           <a:prstGeom prst="rect">
             <a:avLst/>
           </a:prstGeom>
           <a:solidFill>
-            <a:srgbClr val="5B6B82"/>
+            <a:srgbClr val="0A2240"/>
           </a:solidFill>
           <a:ln>
             <a:noFill/>
@@ -10487,6 +9758,294 @@
                 <a:latin typeface="Arial"/>
               </a:rPr>
               <a:t>In-product live chat</a:t>
+            </a:r>
+          </a:p>
+        </p:txBody>
+      </p:sp>
+    </p:spTree>
+    <p:extLst>
+      <p:ext uri="{BB962C8B-B14F-4D97-AF65-F5344CB8AC3E}">
+        <p14:creationId xmlns:p14="http://schemas.microsoft.com/office/powerpoint/2010/main" val="1212999818"/>
+      </p:ext>
+    </p:extLst>
+  </p:cSld>
+  <p:clrMapOvr>
+    <a:masterClrMapping/>
+  </p:clrMapOvr>
+</p:sldLayout>
+</file>
+
+<file path=ppt/slideLayouts/slideLayout29.xml><?xml version="1.0" encoding="utf-8"?>
+<p:sldLayout xmlns:a="http://schemas.openxmlformats.org/drawingml/2006/main" xmlns:r="http://schemas.openxmlformats.org/officeDocument/2006/relationships" xmlns:p="http://schemas.openxmlformats.org/presentationml/2006/main" type="blank" preserve="1">
+  <p:cSld name="slidekit · This vs That">
+    <p:bg>
+      <p:bgPr>
+        <a:solidFill>
+          <a:srgbClr val="FFFFFF"/>
+        </a:solidFill>
+        <a:effectLst/>
+      </p:bgPr>
+    </p:bg>
+    <p:spTree>
+      <p:nvGrpSpPr>
+        <p:cNvPr id="1" name=""/>
+        <p:cNvGrpSpPr/>
+        <p:nvPr/>
+      </p:nvGrpSpPr>
+      <p:grpSpPr>
+        <a:xfrm>
+          <a:off x="0" y="0"/>
+          <a:ext cx="0" cy="0"/>
+          <a:chOff x="0" y="0"/>
+          <a:chExt cx="0" cy="0"/>
+        </a:xfrm>
+      </p:grpSpPr>
+      <p:sp>
+        <p:nvSpPr>
+          <p:cNvPr id="4" name="Slide Number Placeholder 3"/>
+          <p:cNvSpPr>
+            <a:spLocks noGrp="1"/>
+          </p:cNvSpPr>
+          <p:nvPr>
+            <p:ph type="sldNum" sz="quarter" idx="12"/>
+          </p:nvPr>
+        </p:nvSpPr>
+        <p:spPr>
+          <a:xfrm>
+            <a:off x="11186160" y="6035040"/>
+            <a:ext cx="548640" cy="365760"/>
+          </a:xfrm>
+        </p:spPr>
+        <p:txBody>
+          <a:bodyPr/>
+          <a:lstStyle/>
+          <a:p>
+            <a:fld id="{C1FF6DA9-008F-8B48-92A6-B652298478BF}" type="slidenum">
+              <a:rPr lang="en-US" smtClean="0"/>
+              <a:t>‹#›</a:t>
+            </a:fld>
+            <a:endParaRPr lang="en-US"/>
+          </a:p>
+        </p:txBody>
+      </p:sp>
+      <p:sp>
+        <p:nvSpPr>
+          <p:cNvPr id="5" name="TextBox 4"/>
+          <p:cNvSpPr/>
+          <p:nvPr>
+            <p:ph type="title"/>
+          </p:nvPr>
+        </p:nvSpPr>
+        <p:spPr>
+          <a:xfrm>
+            <a:off x="457200" y="457200"/>
+            <a:ext cx="11277600" cy="768096"/>
+          </a:xfrm>
+          <a:prstGeom prst="rect">
+            <a:avLst/>
+          </a:prstGeom>
+          <a:noFill/>
+        </p:spPr>
+        <p:txBody>
+          <a:bodyPr wrap="none" lIns="0" rIns="0">
+            <a:noAutofit/>
+          </a:bodyPr>
+          <a:lstStyle/>
+          <a:p>
+            <a:pPr algn="l"/>
+            <a:r>
+              <a:rPr sz="4200" b="1" i="0">
+                <a:solidFill>
+                  <a:srgbClr val="0072CE"/>
+                </a:solidFill>
+                <a:latin typeface="Arial"/>
+              </a:rPr>
+              <a:t>Cloud or On-Prem</a:t>
+            </a:r>
+          </a:p>
+        </p:txBody>
+      </p:sp>
+      <p:sp>
+        <p:nvSpPr>
+          <p:cNvPr id="6" name="TextBox 5"/>
+          <p:cNvSpPr/>
+          <p:nvPr>
+            <p:ph type="body" idx="1"/>
+          </p:nvPr>
+        </p:nvSpPr>
+        <p:spPr>
+          <a:xfrm>
+            <a:off x="457200" y="2776728"/>
+            <a:ext cx="4792980" cy="914400"/>
+          </a:xfrm>
+          <a:prstGeom prst="rect">
+            <a:avLst/>
+          </a:prstGeom>
+          <a:noFill/>
+        </p:spPr>
+        <p:txBody>
+          <a:bodyPr wrap="none" lIns="0" rIns="0">
+            <a:noAutofit/>
+          </a:bodyPr>
+          <a:lstStyle/>
+          <a:p>
+            <a:pPr algn="ctr"/>
+            <a:r>
+              <a:rPr sz="6000" b="1" i="0">
+                <a:solidFill>
+                  <a:srgbClr val="0A2240"/>
+                </a:solidFill>
+                <a:latin typeface="Arial"/>
+              </a:rPr>
+              <a:t>3 wks</a:t>
+            </a:r>
+          </a:p>
+        </p:txBody>
+      </p:sp>
+      <p:sp>
+        <p:nvSpPr>
+          <p:cNvPr id="7" name="TextBox 6"/>
+          <p:cNvSpPr/>
+          <p:nvPr>
+            <p:ph type="body" idx="2"/>
+          </p:nvPr>
+        </p:nvSpPr>
+        <p:spPr>
+          <a:xfrm>
+            <a:off x="0" y="3965448"/>
+            <a:ext cx="5707380" cy="518159"/>
+          </a:xfrm>
+          <a:prstGeom prst="rect">
+            <a:avLst/>
+          </a:prstGeom>
+          <a:noFill/>
+        </p:spPr>
+        <p:txBody>
+          <a:bodyPr wrap="none" lIns="0" rIns="0">
+            <a:noAutofit/>
+          </a:bodyPr>
+          <a:lstStyle/>
+          <a:p>
+            <a:pPr algn="ctr"/>
+            <a:r>
+              <a:rPr sz="3400" b="0" i="0">
+                <a:solidFill>
+                  <a:srgbClr val="0A2240"/>
+                </a:solidFill>
+                <a:latin typeface="Arial"/>
+              </a:rPr>
+              <a:t>Cloud time-to-launch</a:t>
+            </a:r>
+          </a:p>
+        </p:txBody>
+      </p:sp>
+      <p:sp>
+        <p:nvSpPr>
+          <p:cNvPr id="8" name="TextBox 7"/>
+          <p:cNvSpPr/>
+          <p:nvPr>
+            <p:ph type="body" idx="3"/>
+          </p:nvPr>
+        </p:nvSpPr>
+        <p:spPr>
+          <a:xfrm>
+            <a:off x="6941820" y="2776728"/>
+            <a:ext cx="4792980" cy="914400"/>
+          </a:xfrm>
+          <a:prstGeom prst="rect">
+            <a:avLst/>
+          </a:prstGeom>
+          <a:noFill/>
+        </p:spPr>
+        <p:txBody>
+          <a:bodyPr wrap="none" lIns="0" rIns="0">
+            <a:noAutofit/>
+          </a:bodyPr>
+          <a:lstStyle/>
+          <a:p>
+            <a:pPr algn="ctr"/>
+            <a:r>
+              <a:rPr sz="6000" b="1" i="0">
+                <a:solidFill>
+                  <a:srgbClr val="0A2240"/>
+                </a:solidFill>
+                <a:latin typeface="Arial"/>
+              </a:rPr>
+              <a:t>6 mo</a:t>
+            </a:r>
+          </a:p>
+        </p:txBody>
+      </p:sp>
+      <p:sp>
+        <p:nvSpPr>
+          <p:cNvPr id="9" name="TextBox 8"/>
+          <p:cNvSpPr/>
+          <p:nvPr>
+            <p:ph type="body" idx="4"/>
+          </p:nvPr>
+        </p:nvSpPr>
+        <p:spPr>
+          <a:xfrm>
+            <a:off x="6484620" y="3965448"/>
+            <a:ext cx="5707380" cy="518159"/>
+          </a:xfrm>
+          <a:prstGeom prst="rect">
+            <a:avLst/>
+          </a:prstGeom>
+          <a:noFill/>
+        </p:spPr>
+        <p:txBody>
+          <a:bodyPr wrap="none" lIns="0" rIns="0">
+            <a:noAutofit/>
+          </a:bodyPr>
+          <a:lstStyle/>
+          <a:p>
+            <a:pPr algn="ctr"/>
+            <a:r>
+              <a:rPr sz="3400" b="0" i="0">
+                <a:solidFill>
+                  <a:srgbClr val="0A2240"/>
+                </a:solidFill>
+                <a:latin typeface="Arial"/>
+              </a:rPr>
+              <a:t>On-prem time-to-launch</a:t>
+            </a:r>
+          </a:p>
+        </p:txBody>
+      </p:sp>
+      <p:sp>
+        <p:nvSpPr>
+          <p:cNvPr id="10" name="TextBox 9"/>
+          <p:cNvSpPr/>
+          <p:nvPr>
+            <p:ph type="body" idx="5"/>
+          </p:nvPr>
+        </p:nvSpPr>
+        <p:spPr>
+          <a:xfrm>
+            <a:off x="5435323" y="3310127"/>
+            <a:ext cx="1321354" cy="640080"/>
+          </a:xfrm>
+          <a:prstGeom prst="rect">
+            <a:avLst/>
+          </a:prstGeom>
+          <a:noFill/>
+        </p:spPr>
+        <p:txBody>
+          <a:bodyPr wrap="none" lIns="0" rIns="0">
+            <a:noAutofit/>
+          </a:bodyPr>
+          <a:lstStyle/>
+          <a:p>
+            <a:pPr algn="ctr"/>
+            <a:r>
+              <a:rPr sz="4200" b="1" i="0">
+                <a:solidFill>
+                  <a:srgbClr val="0A2240"/>
+                </a:solidFill>
+                <a:latin typeface="Arial"/>
+              </a:rPr>
+              <a:t>VS</a:t>
             </a:r>
           </a:p>
         </p:txBody>
@@ -10752,294 +10311,6 @@
 
 <file path=ppt/slideLayouts/slideLayout30.xml><?xml version="1.0" encoding="utf-8"?>
 <p:sldLayout xmlns:a="http://schemas.openxmlformats.org/drawingml/2006/main" xmlns:r="http://schemas.openxmlformats.org/officeDocument/2006/relationships" xmlns:p="http://schemas.openxmlformats.org/presentationml/2006/main" type="blank" preserve="1">
-  <p:cSld name="slidekit · This vs That">
-    <p:bg>
-      <p:bgPr>
-        <a:solidFill>
-          <a:srgbClr val="FFFFFF"/>
-        </a:solidFill>
-        <a:effectLst/>
-      </p:bgPr>
-    </p:bg>
-    <p:spTree>
-      <p:nvGrpSpPr>
-        <p:cNvPr id="1" name=""/>
-        <p:cNvGrpSpPr/>
-        <p:nvPr/>
-      </p:nvGrpSpPr>
-      <p:grpSpPr>
-        <a:xfrm>
-          <a:off x="0" y="0"/>
-          <a:ext cx="0" cy="0"/>
-          <a:chOff x="0" y="0"/>
-          <a:chExt cx="0" cy="0"/>
-        </a:xfrm>
-      </p:grpSpPr>
-      <p:sp>
-        <p:nvSpPr>
-          <p:cNvPr id="4" name="Slide Number Placeholder 3"/>
-          <p:cNvSpPr>
-            <a:spLocks noGrp="1"/>
-          </p:cNvSpPr>
-          <p:nvPr>
-            <p:ph type="sldNum" sz="quarter" idx="12"/>
-          </p:nvPr>
-        </p:nvSpPr>
-        <p:spPr>
-          <a:xfrm>
-            <a:off x="11186160" y="6035040"/>
-            <a:ext cx="548640" cy="365760"/>
-          </a:xfrm>
-        </p:spPr>
-        <p:txBody>
-          <a:bodyPr/>
-          <a:lstStyle/>
-          <a:p>
-            <a:fld id="{C1FF6DA9-008F-8B48-92A6-B652298478BF}" type="slidenum">
-              <a:rPr lang="en-US" smtClean="0"/>
-              <a:t>‹#›</a:t>
-            </a:fld>
-            <a:endParaRPr lang="en-US"/>
-          </a:p>
-        </p:txBody>
-      </p:sp>
-      <p:sp>
-        <p:nvSpPr>
-          <p:cNvPr id="5" name="TextBox 4"/>
-          <p:cNvSpPr/>
-          <p:nvPr>
-            <p:ph type="title"/>
-          </p:nvPr>
-        </p:nvSpPr>
-        <p:spPr>
-          <a:xfrm>
-            <a:off x="457200" y="457200"/>
-            <a:ext cx="11277600" cy="768096"/>
-          </a:xfrm>
-          <a:prstGeom prst="rect">
-            <a:avLst/>
-          </a:prstGeom>
-          <a:noFill/>
-        </p:spPr>
-        <p:txBody>
-          <a:bodyPr wrap="none" lIns="0" rIns="0">
-            <a:noAutofit/>
-          </a:bodyPr>
-          <a:lstStyle/>
-          <a:p>
-            <a:pPr algn="l"/>
-            <a:r>
-              <a:rPr sz="4200" b="1" i="0">
-                <a:solidFill>
-                  <a:srgbClr val="0072CE"/>
-                </a:solidFill>
-                <a:latin typeface="Arial"/>
-              </a:rPr>
-              <a:t>Cloud or On-Prem</a:t>
-            </a:r>
-          </a:p>
-        </p:txBody>
-      </p:sp>
-      <p:sp>
-        <p:nvSpPr>
-          <p:cNvPr id="6" name="TextBox 5"/>
-          <p:cNvSpPr/>
-          <p:nvPr>
-            <p:ph type="body" idx="1"/>
-          </p:nvPr>
-        </p:nvSpPr>
-        <p:spPr>
-          <a:xfrm>
-            <a:off x="457200" y="2776728"/>
-            <a:ext cx="4792980" cy="914400"/>
-          </a:xfrm>
-          <a:prstGeom prst="rect">
-            <a:avLst/>
-          </a:prstGeom>
-          <a:noFill/>
-        </p:spPr>
-        <p:txBody>
-          <a:bodyPr wrap="none" lIns="0" rIns="0">
-            <a:noAutofit/>
-          </a:bodyPr>
-          <a:lstStyle/>
-          <a:p>
-            <a:pPr algn="ctr"/>
-            <a:r>
-              <a:rPr sz="6000" b="1" i="0">
-                <a:solidFill>
-                  <a:srgbClr val="0A2240"/>
-                </a:solidFill>
-                <a:latin typeface="Arial"/>
-              </a:rPr>
-              <a:t>3 wks</a:t>
-            </a:r>
-          </a:p>
-        </p:txBody>
-      </p:sp>
-      <p:sp>
-        <p:nvSpPr>
-          <p:cNvPr id="7" name="TextBox 6"/>
-          <p:cNvSpPr/>
-          <p:nvPr>
-            <p:ph type="body" idx="2"/>
-          </p:nvPr>
-        </p:nvSpPr>
-        <p:spPr>
-          <a:xfrm>
-            <a:off x="0" y="3965448"/>
-            <a:ext cx="5707380" cy="518159"/>
-          </a:xfrm>
-          <a:prstGeom prst="rect">
-            <a:avLst/>
-          </a:prstGeom>
-          <a:noFill/>
-        </p:spPr>
-        <p:txBody>
-          <a:bodyPr wrap="none" lIns="0" rIns="0">
-            <a:noAutofit/>
-          </a:bodyPr>
-          <a:lstStyle/>
-          <a:p>
-            <a:pPr algn="ctr"/>
-            <a:r>
-              <a:rPr sz="3400" b="0" i="0">
-                <a:solidFill>
-                  <a:srgbClr val="0A2240"/>
-                </a:solidFill>
-                <a:latin typeface="Arial"/>
-              </a:rPr>
-              <a:t>Cloud time-to-launch</a:t>
-            </a:r>
-          </a:p>
-        </p:txBody>
-      </p:sp>
-      <p:sp>
-        <p:nvSpPr>
-          <p:cNvPr id="8" name="TextBox 7"/>
-          <p:cNvSpPr/>
-          <p:nvPr>
-            <p:ph type="body" idx="3"/>
-          </p:nvPr>
-        </p:nvSpPr>
-        <p:spPr>
-          <a:xfrm>
-            <a:off x="6941820" y="2776728"/>
-            <a:ext cx="4792980" cy="914400"/>
-          </a:xfrm>
-          <a:prstGeom prst="rect">
-            <a:avLst/>
-          </a:prstGeom>
-          <a:noFill/>
-        </p:spPr>
-        <p:txBody>
-          <a:bodyPr wrap="none" lIns="0" rIns="0">
-            <a:noAutofit/>
-          </a:bodyPr>
-          <a:lstStyle/>
-          <a:p>
-            <a:pPr algn="ctr"/>
-            <a:r>
-              <a:rPr sz="6000" b="1" i="0">
-                <a:solidFill>
-                  <a:srgbClr val="0A2240"/>
-                </a:solidFill>
-                <a:latin typeface="Arial"/>
-              </a:rPr>
-              <a:t>6 mo</a:t>
-            </a:r>
-          </a:p>
-        </p:txBody>
-      </p:sp>
-      <p:sp>
-        <p:nvSpPr>
-          <p:cNvPr id="9" name="TextBox 8"/>
-          <p:cNvSpPr/>
-          <p:nvPr>
-            <p:ph type="body" idx="4"/>
-          </p:nvPr>
-        </p:nvSpPr>
-        <p:spPr>
-          <a:xfrm>
-            <a:off x="6484620" y="3965448"/>
-            <a:ext cx="5707380" cy="518159"/>
-          </a:xfrm>
-          <a:prstGeom prst="rect">
-            <a:avLst/>
-          </a:prstGeom>
-          <a:noFill/>
-        </p:spPr>
-        <p:txBody>
-          <a:bodyPr wrap="none" lIns="0" rIns="0">
-            <a:noAutofit/>
-          </a:bodyPr>
-          <a:lstStyle/>
-          <a:p>
-            <a:pPr algn="ctr"/>
-            <a:r>
-              <a:rPr sz="3400" b="0" i="0">
-                <a:solidFill>
-                  <a:srgbClr val="0A2240"/>
-                </a:solidFill>
-                <a:latin typeface="Arial"/>
-              </a:rPr>
-              <a:t>On-prem time-to-launch</a:t>
-            </a:r>
-          </a:p>
-        </p:txBody>
-      </p:sp>
-      <p:sp>
-        <p:nvSpPr>
-          <p:cNvPr id="10" name="TextBox 9"/>
-          <p:cNvSpPr/>
-          <p:nvPr>
-            <p:ph type="body" idx="5"/>
-          </p:nvPr>
-        </p:nvSpPr>
-        <p:spPr>
-          <a:xfrm>
-            <a:off x="5435323" y="3310127"/>
-            <a:ext cx="1321354" cy="640080"/>
-          </a:xfrm>
-          <a:prstGeom prst="rect">
-            <a:avLst/>
-          </a:prstGeom>
-          <a:noFill/>
-        </p:spPr>
-        <p:txBody>
-          <a:bodyPr wrap="none" lIns="0" rIns="0">
-            <a:noAutofit/>
-          </a:bodyPr>
-          <a:lstStyle/>
-          <a:p>
-            <a:pPr algn="ctr"/>
-            <a:r>
-              <a:rPr sz="4200" b="1" i="0">
-                <a:solidFill>
-                  <a:srgbClr val="5B6B82"/>
-                </a:solidFill>
-                <a:latin typeface="Arial"/>
-              </a:rPr>
-              <a:t>VS</a:t>
-            </a:r>
-          </a:p>
-        </p:txBody>
-      </p:sp>
-    </p:spTree>
-    <p:extLst>
-      <p:ext uri="{BB962C8B-B14F-4D97-AF65-F5344CB8AC3E}">
-        <p14:creationId xmlns:p14="http://schemas.microsoft.com/office/powerpoint/2010/main" val="1212999818"/>
-      </p:ext>
-    </p:extLst>
-  </p:cSld>
-  <p:clrMapOvr>
-    <a:masterClrMapping/>
-  </p:clrMapOvr>
-</p:sldLayout>
-</file>
-
-<file path=ppt/slideLayouts/slideLayout31.xml><?xml version="1.0" encoding="utf-8"?>
-<p:sldLayout xmlns:a="http://schemas.openxmlformats.org/drawingml/2006/main" xmlns:r="http://schemas.openxmlformats.org/officeDocument/2006/relationships" xmlns:p="http://schemas.openxmlformats.org/presentationml/2006/main" type="blank" preserve="1">
   <p:cSld name="slidekit · KPI Grid">
     <p:bg>
       <p:bgPr>
@@ -11562,7 +10833,7 @@
         </p:nvSpPr>
         <p:spPr>
           <a:xfrm>
-            <a:off x="4307840" y="3797808"/>
+            <a:off x="4307840" y="4056888"/>
             <a:ext cx="3576320" cy="640080"/>
           </a:xfrm>
           <a:prstGeom prst="rect">
@@ -11599,7 +10870,7 @@
         </p:nvSpPr>
         <p:spPr>
           <a:xfrm>
-            <a:off x="5559552" y="4492752"/>
+            <a:off x="5559552" y="4751832"/>
             <a:ext cx="1072896" cy="54864"/>
           </a:xfrm>
           <a:prstGeom prst="rect">
@@ -11631,16 +10902,16 @@
         </p:nvSpPr>
         <p:spPr>
           <a:xfrm>
-            <a:off x="4307840" y="4602480"/>
-            <a:ext cx="3576320" cy="1127760"/>
-          </a:xfrm>
-          <a:prstGeom prst="rect">
-            <a:avLst/>
-          </a:prstGeom>
-          <a:noFill/>
-        </p:spPr>
-        <p:txBody>
-          <a:bodyPr wrap="square" lIns="0" rIns="0">
+            <a:off x="3943896" y="4861560"/>
+            <a:ext cx="4304208" cy="609600"/>
+          </a:xfrm>
+          <a:prstGeom prst="rect">
+            <a:avLst/>
+          </a:prstGeom>
+          <a:noFill/>
+        </p:spPr>
+        <p:txBody>
+          <a:bodyPr wrap="none" lIns="0" rIns="0">
             <a:noAutofit/>
           </a:bodyPr>
           <a:lstStyle/>
@@ -11653,7 +10924,7 @@
                 </a:solidFill>
                 <a:latin typeface="Arial"/>
               </a:rPr>
-              <a:t>Avg. time to value</a:t>
+              <a:t>Time to value</a:t>
             </a:r>
           </a:p>
         </p:txBody>
@@ -11777,7 +11048,7 @@
 </p:sldLayout>
 </file>
 
-<file path=ppt/slideLayouts/slideLayout32.xml><?xml version="1.0" encoding="utf-8"?>
+<file path=ppt/slideLayouts/slideLayout31.xml><?xml version="1.0" encoding="utf-8"?>
 <p:sldLayout xmlns:a="http://schemas.openxmlformats.org/drawingml/2006/main" xmlns:r="http://schemas.openxmlformats.org/officeDocument/2006/relationships" xmlns:p="http://schemas.openxmlformats.org/presentationml/2006/main" type="blank" preserve="1">
   <p:cSld name="slidekit · Chart With Insight">
     <p:bg>
@@ -11964,7 +11235,7 @@
             <a:r>
               <a:rPr sz="2500" b="0" i="0">
                 <a:solidFill>
-                  <a:srgbClr val="5B6B82"/>
+                  <a:srgbClr val="0A2240"/>
                 </a:solidFill>
                 <a:latin typeface="Arial"/>
               </a:rPr>
@@ -12070,7 +11341,7 @@
             <a:r>
               <a:rPr sz="2500" b="0" i="0">
                 <a:solidFill>
-                  <a:srgbClr val="5B6B82"/>
+                  <a:srgbClr val="0A2240"/>
                 </a:solidFill>
                 <a:latin typeface="Arial"/>
               </a:rPr>
@@ -12176,7 +11447,7 @@
             <a:r>
               <a:rPr sz="2500" b="0" i="0">
                 <a:solidFill>
-                  <a:srgbClr val="5B6B82"/>
+                  <a:srgbClr val="0A2240"/>
                 </a:solidFill>
                 <a:latin typeface="Arial"/>
               </a:rPr>
@@ -12282,7 +11553,7 @@
             <a:r>
               <a:rPr sz="2500" b="0" i="0">
                 <a:solidFill>
-                  <a:srgbClr val="5B6B82"/>
+                  <a:srgbClr val="0A2240"/>
                 </a:solidFill>
                 <a:latin typeface="Arial"/>
               </a:rPr>
@@ -12301,8 +11572,8 @@
         </p:nvSpPr>
         <p:spPr>
           <a:xfrm>
-            <a:off x="7498080" y="1770888"/>
-            <a:ext cx="128016" cy="3718560"/>
+            <a:off x="7498080" y="3325368"/>
+            <a:ext cx="128016" cy="609600"/>
           </a:xfrm>
           <a:prstGeom prst="rect">
             <a:avLst/>
@@ -12333,16 +11604,16 @@
         </p:nvSpPr>
         <p:spPr>
           <a:xfrm>
-            <a:off x="8037576" y="1770888"/>
-            <a:ext cx="3697224" cy="3718560"/>
-          </a:xfrm>
-          <a:prstGeom prst="rect">
-            <a:avLst/>
-          </a:prstGeom>
-          <a:noFill/>
-        </p:spPr>
-        <p:txBody>
-          <a:bodyPr wrap="square" lIns="0" rIns="0">
+            <a:off x="8037576" y="3325368"/>
+            <a:ext cx="4154424" cy="609600"/>
+          </a:xfrm>
+          <a:prstGeom prst="rect">
+            <a:avLst/>
+          </a:prstGeom>
+          <a:noFill/>
+        </p:spPr>
+        <p:txBody>
+          <a:bodyPr wrap="none" lIns="0" rIns="0">
             <a:noAutofit/>
           </a:bodyPr>
           <a:lstStyle/>
@@ -12355,7 +11626,7 @@
                 </a:solidFill>
                 <a:latin typeface="Arial"/>
               </a:rPr>
-              <a:t>Activations nearly quadrupled once self-serve onboarding shipped in February.</a:t>
+              <a:t>Activations 4x.</a:t>
             </a:r>
           </a:p>
         </p:txBody>
@@ -12373,7 +11644,7 @@
 </p:sldLayout>
 </file>
 
-<file path=ppt/slideLayouts/slideLayout33.xml><?xml version="1.0" encoding="utf-8"?>
+<file path=ppt/slideLayouts/slideLayout32.xml><?xml version="1.0" encoding="utf-8"?>
 <p:sldLayout xmlns:a="http://schemas.openxmlformats.org/drawingml/2006/main" xmlns:r="http://schemas.openxmlformats.org/officeDocument/2006/relationships" xmlns:p="http://schemas.openxmlformats.org/presentationml/2006/main" type="blank" preserve="1">
   <p:cSld name="slidekit · Table">
     <p:bg>
@@ -12491,7 +11762,7 @@
             <a:r>
               <a:rPr sz="3400" b="1" i="0">
                 <a:solidFill>
-                  <a:srgbClr val="123A6B"/>
+                  <a:srgbClr val="0072CE"/>
                 </a:solidFill>
                 <a:latin typeface="Arial"/>
               </a:rPr>
@@ -12528,7 +11799,7 @@
             <a:r>
               <a:rPr sz="3400" b="1" i="0">
                 <a:solidFill>
-                  <a:srgbClr val="123A6B"/>
+                  <a:srgbClr val="0072CE"/>
                 </a:solidFill>
                 <a:latin typeface="Arial"/>
               </a:rPr>
@@ -12565,7 +11836,7 @@
             <a:r>
               <a:rPr sz="3400" b="1" i="0">
                 <a:solidFill>
-                  <a:srgbClr val="123A6B"/>
+                  <a:srgbClr val="0072CE"/>
                 </a:solidFill>
                 <a:latin typeface="Arial"/>
               </a:rPr>
@@ -13063,7 +12334,7 @@
 </p:sldLayout>
 </file>
 
-<file path=ppt/slideLayouts/slideLayout34.xml><?xml version="1.0" encoding="utf-8"?>
+<file path=ppt/slideLayouts/slideLayout33.xml><?xml version="1.0" encoding="utf-8"?>
 <p:sldLayout xmlns:a="http://schemas.openxmlformats.org/drawingml/2006/main" xmlns:r="http://schemas.openxmlformats.org/officeDocument/2006/relationships" xmlns:p="http://schemas.openxmlformats.org/presentationml/2006/main" type="blank" preserve="1">
   <p:cSld name="slidekit · Metric Comparison">
     <p:bg>
@@ -13163,7 +12434,7 @@
         </p:nvSpPr>
         <p:spPr>
           <a:xfrm>
-            <a:off x="457200" y="2075688"/>
+            <a:off x="457200" y="2334768"/>
             <a:ext cx="3576320" cy="914400"/>
           </a:xfrm>
           <a:prstGeom prst="rect">
@@ -13200,16 +12471,16 @@
         </p:nvSpPr>
         <p:spPr>
           <a:xfrm>
-            <a:off x="457200" y="3264408"/>
-            <a:ext cx="3576320" cy="1127760"/>
-          </a:xfrm>
-          <a:prstGeom prst="rect">
-            <a:avLst/>
-          </a:prstGeom>
-          <a:noFill/>
-        </p:spPr>
-        <p:txBody>
-          <a:bodyPr wrap="square" lIns="0" rIns="0">
+            <a:off x="457200" y="3523488"/>
+            <a:ext cx="3576320" cy="609600"/>
+          </a:xfrm>
+          <a:prstGeom prst="rect">
+            <a:avLst/>
+          </a:prstGeom>
+          <a:noFill/>
+        </p:spPr>
+        <p:txBody>
+          <a:bodyPr wrap="none" lIns="0" rIns="0">
             <a:noAutofit/>
           </a:bodyPr>
           <a:lstStyle/>
@@ -13222,7 +12493,7 @@
                 </a:solidFill>
                 <a:latin typeface="Arial"/>
               </a:rPr>
-              <a:t>Annual recurring revenue</a:t>
+              <a:t>Revenue</a:t>
             </a:r>
           </a:p>
         </p:txBody>
@@ -13237,7 +12508,7 @@
         </p:nvSpPr>
         <p:spPr>
           <a:xfrm>
-            <a:off x="1522569" y="4666488"/>
+            <a:off x="1522569" y="4407408"/>
             <a:ext cx="1445581" cy="518159"/>
           </a:xfrm>
           <a:prstGeom prst="rect">
@@ -13269,7 +12540,7 @@
         </p:nvSpPr>
         <p:spPr>
           <a:xfrm>
-            <a:off x="1260802" y="4666488"/>
+            <a:off x="1260802" y="4407408"/>
             <a:ext cx="1969115" cy="518159"/>
           </a:xfrm>
           <a:prstGeom prst="rect">
@@ -13306,7 +12577,7 @@
         </p:nvSpPr>
         <p:spPr>
           <a:xfrm>
-            <a:off x="4307840" y="2075688"/>
+            <a:off x="4307840" y="2334768"/>
             <a:ext cx="3576320" cy="914400"/>
           </a:xfrm>
           <a:prstGeom prst="rect">
@@ -13343,8 +12614,8 @@
         </p:nvSpPr>
         <p:spPr>
           <a:xfrm>
-            <a:off x="3834934" y="3264408"/>
-            <a:ext cx="4522132" cy="1127760"/>
+            <a:off x="3834934" y="3523488"/>
+            <a:ext cx="4522132" cy="609600"/>
           </a:xfrm>
           <a:prstGeom prst="rect">
             <a:avLst/>
@@ -13380,7 +12651,7 @@
         </p:nvSpPr>
         <p:spPr>
           <a:xfrm>
-            <a:off x="5175547" y="4666488"/>
+            <a:off x="5175547" y="4407408"/>
             <a:ext cx="1840906" cy="518159"/>
           </a:xfrm>
           <a:prstGeom prst="rect">
@@ -13412,7 +12683,7 @@
         </p:nvSpPr>
         <p:spPr>
           <a:xfrm>
-            <a:off x="4795183" y="4666488"/>
+            <a:off x="4795183" y="4407408"/>
             <a:ext cx="2601634" cy="518159"/>
           </a:xfrm>
           <a:prstGeom prst="rect">
@@ -13449,7 +12720,7 @@
         </p:nvSpPr>
         <p:spPr>
           <a:xfrm>
-            <a:off x="8158480" y="2075688"/>
+            <a:off x="8158480" y="2334768"/>
             <a:ext cx="3576320" cy="914400"/>
           </a:xfrm>
           <a:prstGeom prst="rect">
@@ -13486,16 +12757,16 @@
         </p:nvSpPr>
         <p:spPr>
           <a:xfrm>
-            <a:off x="8158480" y="3264408"/>
-            <a:ext cx="3576320" cy="1127760"/>
-          </a:xfrm>
-          <a:prstGeom prst="rect">
-            <a:avLst/>
-          </a:prstGeom>
-          <a:noFill/>
-        </p:spPr>
-        <p:txBody>
-          <a:bodyPr wrap="square" lIns="0" rIns="0">
+            <a:off x="7701280" y="3523488"/>
+            <a:ext cx="4490720" cy="609600"/>
+          </a:xfrm>
+          <a:prstGeom prst="rect">
+            <a:avLst/>
+          </a:prstGeom>
+          <a:noFill/>
+        </p:spPr>
+        <p:txBody>
+          <a:bodyPr wrap="none" lIns="0" rIns="0">
             <a:noAutofit/>
           </a:bodyPr>
           <a:lstStyle/>
@@ -13508,7 +12779,7 @@
                 </a:solidFill>
                 <a:latin typeface="Arial"/>
               </a:rPr>
-              <a:t>Net promoter score</a:t>
+              <a:t>Promoter score</a:t>
             </a:r>
           </a:p>
         </p:txBody>
@@ -13523,7 +12794,7 @@
         </p:nvSpPr>
         <p:spPr>
           <a:xfrm>
-            <a:off x="9427731" y="4666488"/>
+            <a:off x="9427731" y="4407408"/>
             <a:ext cx="1037817" cy="518159"/>
           </a:xfrm>
           <a:prstGeom prst="rect">
@@ -13555,7 +12826,7 @@
         </p:nvSpPr>
         <p:spPr>
           <a:xfrm>
-            <a:off x="9288294" y="4666488"/>
+            <a:off x="9288294" y="4407408"/>
             <a:ext cx="1316691" cy="518159"/>
           </a:xfrm>
           <a:prstGeom prst="rect">
@@ -13595,7 +12866,7 @@
 </p:sldLayout>
 </file>
 
-<file path=ppt/slideLayouts/slideLayout35.xml><?xml version="1.0" encoding="utf-8"?>
+<file path=ppt/slideLayouts/slideLayout34.xml><?xml version="1.0" encoding="utf-8"?>
 <p:sldLayout xmlns:a="http://schemas.openxmlformats.org/drawingml/2006/main" xmlns:r="http://schemas.openxmlformats.org/officeDocument/2006/relationships" xmlns:p="http://schemas.openxmlformats.org/presentationml/2006/main" type="blank" preserve="1">
   <p:cSld name="slidekit · Process Steps">
     <p:bg>
@@ -13713,7 +12984,7 @@
             <a:r>
               <a:rPr sz="4200" b="1" i="0">
                 <a:solidFill>
-                  <a:srgbClr val="123A6B"/>
+                  <a:srgbClr val="0072CE"/>
                 </a:solidFill>
                 <a:latin typeface="Arial"/>
               </a:rPr>
@@ -13733,13 +13004,13 @@
         <p:spPr>
           <a:xfrm>
             <a:off x="457200" y="2194560"/>
-            <a:ext cx="784098" cy="54864"/>
+            <a:ext cx="593303" cy="54864"/>
           </a:xfrm>
           <a:prstGeom prst="rect">
             <a:avLst/>
           </a:prstGeom>
           <a:solidFill>
-            <a:srgbClr val="123A6B"/>
+            <a:srgbClr val="0072CE"/>
           </a:solidFill>
           <a:ln>
             <a:noFill/>
@@ -13782,7 +13053,7 @@
             <a:r>
               <a:rPr sz="3400" b="1" i="0">
                 <a:solidFill>
-                  <a:srgbClr val="123A6B"/>
+                  <a:srgbClr val="0072CE"/>
                 </a:solidFill>
                 <a:latin typeface="Arial"/>
               </a:rPr>
@@ -13856,7 +13127,7 @@
             <a:r>
               <a:rPr sz="4200" b="1" i="0">
                 <a:solidFill>
-                  <a:srgbClr val="123A6B"/>
+                  <a:srgbClr val="0072CE"/>
                 </a:solidFill>
                 <a:latin typeface="Arial"/>
               </a:rPr>
@@ -13876,13 +13147,13 @@
         <p:spPr>
           <a:xfrm>
             <a:off x="3345180" y="2194560"/>
-            <a:ext cx="784098" cy="54864"/>
+            <a:ext cx="593303" cy="54864"/>
           </a:xfrm>
           <a:prstGeom prst="rect">
             <a:avLst/>
           </a:prstGeom>
           <a:solidFill>
-            <a:srgbClr val="123A6B"/>
+            <a:srgbClr val="0072CE"/>
           </a:solidFill>
           <a:ln>
             <a:noFill/>
@@ -13925,7 +13196,7 @@
             <a:r>
               <a:rPr sz="3400" b="1" i="0">
                 <a:solidFill>
-                  <a:srgbClr val="123A6B"/>
+                  <a:srgbClr val="0072CE"/>
                 </a:solidFill>
                 <a:latin typeface="Arial"/>
               </a:rPr>
@@ -13999,7 +13270,7 @@
             <a:r>
               <a:rPr sz="4200" b="1" i="0">
                 <a:solidFill>
-                  <a:srgbClr val="123A6B"/>
+                  <a:srgbClr val="0072CE"/>
                 </a:solidFill>
                 <a:latin typeface="Arial"/>
               </a:rPr>
@@ -14019,13 +13290,13 @@
         <p:spPr>
           <a:xfrm>
             <a:off x="6233160" y="2194560"/>
-            <a:ext cx="784098" cy="54864"/>
+            <a:ext cx="593303" cy="54864"/>
           </a:xfrm>
           <a:prstGeom prst="rect">
             <a:avLst/>
           </a:prstGeom>
           <a:solidFill>
-            <a:srgbClr val="123A6B"/>
+            <a:srgbClr val="0072CE"/>
           </a:solidFill>
           <a:ln>
             <a:noFill/>
@@ -14068,7 +13339,7 @@
             <a:r>
               <a:rPr sz="3400" b="1" i="0">
                 <a:solidFill>
-                  <a:srgbClr val="123A6B"/>
+                  <a:srgbClr val="0072CE"/>
                 </a:solidFill>
                 <a:latin typeface="Arial"/>
               </a:rPr>
@@ -14142,7 +13413,7 @@
             <a:r>
               <a:rPr sz="4200" b="1" i="0">
                 <a:solidFill>
-                  <a:srgbClr val="123A6B"/>
+                  <a:srgbClr val="0072CE"/>
                 </a:solidFill>
                 <a:latin typeface="Arial"/>
               </a:rPr>
@@ -14162,13 +13433,13 @@
         <p:spPr>
           <a:xfrm>
             <a:off x="9121140" y="2194560"/>
-            <a:ext cx="784098" cy="54864"/>
+            <a:ext cx="593303" cy="54864"/>
           </a:xfrm>
           <a:prstGeom prst="rect">
             <a:avLst/>
           </a:prstGeom>
           <a:solidFill>
-            <a:srgbClr val="123A6B"/>
+            <a:srgbClr val="0072CE"/>
           </a:solidFill>
           <a:ln>
             <a:noFill/>
@@ -14211,7 +13482,7 @@
             <a:r>
               <a:rPr sz="3400" b="1" i="0">
                 <a:solidFill>
-                  <a:srgbClr val="123A6B"/>
+                  <a:srgbClr val="0072CE"/>
                 </a:solidFill>
                 <a:latin typeface="Arial"/>
               </a:rPr>
@@ -14270,7 +13541,7 @@
 </p:sldLayout>
 </file>
 
-<file path=ppt/slideLayouts/slideLayout36.xml><?xml version="1.0" encoding="utf-8"?>
+<file path=ppt/slideLayouts/slideLayout35.xml><?xml version="1.0" encoding="utf-8"?>
 <p:sldLayout xmlns:a="http://schemas.openxmlformats.org/drawingml/2006/main" xmlns:r="http://schemas.openxmlformats.org/officeDocument/2006/relationships" xmlns:p="http://schemas.openxmlformats.org/presentationml/2006/main" type="blank" preserve="1">
   <p:cSld name="slidekit · Roadmap">
     <p:bg>
@@ -14802,7 +14073,7 @@
 </p:sldLayout>
 </file>
 
-<file path=ppt/slideLayouts/slideLayout37.xml><?xml version="1.0" encoding="utf-8"?>
+<file path=ppt/slideLayouts/slideLayout36.xml><?xml version="1.0" encoding="utf-8"?>
 <p:sldLayout xmlns:a="http://schemas.openxmlformats.org/drawingml/2006/main" xmlns:r="http://schemas.openxmlformats.org/officeDocument/2006/relationships" xmlns:p="http://schemas.openxmlformats.org/presentationml/2006/main" type="blank" preserve="1">
   <p:cSld name="slidekit · Funnel">
     <p:bg>
@@ -15181,7 +14452,7 @@
 </p:sldLayout>
 </file>
 
-<file path=ppt/slideLayouts/slideLayout38.xml><?xml version="1.0" encoding="utf-8"?>
+<file path=ppt/slideLayouts/slideLayout37.xml><?xml version="1.0" encoding="utf-8"?>
 <p:sldLayout xmlns:a="http://schemas.openxmlformats.org/drawingml/2006/main" xmlns:r="http://schemas.openxmlformats.org/officeDocument/2006/relationships" xmlns:p="http://schemas.openxmlformats.org/presentationml/2006/main" type="blank" preserve="1">
   <p:cSld name="slidekit · Nested Circles">
     <p:bg>
@@ -15288,7 +14559,7 @@
             <a:avLst/>
           </a:prstGeom>
           <a:solidFill>
-            <a:srgbClr val="5B6B82"/>
+            <a:srgbClr val="0A2240"/>
           </a:solidFill>
           <a:ln>
             <a:noFill/>
@@ -15352,7 +14623,7 @@
             <a:avLst/>
           </a:prstGeom>
           <a:solidFill>
-            <a:srgbClr val="123A6B"/>
+            <a:srgbClr val="0A2240"/>
           </a:solidFill>
           <a:ln>
             <a:noFill/>
@@ -15602,7 +14873,7 @@
 </p:sldLayout>
 </file>
 
-<file path=ppt/slideLayouts/slideLayout39.xml><?xml version="1.0" encoding="utf-8"?>
+<file path=ppt/slideLayouts/slideLayout38.xml><?xml version="1.0" encoding="utf-8"?>
 <p:sldLayout xmlns:a="http://schemas.openxmlformats.org/drawingml/2006/main" xmlns:r="http://schemas.openxmlformats.org/officeDocument/2006/relationships" xmlns:p="http://schemas.openxmlformats.org/presentationml/2006/main" type="blank" preserve="1">
   <p:cSld name="slidekit · Pyramid">
     <p:bg>
@@ -15709,7 +14980,7 @@
             <a:avLst/>
           </a:prstGeom>
           <a:solidFill>
-            <a:srgbClr val="123A6B"/>
+            <a:srgbClr val="0072CE"/>
           </a:solidFill>
           <a:ln>
             <a:noFill/>
@@ -15847,7 +15118,7 @@
             <a:avLst/>
           </a:prstGeom>
           <a:solidFill>
-            <a:srgbClr val="123A6B"/>
+            <a:srgbClr val="0072CE"/>
           </a:solidFill>
           <a:ln>
             <a:noFill/>
@@ -15964,6 +15235,533 @@
                 <a:latin typeface="Arial"/>
               </a:rPr>
               <a:t>Tactics</a:t>
+            </a:r>
+          </a:p>
+        </p:txBody>
+      </p:sp>
+    </p:spTree>
+    <p:extLst>
+      <p:ext uri="{BB962C8B-B14F-4D97-AF65-F5344CB8AC3E}">
+        <p14:creationId xmlns:p14="http://schemas.microsoft.com/office/powerpoint/2010/main" val="1212999818"/>
+      </p:ext>
+    </p:extLst>
+  </p:cSld>
+  <p:clrMapOvr>
+    <a:masterClrMapping/>
+  </p:clrMapOvr>
+</p:sldLayout>
+</file>
+
+<file path=ppt/slideLayouts/slideLayout39.xml><?xml version="1.0" encoding="utf-8"?>
+<p:sldLayout xmlns:a="http://schemas.openxmlformats.org/drawingml/2006/main" xmlns:r="http://schemas.openxmlformats.org/officeDocument/2006/relationships" xmlns:p="http://schemas.openxmlformats.org/presentationml/2006/main" type="blank" preserve="1">
+  <p:cSld name="slidekit · SWOT">
+    <p:bg>
+      <p:bgPr>
+        <a:solidFill>
+          <a:srgbClr val="FFFFFF"/>
+        </a:solidFill>
+        <a:effectLst/>
+      </p:bgPr>
+    </p:bg>
+    <p:spTree>
+      <p:nvGrpSpPr>
+        <p:cNvPr id="1" name=""/>
+        <p:cNvGrpSpPr/>
+        <p:nvPr/>
+      </p:nvGrpSpPr>
+      <p:grpSpPr>
+        <a:xfrm>
+          <a:off x="0" y="0"/>
+          <a:ext cx="0" cy="0"/>
+          <a:chOff x="0" y="0"/>
+          <a:chExt cx="0" cy="0"/>
+        </a:xfrm>
+      </p:grpSpPr>
+      <p:sp>
+        <p:nvSpPr>
+          <p:cNvPr id="4" name="Slide Number Placeholder 3"/>
+          <p:cNvSpPr>
+            <a:spLocks noGrp="1"/>
+          </p:cNvSpPr>
+          <p:nvPr>
+            <p:ph type="sldNum" sz="quarter" idx="12"/>
+          </p:nvPr>
+        </p:nvSpPr>
+        <p:spPr>
+          <a:xfrm>
+            <a:off x="11186160" y="6035040"/>
+            <a:ext cx="548640" cy="365760"/>
+          </a:xfrm>
+        </p:spPr>
+        <p:txBody>
+          <a:bodyPr/>
+          <a:lstStyle/>
+          <a:p>
+            <a:fld id="{C1FF6DA9-008F-8B48-92A6-B652298478BF}" type="slidenum">
+              <a:rPr lang="en-US" smtClean="0"/>
+              <a:t>‹#›</a:t>
+            </a:fld>
+            <a:endParaRPr lang="en-US"/>
+          </a:p>
+        </p:txBody>
+      </p:sp>
+      <p:sp>
+        <p:nvSpPr>
+          <p:cNvPr id="5" name="TextBox 4"/>
+          <p:cNvSpPr/>
+          <p:nvPr>
+            <p:ph type="title"/>
+          </p:nvPr>
+        </p:nvSpPr>
+        <p:spPr>
+          <a:xfrm>
+            <a:off x="457200" y="457200"/>
+            <a:ext cx="11277600" cy="768096"/>
+          </a:xfrm>
+          <a:prstGeom prst="rect">
+            <a:avLst/>
+          </a:prstGeom>
+          <a:noFill/>
+        </p:spPr>
+        <p:txBody>
+          <a:bodyPr wrap="none" lIns="0" rIns="0">
+            <a:noAutofit/>
+          </a:bodyPr>
+          <a:lstStyle/>
+          <a:p>
+            <a:pPr algn="l"/>
+            <a:r>
+              <a:rPr sz="4200" b="1" i="0">
+                <a:solidFill>
+                  <a:srgbClr val="0072CE"/>
+                </a:solidFill>
+                <a:latin typeface="Arial"/>
+              </a:rPr>
+              <a:t>SWOT Analysis</a:t>
+            </a:r>
+          </a:p>
+        </p:txBody>
+      </p:sp>
+      <p:sp>
+        <p:nvSpPr>
+          <p:cNvPr id="6" name="TextBox 5"/>
+          <p:cNvSpPr/>
+          <p:nvPr>
+            <p:ph type="body" idx="1"/>
+          </p:nvPr>
+        </p:nvSpPr>
+        <p:spPr>
+          <a:xfrm>
+            <a:off x="457200" y="1499616"/>
+            <a:ext cx="5501640" cy="621791"/>
+          </a:xfrm>
+          <a:prstGeom prst="rect">
+            <a:avLst/>
+          </a:prstGeom>
+          <a:noFill/>
+        </p:spPr>
+        <p:txBody>
+          <a:bodyPr wrap="none" lIns="0" rIns="0">
+            <a:noAutofit/>
+          </a:bodyPr>
+          <a:lstStyle/>
+          <a:p>
+            <a:pPr algn="l"/>
+            <a:r>
+              <a:rPr sz="3400" b="1" i="0">
+                <a:solidFill>
+                  <a:srgbClr val="0072CE"/>
+                </a:solidFill>
+                <a:latin typeface="Arial"/>
+              </a:rPr>
+              <a:t>Strengths</a:t>
+            </a:r>
+          </a:p>
+        </p:txBody>
+      </p:sp>
+      <p:sp>
+        <p:nvSpPr>
+          <p:cNvPr id="7" name="Rectangle 6"/>
+          <p:cNvSpPr/>
+          <p:nvPr>
+            <p:ph type="body" idx="2"/>
+          </p:nvPr>
+        </p:nvSpPr>
+        <p:spPr>
+          <a:xfrm>
+            <a:off x="457200" y="2176271"/>
+            <a:ext cx="2015207" cy="54864"/>
+          </a:xfrm>
+          <a:prstGeom prst="rect">
+            <a:avLst/>
+          </a:prstGeom>
+          <a:solidFill>
+            <a:srgbClr val="0072CE"/>
+          </a:solidFill>
+          <a:ln>
+            <a:noFill/>
+          </a:ln>
+          <a:effectLst/>
+        </p:spPr>
+        <p:txBody>
+          <a:bodyPr rtlCol="0" anchor="ctr"/>
+          <a:lstStyle/>
+          <a:p>
+            <a:pPr algn="ctr"/>
+          </a:p>
+        </p:txBody>
+      </p:sp>
+      <p:sp>
+        <p:nvSpPr>
+          <p:cNvPr id="8" name="TextBox 7"/>
+          <p:cNvSpPr/>
+          <p:nvPr>
+            <p:ph type="body" idx="3"/>
+          </p:nvPr>
+        </p:nvSpPr>
+        <p:spPr>
+          <a:xfrm>
+            <a:off x="457200" y="2395727"/>
+            <a:ext cx="7863523" cy="609600"/>
+          </a:xfrm>
+          <a:prstGeom prst="rect">
+            <a:avLst/>
+          </a:prstGeom>
+          <a:noFill/>
+        </p:spPr>
+        <p:txBody>
+          <a:bodyPr wrap="none" lIns="0" rIns="0">
+            <a:noAutofit/>
+          </a:bodyPr>
+          <a:lstStyle/>
+          <a:p>
+            <a:pPr algn="l"/>
+            <a:r>
+              <a:rPr sz="3400" b="0" i="0">
+                <a:solidFill>
+                  <a:srgbClr val="0A2240"/>
+                </a:solidFill>
+                <a:latin typeface="Arial"/>
+              </a:rPr>
+              <a:t>Strong brand, loyal users</a:t>
+            </a:r>
+          </a:p>
+        </p:txBody>
+      </p:sp>
+      <p:sp>
+        <p:nvSpPr>
+          <p:cNvPr id="9" name="TextBox 8"/>
+          <p:cNvSpPr/>
+          <p:nvPr>
+            <p:ph type="body" idx="4"/>
+          </p:nvPr>
+        </p:nvSpPr>
+        <p:spPr>
+          <a:xfrm>
+            <a:off x="6233160" y="1499616"/>
+            <a:ext cx="5501640" cy="621791"/>
+          </a:xfrm>
+          <a:prstGeom prst="rect">
+            <a:avLst/>
+          </a:prstGeom>
+          <a:noFill/>
+        </p:spPr>
+        <p:txBody>
+          <a:bodyPr wrap="none" lIns="0" rIns="0">
+            <a:noAutofit/>
+          </a:bodyPr>
+          <a:lstStyle/>
+          <a:p>
+            <a:pPr algn="l"/>
+            <a:r>
+              <a:rPr sz="3400" b="1" i="0">
+                <a:solidFill>
+                  <a:srgbClr val="0A2240"/>
+                </a:solidFill>
+                <a:latin typeface="Arial"/>
+              </a:rPr>
+              <a:t>Weaknesses</a:t>
+            </a:r>
+          </a:p>
+        </p:txBody>
+      </p:sp>
+      <p:sp>
+        <p:nvSpPr>
+          <p:cNvPr id="10" name="Rectangle 9"/>
+          <p:cNvSpPr/>
+          <p:nvPr>
+            <p:ph type="body" idx="5"/>
+          </p:nvPr>
+        </p:nvSpPr>
+        <p:spPr>
+          <a:xfrm>
+            <a:off x="6233160" y="2176271"/>
+            <a:ext cx="2584686" cy="54864"/>
+          </a:xfrm>
+          <a:prstGeom prst="rect">
+            <a:avLst/>
+          </a:prstGeom>
+          <a:solidFill>
+            <a:srgbClr val="0A2240"/>
+          </a:solidFill>
+          <a:ln>
+            <a:noFill/>
+          </a:ln>
+          <a:effectLst/>
+        </p:spPr>
+        <p:txBody>
+          <a:bodyPr rtlCol="0" anchor="ctr"/>
+          <a:lstStyle/>
+          <a:p>
+            <a:pPr algn="ctr"/>
+          </a:p>
+        </p:txBody>
+      </p:sp>
+      <p:sp>
+        <p:nvSpPr>
+          <p:cNvPr id="11" name="TextBox 10"/>
+          <p:cNvSpPr/>
+          <p:nvPr>
+            <p:ph type="body" idx="6"/>
+          </p:nvPr>
+        </p:nvSpPr>
+        <p:spPr>
+          <a:xfrm>
+            <a:off x="6233160" y="2395727"/>
+            <a:ext cx="5958840" cy="609600"/>
+          </a:xfrm>
+          <a:prstGeom prst="rect">
+            <a:avLst/>
+          </a:prstGeom>
+          <a:noFill/>
+        </p:spPr>
+        <p:txBody>
+          <a:bodyPr wrap="none" lIns="0" rIns="0">
+            <a:noAutofit/>
+          </a:bodyPr>
+          <a:lstStyle/>
+          <a:p>
+            <a:pPr algn="l"/>
+            <a:r>
+              <a:rPr sz="3400" b="0" i="0">
+                <a:solidFill>
+                  <a:srgbClr val="0A2240"/>
+                </a:solidFill>
+                <a:latin typeface="Arial"/>
+              </a:rPr>
+              <a:t>Thin margins, small team</a:t>
+            </a:r>
+          </a:p>
+        </p:txBody>
+      </p:sp>
+      <p:sp>
+        <p:nvSpPr>
+          <p:cNvPr id="12" name="TextBox 11"/>
+          <p:cNvSpPr/>
+          <p:nvPr>
+            <p:ph type="body" idx="7"/>
+          </p:nvPr>
+        </p:nvSpPr>
+        <p:spPr>
+          <a:xfrm>
+            <a:off x="457200" y="3767328"/>
+            <a:ext cx="5501640" cy="621791"/>
+          </a:xfrm>
+          <a:prstGeom prst="rect">
+            <a:avLst/>
+          </a:prstGeom>
+          <a:noFill/>
+        </p:spPr>
+        <p:txBody>
+          <a:bodyPr wrap="none" lIns="0" rIns="0">
+            <a:noAutofit/>
+          </a:bodyPr>
+          <a:lstStyle/>
+          <a:p>
+            <a:pPr algn="l"/>
+            <a:r>
+              <a:rPr sz="3400" b="1" i="0">
+                <a:solidFill>
+                  <a:srgbClr val="0072CE"/>
+                </a:solidFill>
+                <a:latin typeface="Arial"/>
+              </a:rPr>
+              <a:t>Opportunities</a:t>
+            </a:r>
+          </a:p>
+        </p:txBody>
+      </p:sp>
+      <p:sp>
+        <p:nvSpPr>
+          <p:cNvPr id="13" name="Rectangle 12"/>
+          <p:cNvSpPr/>
+          <p:nvPr>
+            <p:ph type="body" idx="8"/>
+          </p:nvPr>
+        </p:nvSpPr>
+        <p:spPr>
+          <a:xfrm>
+            <a:off x="457200" y="4443983"/>
+            <a:ext cx="2830525" cy="54864"/>
+          </a:xfrm>
+          <a:prstGeom prst="rect">
+            <a:avLst/>
+          </a:prstGeom>
+          <a:solidFill>
+            <a:srgbClr val="0072CE"/>
+          </a:solidFill>
+          <a:ln>
+            <a:noFill/>
+          </a:ln>
+          <a:effectLst/>
+        </p:spPr>
+        <p:txBody>
+          <a:bodyPr rtlCol="0" anchor="ctr"/>
+          <a:lstStyle/>
+          <a:p>
+            <a:pPr algn="ctr"/>
+          </a:p>
+        </p:txBody>
+      </p:sp>
+      <p:sp>
+        <p:nvSpPr>
+          <p:cNvPr id="14" name="TextBox 13"/>
+          <p:cNvSpPr/>
+          <p:nvPr>
+            <p:ph type="body" idx="9"/>
+          </p:nvPr>
+        </p:nvSpPr>
+        <p:spPr>
+          <a:xfrm>
+            <a:off x="457200" y="4663439"/>
+            <a:ext cx="8015326" cy="609600"/>
+          </a:xfrm>
+          <a:prstGeom prst="rect">
+            <a:avLst/>
+          </a:prstGeom>
+          <a:noFill/>
+        </p:spPr>
+        <p:txBody>
+          <a:bodyPr wrap="none" lIns="0" rIns="0">
+            <a:noAutofit/>
+          </a:bodyPr>
+          <a:lstStyle/>
+          <a:p>
+            <a:pPr algn="l"/>
+            <a:r>
+              <a:rPr sz="3400" b="0" i="0">
+                <a:solidFill>
+                  <a:srgbClr val="0A2240"/>
+                </a:solidFill>
+                <a:latin typeface="Arial"/>
+              </a:rPr>
+              <a:t>New markets via partners</a:t>
+            </a:r>
+          </a:p>
+        </p:txBody>
+      </p:sp>
+      <p:sp>
+        <p:nvSpPr>
+          <p:cNvPr id="15" name="TextBox 14"/>
+          <p:cNvSpPr/>
+          <p:nvPr>
+            <p:ph type="body" idx="13"/>
+          </p:nvPr>
+        </p:nvSpPr>
+        <p:spPr>
+          <a:xfrm>
+            <a:off x="6233160" y="3767328"/>
+            <a:ext cx="5501640" cy="621791"/>
+          </a:xfrm>
+          <a:prstGeom prst="rect">
+            <a:avLst/>
+          </a:prstGeom>
+          <a:noFill/>
+        </p:spPr>
+        <p:txBody>
+          <a:bodyPr wrap="none" lIns="0" rIns="0">
+            <a:noAutofit/>
+          </a:bodyPr>
+          <a:lstStyle/>
+          <a:p>
+            <a:pPr algn="l"/>
+            <a:r>
+              <a:rPr sz="3400" b="1" i="0">
+                <a:solidFill>
+                  <a:srgbClr val="0A2240"/>
+                </a:solidFill>
+                <a:latin typeface="Arial"/>
+              </a:rPr>
+              <a:t>Threats</a:t>
+            </a:r>
+          </a:p>
+        </p:txBody>
+      </p:sp>
+      <p:sp>
+        <p:nvSpPr>
+          <p:cNvPr id="16" name="Rectangle 15"/>
+          <p:cNvSpPr/>
+          <p:nvPr>
+            <p:ph type="body" idx="14"/>
+          </p:nvPr>
+        </p:nvSpPr>
+        <p:spPr>
+          <a:xfrm>
+            <a:off x="6233160" y="4443983"/>
+            <a:ext cx="1559793" cy="54864"/>
+          </a:xfrm>
+          <a:prstGeom prst="rect">
+            <a:avLst/>
+          </a:prstGeom>
+          <a:solidFill>
+            <a:srgbClr val="0A2240"/>
+          </a:solidFill>
+          <a:ln>
+            <a:noFill/>
+          </a:ln>
+          <a:effectLst/>
+        </p:spPr>
+        <p:txBody>
+          <a:bodyPr rtlCol="0" anchor="ctr"/>
+          <a:lstStyle/>
+          <a:p>
+            <a:pPr algn="ctr"/>
+          </a:p>
+        </p:txBody>
+      </p:sp>
+      <p:sp>
+        <p:nvSpPr>
+          <p:cNvPr id="17" name="TextBox 16"/>
+          <p:cNvSpPr/>
+          <p:nvPr>
+            <p:ph type="body" idx="15"/>
+          </p:nvPr>
+        </p:nvSpPr>
+        <p:spPr>
+          <a:xfrm>
+            <a:off x="6233160" y="4663439"/>
+            <a:ext cx="5958840" cy="609600"/>
+          </a:xfrm>
+          <a:prstGeom prst="rect">
+            <a:avLst/>
+          </a:prstGeom>
+          <a:noFill/>
+        </p:spPr>
+        <p:txBody>
+          <a:bodyPr wrap="none" lIns="0" rIns="0">
+            <a:noAutofit/>
+          </a:bodyPr>
+          <a:lstStyle/>
+          <a:p>
+            <a:pPr algn="l"/>
+            <a:r>
+              <a:rPr sz="3400" b="0" i="0">
+                <a:solidFill>
+                  <a:srgbClr val="0A2240"/>
+                </a:solidFill>
+                <a:latin typeface="Arial"/>
+              </a:rPr>
+              <a:t>New entrants cut prices</a:t>
             </a:r>
           </a:p>
         </p:txBody>
@@ -16270,533 +16068,6 @@
 </file>
 
 <file path=ppt/slideLayouts/slideLayout40.xml><?xml version="1.0" encoding="utf-8"?>
-<p:sldLayout xmlns:a="http://schemas.openxmlformats.org/drawingml/2006/main" xmlns:r="http://schemas.openxmlformats.org/officeDocument/2006/relationships" xmlns:p="http://schemas.openxmlformats.org/presentationml/2006/main" type="blank" preserve="1">
-  <p:cSld name="slidekit · SWOT">
-    <p:bg>
-      <p:bgPr>
-        <a:solidFill>
-          <a:srgbClr val="FFFFFF"/>
-        </a:solidFill>
-        <a:effectLst/>
-      </p:bgPr>
-    </p:bg>
-    <p:spTree>
-      <p:nvGrpSpPr>
-        <p:cNvPr id="1" name=""/>
-        <p:cNvGrpSpPr/>
-        <p:nvPr/>
-      </p:nvGrpSpPr>
-      <p:grpSpPr>
-        <a:xfrm>
-          <a:off x="0" y="0"/>
-          <a:ext cx="0" cy="0"/>
-          <a:chOff x="0" y="0"/>
-          <a:chExt cx="0" cy="0"/>
-        </a:xfrm>
-      </p:grpSpPr>
-      <p:sp>
-        <p:nvSpPr>
-          <p:cNvPr id="4" name="Slide Number Placeholder 3"/>
-          <p:cNvSpPr>
-            <a:spLocks noGrp="1"/>
-          </p:cNvSpPr>
-          <p:nvPr>
-            <p:ph type="sldNum" sz="quarter" idx="12"/>
-          </p:nvPr>
-        </p:nvSpPr>
-        <p:spPr>
-          <a:xfrm>
-            <a:off x="11186160" y="6035040"/>
-            <a:ext cx="548640" cy="365760"/>
-          </a:xfrm>
-        </p:spPr>
-        <p:txBody>
-          <a:bodyPr/>
-          <a:lstStyle/>
-          <a:p>
-            <a:fld id="{C1FF6DA9-008F-8B48-92A6-B652298478BF}" type="slidenum">
-              <a:rPr lang="en-US" smtClean="0"/>
-              <a:t>‹#›</a:t>
-            </a:fld>
-            <a:endParaRPr lang="en-US"/>
-          </a:p>
-        </p:txBody>
-      </p:sp>
-      <p:sp>
-        <p:nvSpPr>
-          <p:cNvPr id="5" name="TextBox 4"/>
-          <p:cNvSpPr/>
-          <p:nvPr>
-            <p:ph type="title"/>
-          </p:nvPr>
-        </p:nvSpPr>
-        <p:spPr>
-          <a:xfrm>
-            <a:off x="457200" y="457200"/>
-            <a:ext cx="11277600" cy="768096"/>
-          </a:xfrm>
-          <a:prstGeom prst="rect">
-            <a:avLst/>
-          </a:prstGeom>
-          <a:noFill/>
-        </p:spPr>
-        <p:txBody>
-          <a:bodyPr wrap="none" lIns="0" rIns="0">
-            <a:noAutofit/>
-          </a:bodyPr>
-          <a:lstStyle/>
-          <a:p>
-            <a:pPr algn="l"/>
-            <a:r>
-              <a:rPr sz="4200" b="1" i="0">
-                <a:solidFill>
-                  <a:srgbClr val="0072CE"/>
-                </a:solidFill>
-                <a:latin typeface="Arial"/>
-              </a:rPr>
-              <a:t>SWOT Analysis</a:t>
-            </a:r>
-          </a:p>
-        </p:txBody>
-      </p:sp>
-      <p:sp>
-        <p:nvSpPr>
-          <p:cNvPr id="6" name="TextBox 5"/>
-          <p:cNvSpPr/>
-          <p:nvPr>
-            <p:ph type="body" idx="1"/>
-          </p:nvPr>
-        </p:nvSpPr>
-        <p:spPr>
-          <a:xfrm>
-            <a:off x="457200" y="1499616"/>
-            <a:ext cx="5501640" cy="621791"/>
-          </a:xfrm>
-          <a:prstGeom prst="rect">
-            <a:avLst/>
-          </a:prstGeom>
-          <a:noFill/>
-        </p:spPr>
-        <p:txBody>
-          <a:bodyPr wrap="none" lIns="0" rIns="0">
-            <a:noAutofit/>
-          </a:bodyPr>
-          <a:lstStyle/>
-          <a:p>
-            <a:pPr algn="l"/>
-            <a:r>
-              <a:rPr sz="3400" b="1" i="0">
-                <a:solidFill>
-                  <a:srgbClr val="0072CE"/>
-                </a:solidFill>
-                <a:latin typeface="Arial"/>
-              </a:rPr>
-              <a:t>Strengths</a:t>
-            </a:r>
-          </a:p>
-        </p:txBody>
-      </p:sp>
-      <p:sp>
-        <p:nvSpPr>
-          <p:cNvPr id="7" name="Rectangle 6"/>
-          <p:cNvSpPr/>
-          <p:nvPr>
-            <p:ph type="body" idx="2"/>
-          </p:nvPr>
-        </p:nvSpPr>
-        <p:spPr>
-          <a:xfrm>
-            <a:off x="457200" y="2176271"/>
-            <a:ext cx="1650492" cy="54864"/>
-          </a:xfrm>
-          <a:prstGeom prst="rect">
-            <a:avLst/>
-          </a:prstGeom>
-          <a:solidFill>
-            <a:srgbClr val="0072CE"/>
-          </a:solidFill>
-          <a:ln>
-            <a:noFill/>
-          </a:ln>
-          <a:effectLst/>
-        </p:spPr>
-        <p:txBody>
-          <a:bodyPr rtlCol="0" anchor="ctr"/>
-          <a:lstStyle/>
-          <a:p>
-            <a:pPr algn="ctr"/>
-          </a:p>
-        </p:txBody>
-      </p:sp>
-      <p:sp>
-        <p:nvSpPr>
-          <p:cNvPr id="8" name="TextBox 7"/>
-          <p:cNvSpPr/>
-          <p:nvPr>
-            <p:ph type="body" idx="3"/>
-          </p:nvPr>
-        </p:nvSpPr>
-        <p:spPr>
-          <a:xfrm>
-            <a:off x="457200" y="2395727"/>
-            <a:ext cx="5501640" cy="1097281"/>
-          </a:xfrm>
-          <a:prstGeom prst="rect">
-            <a:avLst/>
-          </a:prstGeom>
-          <a:noFill/>
-        </p:spPr>
-        <p:txBody>
-          <a:bodyPr wrap="square" lIns="0" rIns="0">
-            <a:noAutofit/>
-          </a:bodyPr>
-          <a:lstStyle/>
-          <a:p>
-            <a:pPr algn="l"/>
-            <a:r>
-              <a:rPr sz="3400" b="0" i="0">
-                <a:solidFill>
-                  <a:srgbClr val="0A2240"/>
-                </a:solidFill>
-                <a:latin typeface="Arial"/>
-              </a:rPr>
-              <a:t>A strong brand with loyal users</a:t>
-            </a:r>
-          </a:p>
-        </p:txBody>
-      </p:sp>
-      <p:sp>
-        <p:nvSpPr>
-          <p:cNvPr id="9" name="TextBox 8"/>
-          <p:cNvSpPr/>
-          <p:nvPr>
-            <p:ph type="body" idx="4"/>
-          </p:nvPr>
-        </p:nvSpPr>
-        <p:spPr>
-          <a:xfrm>
-            <a:off x="6233160" y="1499616"/>
-            <a:ext cx="5501640" cy="621791"/>
-          </a:xfrm>
-          <a:prstGeom prst="rect">
-            <a:avLst/>
-          </a:prstGeom>
-          <a:noFill/>
-        </p:spPr>
-        <p:txBody>
-          <a:bodyPr wrap="none" lIns="0" rIns="0">
-            <a:noAutofit/>
-          </a:bodyPr>
-          <a:lstStyle/>
-          <a:p>
-            <a:pPr algn="l"/>
-            <a:r>
-              <a:rPr sz="3400" b="1" i="0">
-                <a:solidFill>
-                  <a:srgbClr val="5B6B82"/>
-                </a:solidFill>
-                <a:latin typeface="Arial"/>
-              </a:rPr>
-              <a:t>Weaknesses</a:t>
-            </a:r>
-          </a:p>
-        </p:txBody>
-      </p:sp>
-      <p:sp>
-        <p:nvSpPr>
-          <p:cNvPr id="10" name="Rectangle 9"/>
-          <p:cNvSpPr/>
-          <p:nvPr>
-            <p:ph type="body" idx="5"/>
-          </p:nvPr>
-        </p:nvSpPr>
-        <p:spPr>
-          <a:xfrm>
-            <a:off x="6233160" y="2176271"/>
-            <a:ext cx="1650492" cy="54864"/>
-          </a:xfrm>
-          <a:prstGeom prst="rect">
-            <a:avLst/>
-          </a:prstGeom>
-          <a:solidFill>
-            <a:srgbClr val="5B6B82"/>
-          </a:solidFill>
-          <a:ln>
-            <a:noFill/>
-          </a:ln>
-          <a:effectLst/>
-        </p:spPr>
-        <p:txBody>
-          <a:bodyPr rtlCol="0" anchor="ctr"/>
-          <a:lstStyle/>
-          <a:p>
-            <a:pPr algn="ctr"/>
-          </a:p>
-        </p:txBody>
-      </p:sp>
-      <p:sp>
-        <p:nvSpPr>
-          <p:cNvPr id="11" name="TextBox 10"/>
-          <p:cNvSpPr/>
-          <p:nvPr>
-            <p:ph type="body" idx="6"/>
-          </p:nvPr>
-        </p:nvSpPr>
-        <p:spPr>
-          <a:xfrm>
-            <a:off x="6233160" y="2395727"/>
-            <a:ext cx="5501640" cy="1097281"/>
-          </a:xfrm>
-          <a:prstGeom prst="rect">
-            <a:avLst/>
-          </a:prstGeom>
-          <a:noFill/>
-        </p:spPr>
-        <p:txBody>
-          <a:bodyPr wrap="square" lIns="0" rIns="0">
-            <a:noAutofit/>
-          </a:bodyPr>
-          <a:lstStyle/>
-          <a:p>
-            <a:pPr algn="l"/>
-            <a:r>
-              <a:rPr sz="3400" b="0" i="0">
-                <a:solidFill>
-                  <a:srgbClr val="0A2240"/>
-                </a:solidFill>
-                <a:latin typeface="Arial"/>
-              </a:rPr>
-              <a:t>Thin margins and a small team</a:t>
-            </a:r>
-          </a:p>
-        </p:txBody>
-      </p:sp>
-      <p:sp>
-        <p:nvSpPr>
-          <p:cNvPr id="12" name="TextBox 11"/>
-          <p:cNvSpPr/>
-          <p:nvPr>
-            <p:ph type="body" idx="7"/>
-          </p:nvPr>
-        </p:nvSpPr>
-        <p:spPr>
-          <a:xfrm>
-            <a:off x="457200" y="3767328"/>
-            <a:ext cx="5501640" cy="621791"/>
-          </a:xfrm>
-          <a:prstGeom prst="rect">
-            <a:avLst/>
-          </a:prstGeom>
-          <a:noFill/>
-        </p:spPr>
-        <p:txBody>
-          <a:bodyPr wrap="none" lIns="0" rIns="0">
-            <a:noAutofit/>
-          </a:bodyPr>
-          <a:lstStyle/>
-          <a:p>
-            <a:pPr algn="l"/>
-            <a:r>
-              <a:rPr sz="3400" b="1" i="0">
-                <a:solidFill>
-                  <a:srgbClr val="0072CE"/>
-                </a:solidFill>
-                <a:latin typeface="Arial"/>
-              </a:rPr>
-              <a:t>Opportunities</a:t>
-            </a:r>
-          </a:p>
-        </p:txBody>
-      </p:sp>
-      <p:sp>
-        <p:nvSpPr>
-          <p:cNvPr id="13" name="Rectangle 12"/>
-          <p:cNvSpPr/>
-          <p:nvPr>
-            <p:ph type="body" idx="8"/>
-          </p:nvPr>
-        </p:nvSpPr>
-        <p:spPr>
-          <a:xfrm>
-            <a:off x="457200" y="4443983"/>
-            <a:ext cx="1650492" cy="54864"/>
-          </a:xfrm>
-          <a:prstGeom prst="rect">
-            <a:avLst/>
-          </a:prstGeom>
-          <a:solidFill>
-            <a:srgbClr val="0072CE"/>
-          </a:solidFill>
-          <a:ln>
-            <a:noFill/>
-          </a:ln>
-          <a:effectLst/>
-        </p:spPr>
-        <p:txBody>
-          <a:bodyPr rtlCol="0" anchor="ctr"/>
-          <a:lstStyle/>
-          <a:p>
-            <a:pPr algn="ctr"/>
-          </a:p>
-        </p:txBody>
-      </p:sp>
-      <p:sp>
-        <p:nvSpPr>
-          <p:cNvPr id="14" name="TextBox 13"/>
-          <p:cNvSpPr/>
-          <p:nvPr>
-            <p:ph type="body" idx="9"/>
-          </p:nvPr>
-        </p:nvSpPr>
-        <p:spPr>
-          <a:xfrm>
-            <a:off x="457200" y="4663439"/>
-            <a:ext cx="5501640" cy="1097281"/>
-          </a:xfrm>
-          <a:prstGeom prst="rect">
-            <a:avLst/>
-          </a:prstGeom>
-          <a:noFill/>
-        </p:spPr>
-        <p:txBody>
-          <a:bodyPr wrap="square" lIns="0" rIns="0">
-            <a:noAutofit/>
-          </a:bodyPr>
-          <a:lstStyle/>
-          <a:p>
-            <a:pPr algn="l"/>
-            <a:r>
-              <a:rPr sz="3400" b="0" i="0">
-                <a:solidFill>
-                  <a:srgbClr val="0A2240"/>
-                </a:solidFill>
-                <a:latin typeface="Arial"/>
-              </a:rPr>
-              <a:t>New markets through partnerships</a:t>
-            </a:r>
-          </a:p>
-        </p:txBody>
-      </p:sp>
-      <p:sp>
-        <p:nvSpPr>
-          <p:cNvPr id="15" name="TextBox 14"/>
-          <p:cNvSpPr/>
-          <p:nvPr>
-            <p:ph type="body" idx="13"/>
-          </p:nvPr>
-        </p:nvSpPr>
-        <p:spPr>
-          <a:xfrm>
-            <a:off x="6233160" y="3767328"/>
-            <a:ext cx="5501640" cy="621791"/>
-          </a:xfrm>
-          <a:prstGeom prst="rect">
-            <a:avLst/>
-          </a:prstGeom>
-          <a:noFill/>
-        </p:spPr>
-        <p:txBody>
-          <a:bodyPr wrap="none" lIns="0" rIns="0">
-            <a:noAutofit/>
-          </a:bodyPr>
-          <a:lstStyle/>
-          <a:p>
-            <a:pPr algn="l"/>
-            <a:r>
-              <a:rPr sz="3400" b="1" i="0">
-                <a:solidFill>
-                  <a:srgbClr val="5B6B82"/>
-                </a:solidFill>
-                <a:latin typeface="Arial"/>
-              </a:rPr>
-              <a:t>Threats</a:t>
-            </a:r>
-          </a:p>
-        </p:txBody>
-      </p:sp>
-      <p:sp>
-        <p:nvSpPr>
-          <p:cNvPr id="16" name="Rectangle 15"/>
-          <p:cNvSpPr/>
-          <p:nvPr>
-            <p:ph type="body" idx="14"/>
-          </p:nvPr>
-        </p:nvSpPr>
-        <p:spPr>
-          <a:xfrm>
-            <a:off x="6233160" y="4443983"/>
-            <a:ext cx="1650492" cy="54864"/>
-          </a:xfrm>
-          <a:prstGeom prst="rect">
-            <a:avLst/>
-          </a:prstGeom>
-          <a:solidFill>
-            <a:srgbClr val="5B6B82"/>
-          </a:solidFill>
-          <a:ln>
-            <a:noFill/>
-          </a:ln>
-          <a:effectLst/>
-        </p:spPr>
-        <p:txBody>
-          <a:bodyPr rtlCol="0" anchor="ctr"/>
-          <a:lstStyle/>
-          <a:p>
-            <a:pPr algn="ctr"/>
-          </a:p>
-        </p:txBody>
-      </p:sp>
-      <p:sp>
-        <p:nvSpPr>
-          <p:cNvPr id="17" name="TextBox 16"/>
-          <p:cNvSpPr/>
-          <p:nvPr>
-            <p:ph type="body" idx="15"/>
-          </p:nvPr>
-        </p:nvSpPr>
-        <p:spPr>
-          <a:xfrm>
-            <a:off x="6233160" y="4663439"/>
-            <a:ext cx="5501640" cy="1097281"/>
-          </a:xfrm>
-          <a:prstGeom prst="rect">
-            <a:avLst/>
-          </a:prstGeom>
-          <a:noFill/>
-        </p:spPr>
-        <p:txBody>
-          <a:bodyPr wrap="square" lIns="0" rIns="0">
-            <a:noAutofit/>
-          </a:bodyPr>
-          <a:lstStyle/>
-          <a:p>
-            <a:pPr algn="l"/>
-            <a:r>
-              <a:rPr sz="3400" b="0" i="0">
-                <a:solidFill>
-                  <a:srgbClr val="0A2240"/>
-                </a:solidFill>
-                <a:latin typeface="Arial"/>
-              </a:rPr>
-              <a:t>New entrants driving price pressure</a:t>
-            </a:r>
-          </a:p>
-        </p:txBody>
-      </p:sp>
-    </p:spTree>
-    <p:extLst>
-      <p:ext uri="{BB962C8B-B14F-4D97-AF65-F5344CB8AC3E}">
-        <p14:creationId xmlns:p14="http://schemas.microsoft.com/office/powerpoint/2010/main" val="1212999818"/>
-      </p:ext>
-    </p:extLst>
-  </p:cSld>
-  <p:clrMapOvr>
-    <a:masterClrMapping/>
-  </p:clrMapOvr>
-</p:sldLayout>
-</file>
-
-<file path=ppt/slideLayouts/slideLayout41.xml><?xml version="1.0" encoding="utf-8"?>
 <p:sldLayout xmlns:a="http://schemas.openxmlformats.org/drawingml/2006/main" xmlns:r="http://schemas.openxmlformats.org/officeDocument/2006/relationships" xmlns:p="http://schemas.openxmlformats.org/presentationml/2006/main" type="blank" preserve="1">
   <p:cSld name="slidekit · Comparison Matrix">
     <p:bg>
@@ -19000,7 +18271,6 @@
     <p:sldLayoutId id="2147483738" r:id="rId39"/>
     <p:sldLayoutId id="2147483739" r:id="rId40"/>
     <p:sldLayoutId id="2147483740" r:id="rId41"/>
-    <p:sldLayoutId id="2147483741" r:id="rId42"/>
   </p:sldLayoutIdLst>
   <p:txStyles>
     <p:titleStyle>
@@ -19572,7 +18842,7 @@
             <a:fld id="{4B0E1F8A-6C1D-4E2A-9F3B-7A5C8D2E1F60}" type="slidenum">
               <a:rPr sz="1600" b="0" i="0">
                 <a:solidFill>
-                  <a:srgbClr val="5B6B82"/>
+                  <a:srgbClr val="0A2240"/>
                 </a:solidFill>
                 <a:latin typeface="Arial"/>
               </a:rPr>
@@ -19808,7 +19078,7 @@
             <a:r>
               <a:rPr sz="4200" b="1" i="0">
                 <a:solidFill>
-                  <a:srgbClr val="5B6B82"/>
+                  <a:srgbClr val="0A2240"/>
                 </a:solidFill>
                 <a:latin typeface="Arial"/>
               </a:rPr>
@@ -19845,7 +19115,7 @@
             <a:fld id="{4B0E1F8A-6C1D-4E2A-9F3B-7A5C8D2E1F60}" type="slidenum">
               <a:rPr sz="1600" b="0" i="0">
                 <a:solidFill>
-                  <a:srgbClr val="5B6B82"/>
+                  <a:srgbClr val="0A2240"/>
                 </a:solidFill>
                 <a:latin typeface="Arial"/>
               </a:rPr>
@@ -20011,7 +19281,7 @@
             <a:r>
               <a:rPr sz="2500" b="0" i="0">
                 <a:solidFill>
-                  <a:srgbClr val="5B6B82"/>
+                  <a:srgbClr val="0A2240"/>
                 </a:solidFill>
                 <a:latin typeface="Arial"/>
               </a:rPr>
@@ -20116,7 +19386,7 @@
             <a:r>
               <a:rPr sz="2500" b="0" i="0">
                 <a:solidFill>
-                  <a:srgbClr val="5B6B82"/>
+                  <a:srgbClr val="0A2240"/>
                 </a:solidFill>
                 <a:latin typeface="Arial"/>
               </a:rPr>
@@ -20153,7 +19423,7 @@
             <a:fld id="{4B0E1F8A-6C1D-4E2A-9F3B-7A5C8D2E1F60}" type="slidenum">
               <a:rPr sz="1600" b="0" i="0">
                 <a:solidFill>
-                  <a:srgbClr val="5B6B82"/>
+                  <a:srgbClr val="0A2240"/>
                 </a:solidFill>
                 <a:latin typeface="Arial"/>
               </a:rPr>
@@ -20391,7 +19661,7 @@
             <a:fld id="{4B0E1F8A-6C1D-4E2A-9F3B-7A5C8D2E1F60}" type="slidenum">
               <a:rPr sz="1600" b="0" i="0">
                 <a:solidFill>
-                  <a:srgbClr val="5B6B82"/>
+                  <a:srgbClr val="0A2240"/>
                 </a:solidFill>
                 <a:latin typeface="Arial"/>
               </a:rPr>
@@ -20487,7 +19757,7 @@
             <a:r>
               <a:rPr sz="3400" b="1" i="0">
                 <a:solidFill>
-                  <a:srgbClr val="123A6B"/>
+                  <a:srgbClr val="0072CE"/>
                 </a:solidFill>
                 <a:latin typeface="Arial"/>
               </a:rPr>
@@ -20522,7 +19792,7 @@
             <a:r>
               <a:rPr sz="3400" b="1" i="0">
                 <a:solidFill>
-                  <a:srgbClr val="123A6B"/>
+                  <a:srgbClr val="0072CE"/>
                 </a:solidFill>
                 <a:latin typeface="Arial"/>
               </a:rPr>
@@ -20813,7 +20083,7 @@
             <a:fld id="{4B0E1F8A-6C1D-4E2A-9F3B-7A5C8D2E1F60}" type="slidenum">
               <a:rPr sz="1600" b="0" i="0">
                 <a:solidFill>
-                  <a:srgbClr val="5B6B82"/>
+                  <a:srgbClr val="0A2240"/>
                 </a:solidFill>
                 <a:latin typeface="Arial"/>
               </a:rPr>
@@ -21051,7 +20321,7 @@
             <a:fld id="{4B0E1F8A-6C1D-4E2A-9F3B-7A5C8D2E1F60}" type="slidenum">
               <a:rPr sz="1600" b="0" i="0">
                 <a:solidFill>
-                  <a:srgbClr val="5B6B82"/>
+                  <a:srgbClr val="0A2240"/>
                 </a:solidFill>
                 <a:latin typeface="Arial"/>
               </a:rPr>
@@ -21147,7 +20417,7 @@
             <a:r>
               <a:rPr sz="3400" b="1" i="0">
                 <a:solidFill>
-                  <a:srgbClr val="123A6B"/>
+                  <a:srgbClr val="0072CE"/>
                 </a:solidFill>
                 <a:latin typeface="Arial"/>
               </a:rPr>
@@ -21182,7 +20452,7 @@
             <a:r>
               <a:rPr sz="3400" b="1" i="0">
                 <a:solidFill>
-                  <a:srgbClr val="123A6B"/>
+                  <a:srgbClr val="0072CE"/>
                 </a:solidFill>
                 <a:latin typeface="Arial"/>
               </a:rPr>
@@ -21473,7 +20743,7 @@
             <a:fld id="{4B0E1F8A-6C1D-4E2A-9F3B-7A5C8D2E1F60}" type="slidenum">
               <a:rPr sz="1600" b="0" i="0">
                 <a:solidFill>
-                  <a:srgbClr val="5B6B82"/>
+                  <a:srgbClr val="0A2240"/>
                 </a:solidFill>
                 <a:latin typeface="Arial"/>
               </a:rPr>
@@ -21650,7 +20920,7 @@
             <a:fld id="{4B0E1F8A-6C1D-4E2A-9F3B-7A5C8D2E1F60}" type="slidenum">
               <a:rPr sz="1600" b="0" i="0">
                 <a:solidFill>
-                  <a:srgbClr val="5B6B82"/>
+                  <a:srgbClr val="0A2240"/>
                 </a:solidFill>
                 <a:latin typeface="Arial"/>
               </a:rPr>
@@ -21886,7 +21156,7 @@
             <a:r>
               <a:rPr sz="4200" b="1" i="0">
                 <a:solidFill>
-                  <a:srgbClr val="5B6B82"/>
+                  <a:srgbClr val="0A2240"/>
                 </a:solidFill>
                 <a:latin typeface="Arial"/>
               </a:rPr>
@@ -21923,7 +21193,7 @@
             <a:fld id="{4B0E1F8A-6C1D-4E2A-9F3B-7A5C8D2E1F60}" type="slidenum">
               <a:rPr sz="1600" b="0" i="0">
                 <a:solidFill>
-                  <a:srgbClr val="5B6B82"/>
+                  <a:srgbClr val="0A2240"/>
                 </a:solidFill>
                 <a:latin typeface="Arial"/>
               </a:rPr>
@@ -22161,7 +21431,7 @@
             <a:fld id="{4B0E1F8A-6C1D-4E2A-9F3B-7A5C8D2E1F60}" type="slidenum">
               <a:rPr sz="1600" b="0" i="0">
                 <a:solidFill>
-                  <a:srgbClr val="5B6B82"/>
+                  <a:srgbClr val="0A2240"/>
                 </a:solidFill>
                 <a:latin typeface="Arial"/>
               </a:rPr>
@@ -22303,7 +21573,7 @@
             <a:fld id="{4B0E1F8A-6C1D-4E2A-9F3B-7A5C8D2E1F60}" type="slidenum">
               <a:rPr sz="1600" b="0" i="0">
                 <a:solidFill>
-                  <a:srgbClr val="5B6B82"/>
+                  <a:srgbClr val="0A2240"/>
                 </a:solidFill>
                 <a:latin typeface="Arial"/>
               </a:rPr>
@@ -22541,7 +21811,7 @@
             <a:fld id="{4B0E1F8A-6C1D-4E2A-9F3B-7A5C8D2E1F60}" type="slidenum">
               <a:rPr sz="1600" b="0" i="0">
                 <a:solidFill>
-                  <a:srgbClr val="5B6B82"/>
+                  <a:srgbClr val="0A2240"/>
                 </a:solidFill>
                 <a:latin typeface="Arial"/>
               </a:rPr>
@@ -22707,7 +21977,7 @@
             <a:r>
               <a:rPr sz="2500" b="0" i="0">
                 <a:solidFill>
-                  <a:srgbClr val="5B6B82"/>
+                  <a:srgbClr val="0A2240"/>
                 </a:solidFill>
                 <a:latin typeface="Arial"/>
               </a:rPr>
@@ -22812,7 +22082,7 @@
             <a:r>
               <a:rPr sz="2500" b="0" i="0">
                 <a:solidFill>
-                  <a:srgbClr val="5B6B82"/>
+                  <a:srgbClr val="0A2240"/>
                 </a:solidFill>
                 <a:latin typeface="Arial"/>
               </a:rPr>
@@ -22849,7 +22119,7 @@
             <a:fld id="{4B0E1F8A-6C1D-4E2A-9F3B-7A5C8D2E1F60}" type="slidenum">
               <a:rPr sz="1600" b="0" i="0">
                 <a:solidFill>
-                  <a:srgbClr val="5B6B82"/>
+                  <a:srgbClr val="0A2240"/>
                 </a:solidFill>
                 <a:latin typeface="Arial"/>
               </a:rPr>
@@ -23087,7 +22357,7 @@
             <a:fld id="{4B0E1F8A-6C1D-4E2A-9F3B-7A5C8D2E1F60}" type="slidenum">
               <a:rPr sz="1600" b="0" i="0">
                 <a:solidFill>
-                  <a:srgbClr val="5B6B82"/>
+                  <a:srgbClr val="0A2240"/>
                 </a:solidFill>
                 <a:latin typeface="Arial"/>
               </a:rPr>
@@ -23325,7 +22595,7 @@
             <a:fld id="{4B0E1F8A-6C1D-4E2A-9F3B-7A5C8D2E1F60}" type="slidenum">
               <a:rPr sz="1600" b="0" i="0">
                 <a:solidFill>
-                  <a:srgbClr val="5B6B82"/>
+                  <a:srgbClr val="0A2240"/>
                 </a:solidFill>
                 <a:latin typeface="Arial"/>
               </a:rPr>
@@ -23502,7 +22772,7 @@
             <a:fld id="{4B0E1F8A-6C1D-4E2A-9F3B-7A5C8D2E1F60}" type="slidenum">
               <a:rPr sz="1600" b="0" i="0">
                 <a:solidFill>
-                  <a:srgbClr val="5B6B82"/>
+                  <a:srgbClr val="0A2240"/>
                 </a:solidFill>
                 <a:latin typeface="Arial"/>
               </a:rPr>
@@ -23740,7 +23010,7 @@
             <a:fld id="{4B0E1F8A-6C1D-4E2A-9F3B-7A5C8D2E1F60}" type="slidenum">
               <a:rPr sz="1600" b="0" i="0">
                 <a:solidFill>
-                  <a:srgbClr val="5B6B82"/>
+                  <a:srgbClr val="0A2240"/>
                 </a:solidFill>
                 <a:latin typeface="Arial"/>
               </a:rPr>
@@ -23978,7 +23248,7 @@
             <a:fld id="{4B0E1F8A-6C1D-4E2A-9F3B-7A5C8D2E1F60}" type="slidenum">
               <a:rPr sz="1600" b="0" i="0">
                 <a:solidFill>
-                  <a:srgbClr val="5B6B82"/>
+                  <a:srgbClr val="0A2240"/>
                 </a:solidFill>
                 <a:latin typeface="Arial"/>
               </a:rPr>
@@ -24144,7 +23414,7 @@
             <a:r>
               <a:rPr sz="2500" b="0" i="0">
                 <a:solidFill>
-                  <a:srgbClr val="5B6B82"/>
+                  <a:srgbClr val="0A2240"/>
                 </a:solidFill>
                 <a:latin typeface="Arial"/>
               </a:rPr>
@@ -24249,7 +23519,7 @@
             <a:r>
               <a:rPr sz="2500" b="0" i="0">
                 <a:solidFill>
-                  <a:srgbClr val="5B6B82"/>
+                  <a:srgbClr val="0A2240"/>
                 </a:solidFill>
                 <a:latin typeface="Arial"/>
               </a:rPr>
@@ -24354,7 +23624,7 @@
             <a:r>
               <a:rPr sz="2500" b="0" i="0">
                 <a:solidFill>
-                  <a:srgbClr val="5B6B82"/>
+                  <a:srgbClr val="0A2240"/>
                 </a:solidFill>
                 <a:latin typeface="Arial"/>
               </a:rPr>
@@ -24391,7 +23661,7 @@
             <a:fld id="{4B0E1F8A-6C1D-4E2A-9F3B-7A5C8D2E1F60}" type="slidenum">
               <a:rPr sz="1600" b="0" i="0">
                 <a:solidFill>
-                  <a:srgbClr val="5B6B82"/>
+                  <a:srgbClr val="0A2240"/>
                 </a:solidFill>
                 <a:latin typeface="Arial"/>
               </a:rPr>
@@ -24531,7 +23801,7 @@
             <a:r>
               <a:rPr sz="3400" b="0" i="0">
                 <a:solidFill>
-                  <a:srgbClr val="5B6B82"/>
+                  <a:srgbClr val="0A2240"/>
                 </a:solidFill>
                 <a:latin typeface="Arial"/>
               </a:rPr>
@@ -24568,7 +23838,7 @@
             <a:fld id="{4B0E1F8A-6C1D-4E2A-9F3B-7A5C8D2E1F60}" type="slidenum">
               <a:rPr sz="1600" b="0" i="0">
                 <a:solidFill>
-                  <a:srgbClr val="5B6B82"/>
+                  <a:srgbClr val="0A2240"/>
                 </a:solidFill>
                 <a:latin typeface="Arial"/>
               </a:rPr>
@@ -24745,7 +24015,7 @@
             <a:fld id="{4B0E1F8A-6C1D-4E2A-9F3B-7A5C8D2E1F60}" type="slidenum">
               <a:rPr sz="1600" b="0" i="0">
                 <a:solidFill>
-                  <a:srgbClr val="5B6B82"/>
+                  <a:srgbClr val="0A2240"/>
                 </a:solidFill>
                 <a:latin typeface="Arial"/>
               </a:rPr>
@@ -25263,7 +24533,7 @@
             <a:fld id="{4B0E1F8A-6C1D-4E2A-9F3B-7A5C8D2E1F60}" type="slidenum">
               <a:rPr sz="1600" b="0" i="0">
                 <a:solidFill>
-                  <a:srgbClr val="5B6B82"/>
+                  <a:srgbClr val="0A2240"/>
                 </a:solidFill>
                 <a:latin typeface="Arial"/>
               </a:rPr>
@@ -25501,7 +24771,7 @@
             <a:fld id="{4B0E1F8A-6C1D-4E2A-9F3B-7A5C8D2E1F60}" type="slidenum">
               <a:rPr sz="1600" b="0" i="0">
                 <a:solidFill>
-                  <a:srgbClr val="5B6B82"/>
+                  <a:srgbClr val="0A2240"/>
                 </a:solidFill>
                 <a:latin typeface="Arial"/>
               </a:rPr>
@@ -25667,7 +24937,7 @@
             <a:r>
               <a:rPr sz="2500" b="0" i="0">
                 <a:solidFill>
-                  <a:srgbClr val="5B6B82"/>
+                  <a:srgbClr val="0A2240"/>
                 </a:solidFill>
                 <a:latin typeface="Arial"/>
               </a:rPr>
@@ -25772,7 +25042,7 @@
             <a:r>
               <a:rPr sz="2500" b="0" i="0">
                 <a:solidFill>
-                  <a:srgbClr val="5B6B82"/>
+                  <a:srgbClr val="0A2240"/>
                 </a:solidFill>
                 <a:latin typeface="Arial"/>
               </a:rPr>
@@ -25877,7 +25147,7 @@
             <a:r>
               <a:rPr sz="2500" b="0" i="0">
                 <a:solidFill>
-                  <a:srgbClr val="5B6B82"/>
+                  <a:srgbClr val="0A2240"/>
                 </a:solidFill>
                 <a:latin typeface="Arial"/>
               </a:rPr>
@@ -25914,7 +25184,7 @@
             <a:fld id="{4B0E1F8A-6C1D-4E2A-9F3B-7A5C8D2E1F60}" type="slidenum">
               <a:rPr sz="1600" b="0" i="0">
                 <a:solidFill>
-                  <a:srgbClr val="5B6B82"/>
+                  <a:srgbClr val="0A2240"/>
                 </a:solidFill>
                 <a:latin typeface="Arial"/>
               </a:rPr>
@@ -25993,7 +25263,7 @@
         <p:spPr>
           <a:xfrm>
             <a:off x="457200" y="1499616"/>
-            <a:ext cx="2793584" cy="518159"/>
+            <a:ext cx="2333108" cy="518159"/>
           </a:xfrm>
           <a:prstGeom prst="rect">
             <a:avLst/>
@@ -26010,11 +25280,11 @@
             <a:r>
               <a:rPr sz="3400" b="1" i="0">
                 <a:solidFill>
-                  <a:srgbClr val="0A2240"/>
-                </a:solidFill>
-                <a:latin typeface="Arial"/>
-              </a:rPr>
-              <a:t>Finance</a:t>
+                  <a:srgbClr val="0072CE"/>
+                </a:solidFill>
+                <a:latin typeface="Arial"/>
+              </a:rPr>
+              <a:t>Sector</a:t>
             </a:r>
           </a:p>
         </p:txBody>
@@ -26027,65 +25297,74 @@
         </p:nvSpPr>
         <p:spPr>
           <a:xfrm>
-            <a:off x="457200" y="2154935"/>
-            <a:ext cx="3446344" cy="3605785"/>
-          </a:xfrm>
-          <a:prstGeom prst="rect">
-            <a:avLst/>
-          </a:prstGeom>
-          <a:noFill/>
-        </p:spPr>
-        <p:txBody>
-          <a:bodyPr wrap="none" lIns="0" rIns="0">
-            <a:noAutofit/>
-          </a:bodyPr>
-          <a:lstStyle/>
-          <a:p>
-            <a:pPr algn="l"/>
-            <a:r>
-              <a:rPr sz="3400" b="0" i="0">
-                <a:solidFill>
-                  <a:srgbClr val="0A2240"/>
-                </a:solidFill>
-                <a:latin typeface="Arial"/>
-              </a:rPr>
-              <a:t>BlackRock</a:t>
-            </a:r>
-          </a:p>
-        </p:txBody>
-      </p:sp>
-      <p:sp>
-        <p:nvSpPr>
-          <p:cNvPr id="5" name="TextBox 4"/>
-          <p:cNvSpPr txBox="1"/>
+            <a:off x="2907779" y="1499616"/>
+            <a:ext cx="4662465" cy="518159"/>
+          </a:xfrm>
+          <a:prstGeom prst="rect">
+            <a:avLst/>
+          </a:prstGeom>
+          <a:noFill/>
+        </p:spPr>
+        <p:txBody>
+          <a:bodyPr wrap="none" lIns="0" rIns="0">
+            <a:noAutofit/>
+          </a:bodyPr>
+          <a:lstStyle/>
+          <a:p>
+            <a:pPr algn="l"/>
+            <a:r>
+              <a:rPr sz="3400" b="1" i="0">
+                <a:solidFill>
+                  <a:srgbClr val="0072CE"/>
+                </a:solidFill>
+                <a:latin typeface="Arial"/>
+              </a:rPr>
+              <a:t>Partners</a:t>
+            </a:r>
+          </a:p>
+        </p:txBody>
+      </p:sp>
+      <p:sp>
+        <p:nvSpPr>
+          <p:cNvPr id="5" name="Rectangle 4"/>
+          <p:cNvSpPr/>
           <p:nvPr/>
         </p:nvSpPr>
         <p:spPr>
           <a:xfrm>
-            <a:off x="3345180" y="1499616"/>
-            <a:ext cx="2613660" cy="518159"/>
-          </a:xfrm>
-          <a:prstGeom prst="rect">
-            <a:avLst/>
-          </a:prstGeom>
-          <a:noFill/>
-        </p:spPr>
-        <p:txBody>
-          <a:bodyPr wrap="none" lIns="0" rIns="0">
-            <a:noAutofit/>
-          </a:bodyPr>
-          <a:lstStyle/>
-          <a:p>
-            <a:pPr algn="l"/>
-            <a:r>
-              <a:rPr sz="3400" b="1" i="0">
-                <a:solidFill>
-                  <a:srgbClr val="0A2240"/>
-                </a:solidFill>
-                <a:latin typeface="Arial"/>
-              </a:rPr>
-              <a:t>Cloud</a:t>
-            </a:r>
+            <a:off x="457200" y="2072639"/>
+            <a:ext cx="7113044" cy="54864"/>
+          </a:xfrm>
+          <a:prstGeom prst="rect">
+            <a:avLst/>
+          </a:prstGeom>
+          <a:solidFill>
+            <a:srgbClr val="0072CE"/>
+          </a:solidFill>
+          <a:ln>
+            <a:noFill/>
+          </a:ln>
+          <a:effectLst/>
+        </p:spPr>
+        <p:style>
+          <a:lnRef idx="1">
+            <a:schemeClr val="accent1"/>
+          </a:lnRef>
+          <a:fillRef idx="3">
+            <a:schemeClr val="accent1"/>
+          </a:fillRef>
+          <a:effectRef idx="2">
+            <a:schemeClr val="accent1"/>
+          </a:effectRef>
+          <a:fontRef idx="minor">
+            <a:schemeClr val="lt1"/>
+          </a:fontRef>
+        </p:style>
+        <p:txBody>
+          <a:bodyPr rtlCol="0" anchor="ctr"/>
+          <a:lstStyle/>
+          <a:p>
+            <a:pPr algn="ctr"/>
           </a:p>
         </p:txBody>
       </p:sp>
@@ -26097,16 +25376,16 @@
         </p:nvSpPr>
         <p:spPr>
           <a:xfrm>
-            <a:off x="3345180" y="2154935"/>
-            <a:ext cx="2613660" cy="3605785"/>
-          </a:xfrm>
-          <a:prstGeom prst="rect">
-            <a:avLst/>
-          </a:prstGeom>
-          <a:noFill/>
-        </p:spPr>
-        <p:txBody>
-          <a:bodyPr wrap="square" lIns="0" rIns="0">
+            <a:off x="457200" y="2401823"/>
+            <a:ext cx="2640766" cy="633984"/>
+          </a:xfrm>
+          <a:prstGeom prst="rect">
+            <a:avLst/>
+          </a:prstGeom>
+          <a:noFill/>
+        </p:spPr>
+        <p:txBody>
+          <a:bodyPr wrap="none" lIns="0" rIns="0">
             <a:noAutofit/>
           </a:bodyPr>
           <a:lstStyle/>
@@ -26119,7 +25398,7 @@
                 </a:solidFill>
                 <a:latin typeface="Arial"/>
               </a:rPr>
-              <a:t>AWS and Atlassian</a:t>
+              <a:t>Finance</a:t>
             </a:r>
           </a:p>
         </p:txBody>
@@ -26132,29 +25411,29 @@
         </p:nvSpPr>
         <p:spPr>
           <a:xfrm>
-            <a:off x="6233160" y="1499616"/>
-            <a:ext cx="2613660" cy="518159"/>
-          </a:xfrm>
-          <a:prstGeom prst="rect">
-            <a:avLst/>
-          </a:prstGeom>
-          <a:noFill/>
-        </p:spPr>
-        <p:txBody>
-          <a:bodyPr wrap="none" lIns="0" rIns="0">
-            <a:noAutofit/>
-          </a:bodyPr>
-          <a:lstStyle/>
-          <a:p>
-            <a:pPr algn="l"/>
-            <a:r>
-              <a:rPr sz="3400" b="1" i="0">
+            <a:off x="2907779" y="2401823"/>
+            <a:ext cx="4662465" cy="633984"/>
+          </a:xfrm>
+          <a:prstGeom prst="rect">
+            <a:avLst/>
+          </a:prstGeom>
+          <a:noFill/>
+        </p:spPr>
+        <p:txBody>
+          <a:bodyPr wrap="none" lIns="0" rIns="0">
+            <a:noAutofit/>
+          </a:bodyPr>
+          <a:lstStyle/>
+          <a:p>
+            <a:pPr algn="l"/>
+            <a:r>
+              <a:rPr sz="3400" b="0" i="0">
                 <a:solidFill>
                   <a:srgbClr val="0A2240"/>
                 </a:solidFill>
                 <a:latin typeface="Arial"/>
               </a:rPr>
-              <a:t>Health</a:t>
+              <a:t>BlackRock</a:t>
             </a:r>
           </a:p>
         </p:txBody>
@@ -26167,16 +25446,16 @@
         </p:nvSpPr>
         <p:spPr>
           <a:xfrm>
-            <a:off x="6233160" y="2154935"/>
-            <a:ext cx="2613660" cy="3605785"/>
-          </a:xfrm>
-          <a:prstGeom prst="rect">
-            <a:avLst/>
-          </a:prstGeom>
-          <a:noFill/>
-        </p:spPr>
-        <p:txBody>
-          <a:bodyPr wrap="square" lIns="0" rIns="0">
+            <a:off x="457200" y="3310127"/>
+            <a:ext cx="1988006" cy="633984"/>
+          </a:xfrm>
+          <a:prstGeom prst="rect">
+            <a:avLst/>
+          </a:prstGeom>
+          <a:noFill/>
+        </p:spPr>
+        <p:txBody>
+          <a:bodyPr wrap="none" lIns="0" rIns="0">
             <a:noAutofit/>
           </a:bodyPr>
           <a:lstStyle/>
@@ -26189,7 +25468,7 @@
                 </a:solidFill>
                 <a:latin typeface="Arial"/>
               </a:rPr>
-              <a:t>UCSF, Stanford</a:t>
+              <a:t>Cloud</a:t>
             </a:r>
           </a:p>
         </p:txBody>
@@ -26202,29 +25481,29 @@
         </p:nvSpPr>
         <p:spPr>
           <a:xfrm>
-            <a:off x="9121140" y="1499616"/>
-            <a:ext cx="2754788" cy="518159"/>
-          </a:xfrm>
-          <a:prstGeom prst="rect">
-            <a:avLst/>
-          </a:prstGeom>
-          <a:noFill/>
-        </p:spPr>
-        <p:txBody>
-          <a:bodyPr wrap="none" lIns="0" rIns="0">
-            <a:noAutofit/>
-          </a:bodyPr>
-          <a:lstStyle/>
-          <a:p>
-            <a:pPr algn="l"/>
-            <a:r>
-              <a:rPr sz="3400" b="1" i="0">
+            <a:off x="2907779" y="3310127"/>
+            <a:ext cx="6032758" cy="633984"/>
+          </a:xfrm>
+          <a:prstGeom prst="rect">
+            <a:avLst/>
+          </a:prstGeom>
+          <a:noFill/>
+        </p:spPr>
+        <p:txBody>
+          <a:bodyPr wrap="none" lIns="0" rIns="0">
+            <a:noAutofit/>
+          </a:bodyPr>
+          <a:lstStyle/>
+          <a:p>
+            <a:pPr algn="l"/>
+            <a:r>
+              <a:rPr sz="3400" b="0" i="0">
                 <a:solidFill>
                   <a:srgbClr val="0A2240"/>
                 </a:solidFill>
                 <a:latin typeface="Arial"/>
               </a:rPr>
-              <a:t>Mission</a:t>
+              <a:t>AWS and Atlassian</a:t>
             </a:r>
           </a:p>
         </p:txBody>
@@ -26237,16 +25516,16 @@
         </p:nvSpPr>
         <p:spPr>
           <a:xfrm>
-            <a:off x="9121140" y="2154935"/>
-            <a:ext cx="2613660" cy="3605785"/>
-          </a:xfrm>
-          <a:prstGeom prst="rect">
-            <a:avLst/>
-          </a:prstGeom>
-          <a:noFill/>
-        </p:spPr>
-        <p:txBody>
-          <a:bodyPr wrap="square" lIns="0" rIns="0">
+            <a:off x="457200" y="4218431"/>
+            <a:ext cx="2179955" cy="633984"/>
+          </a:xfrm>
+          <a:prstGeom prst="rect">
+            <a:avLst/>
+          </a:prstGeom>
+          <a:noFill/>
+        </p:spPr>
+        <p:txBody>
+          <a:bodyPr wrap="none" lIns="0" rIns="0">
             <a:noAutofit/>
           </a:bodyPr>
           <a:lstStyle/>
@@ -26259,6 +25538,111 @@
                 </a:solidFill>
                 <a:latin typeface="Arial"/>
               </a:rPr>
+              <a:t>Health</a:t>
+            </a:r>
+          </a:p>
+        </p:txBody>
+      </p:sp>
+      <p:sp>
+        <p:nvSpPr>
+          <p:cNvPr id="11" name="TextBox 10"/>
+          <p:cNvSpPr txBox="1"/>
+          <p:nvPr/>
+        </p:nvSpPr>
+        <p:spPr>
+          <a:xfrm>
+            <a:off x="2907779" y="4218431"/>
+            <a:ext cx="4982606" cy="633984"/>
+          </a:xfrm>
+          <a:prstGeom prst="rect">
+            <a:avLst/>
+          </a:prstGeom>
+          <a:noFill/>
+        </p:spPr>
+        <p:txBody>
+          <a:bodyPr wrap="none" lIns="0" rIns="0">
+            <a:noAutofit/>
+          </a:bodyPr>
+          <a:lstStyle/>
+          <a:p>
+            <a:pPr algn="l"/>
+            <a:r>
+              <a:rPr sz="3400" b="0" i="0">
+                <a:solidFill>
+                  <a:srgbClr val="0A2240"/>
+                </a:solidFill>
+                <a:latin typeface="Arial"/>
+              </a:rPr>
+              <a:t>UCSF, Stanford</a:t>
+            </a:r>
+          </a:p>
+        </p:txBody>
+      </p:sp>
+      <p:sp>
+        <p:nvSpPr>
+          <p:cNvPr id="12" name="TextBox 11"/>
+          <p:cNvSpPr txBox="1"/>
+          <p:nvPr/>
+        </p:nvSpPr>
+        <p:spPr>
+          <a:xfrm>
+            <a:off x="457200" y="5126735"/>
+            <a:ext cx="2524720" cy="633984"/>
+          </a:xfrm>
+          <a:prstGeom prst="rect">
+            <a:avLst/>
+          </a:prstGeom>
+          <a:noFill/>
+        </p:spPr>
+        <p:txBody>
+          <a:bodyPr wrap="none" lIns="0" rIns="0">
+            <a:noAutofit/>
+          </a:bodyPr>
+          <a:lstStyle/>
+          <a:p>
+            <a:pPr algn="l"/>
+            <a:r>
+              <a:rPr sz="3400" b="0" i="0">
+                <a:solidFill>
+                  <a:srgbClr val="0A2240"/>
+                </a:solidFill>
+                <a:latin typeface="Arial"/>
+              </a:rPr>
+              <a:t>Mission</a:t>
+            </a:r>
+          </a:p>
+        </p:txBody>
+      </p:sp>
+      <p:sp>
+        <p:nvSpPr>
+          <p:cNvPr id="13" name="TextBox 12"/>
+          <p:cNvSpPr txBox="1"/>
+          <p:nvPr/>
+        </p:nvSpPr>
+        <p:spPr>
+          <a:xfrm>
+            <a:off x="2907779" y="5126735"/>
+            <a:ext cx="7057608" cy="633984"/>
+          </a:xfrm>
+          <a:prstGeom prst="rect">
+            <a:avLst/>
+          </a:prstGeom>
+          <a:noFill/>
+        </p:spPr>
+        <p:txBody>
+          <a:bodyPr wrap="none" lIns="0" rIns="0">
+            <a:noAutofit/>
+          </a:bodyPr>
+          <a:lstStyle/>
+          <a:p>
+            <a:pPr algn="l"/>
+            <a:r>
+              <a:rPr sz="3400" b="0" i="0">
+                <a:solidFill>
+                  <a:srgbClr val="0A2240"/>
+                </a:solidFill>
+                <a:latin typeface="Arial"/>
+              </a:rPr>
               <a:t>The Gates Foundation</a:t>
             </a:r>
           </a:p>
@@ -26266,7 +25650,7 @@
       </p:sp>
       <p:sp>
         <p:nvSpPr>
-          <p:cNvPr id="11" name="TextBox 10"/>
+          <p:cNvPr id="14" name="TextBox 13"/>
           <p:cNvSpPr/>
           <p:nvPr>
             <p:ph type="sldNum" idx="12"/>
@@ -26292,7 +25676,7 @@
             <a:fld id="{4B0E1F8A-6C1D-4E2A-9F3B-7A5C8D2E1F60}" type="slidenum">
               <a:rPr sz="1600" b="0" i="0">
                 <a:solidFill>
-                  <a:srgbClr val="5B6B82"/>
+                  <a:srgbClr val="0A2240"/>
                 </a:solidFill>
                 <a:latin typeface="Arial"/>
               </a:rPr>
@@ -26458,7 +25842,7 @@
             <a:r>
               <a:rPr sz="2500" b="0" i="0">
                 <a:solidFill>
-                  <a:srgbClr val="5B6B82"/>
+                  <a:srgbClr val="0A2240"/>
                 </a:solidFill>
                 <a:latin typeface="Arial"/>
               </a:rPr>
@@ -26563,7 +25947,7 @@
             <a:r>
               <a:rPr sz="2500" b="0" i="0">
                 <a:solidFill>
-                  <a:srgbClr val="5B6B82"/>
+                  <a:srgbClr val="0A2240"/>
                 </a:solidFill>
                 <a:latin typeface="Arial"/>
               </a:rPr>
@@ -26600,7 +25984,7 @@
             <a:fld id="{4B0E1F8A-6C1D-4E2A-9F3B-7A5C8D2E1F60}" type="slidenum">
               <a:rPr sz="1600" b="0" i="0">
                 <a:solidFill>
-                  <a:srgbClr val="5B6B82"/>
+                  <a:srgbClr val="0A2240"/>
                 </a:solidFill>
                 <a:latin typeface="Arial"/>
               </a:rPr>
@@ -26838,7 +26222,7 @@
             <a:fld id="{4B0E1F8A-6C1D-4E2A-9F3B-7A5C8D2E1F60}" type="slidenum">
               <a:rPr sz="1600" b="0" i="0">
                 <a:solidFill>
-                  <a:srgbClr val="5B6B82"/>
+                  <a:srgbClr val="0A2240"/>
                 </a:solidFill>
                 <a:latin typeface="Arial"/>
               </a:rPr>
@@ -27015,7 +26399,7 @@
             <a:fld id="{4B0E1F8A-6C1D-4E2A-9F3B-7A5C8D2E1F60}" type="slidenum">
               <a:rPr sz="1600" b="0" i="0">
                 <a:solidFill>
-                  <a:srgbClr val="5B6B82"/>
+                  <a:srgbClr val="0A2240"/>
                 </a:solidFill>
                 <a:latin typeface="Arial"/>
               </a:rPr>
@@ -27253,7 +26637,7 @@
             <a:fld id="{4B0E1F8A-6C1D-4E2A-9F3B-7A5C8D2E1F60}" type="slidenum">
               <a:rPr sz="1600" b="0" i="0">
                 <a:solidFill>
-                  <a:srgbClr val="5B6B82"/>
+                  <a:srgbClr val="0A2240"/>
                 </a:solidFill>
                 <a:latin typeface="Arial"/>
               </a:rPr>
@@ -27349,7 +26733,7 @@
             <a:r>
               <a:rPr sz="4200" b="1" i="0">
                 <a:solidFill>
-                  <a:srgbClr val="123A6B"/>
+                  <a:srgbClr val="0072CE"/>
                 </a:solidFill>
                 <a:latin typeface="Arial"/>
               </a:rPr>
@@ -27367,13 +26751,13 @@
         <p:spPr>
           <a:xfrm>
             <a:off x="457200" y="2194560"/>
-            <a:ext cx="1072896" cy="54864"/>
+            <a:ext cx="593303" cy="54864"/>
           </a:xfrm>
           <a:prstGeom prst="rect">
             <a:avLst/>
           </a:prstGeom>
           <a:solidFill>
-            <a:srgbClr val="123A6B"/>
+            <a:srgbClr val="0072CE"/>
           </a:solidFill>
           <a:ln>
             <a:noFill/>
@@ -27428,7 +26812,7 @@
             <a:r>
               <a:rPr sz="3400" b="1" i="0">
                 <a:solidFill>
-                  <a:srgbClr val="123A6B"/>
+                  <a:srgbClr val="0072CE"/>
                 </a:solidFill>
                 <a:latin typeface="Arial"/>
               </a:rPr>
@@ -27498,7 +26882,7 @@
             <a:r>
               <a:rPr sz="4200" b="1" i="0">
                 <a:solidFill>
-                  <a:srgbClr val="123A6B"/>
+                  <a:srgbClr val="0072CE"/>
                 </a:solidFill>
                 <a:latin typeface="Arial"/>
               </a:rPr>
@@ -27516,13 +26900,13 @@
         <p:spPr>
           <a:xfrm>
             <a:off x="4307840" y="2194560"/>
-            <a:ext cx="1072896" cy="54864"/>
+            <a:ext cx="593303" cy="54864"/>
           </a:xfrm>
           <a:prstGeom prst="rect">
             <a:avLst/>
           </a:prstGeom>
           <a:solidFill>
-            <a:srgbClr val="123A6B"/>
+            <a:srgbClr val="0072CE"/>
           </a:solidFill>
           <a:ln>
             <a:noFill/>
@@ -27577,7 +26961,7 @@
             <a:r>
               <a:rPr sz="3400" b="1" i="0">
                 <a:solidFill>
-                  <a:srgbClr val="123A6B"/>
+                  <a:srgbClr val="0072CE"/>
                 </a:solidFill>
                 <a:latin typeface="Arial"/>
               </a:rPr>
@@ -27647,7 +27031,7 @@
             <a:r>
               <a:rPr sz="4200" b="1" i="0">
                 <a:solidFill>
-                  <a:srgbClr val="123A6B"/>
+                  <a:srgbClr val="0072CE"/>
                 </a:solidFill>
                 <a:latin typeface="Arial"/>
               </a:rPr>
@@ -27665,13 +27049,13 @@
         <p:spPr>
           <a:xfrm>
             <a:off x="8158480" y="2194560"/>
-            <a:ext cx="1072896" cy="54864"/>
+            <a:ext cx="593303" cy="54864"/>
           </a:xfrm>
           <a:prstGeom prst="rect">
             <a:avLst/>
           </a:prstGeom>
           <a:solidFill>
-            <a:srgbClr val="123A6B"/>
+            <a:srgbClr val="0072CE"/>
           </a:solidFill>
           <a:ln>
             <a:noFill/>
@@ -27726,7 +27110,7 @@
             <a:r>
               <a:rPr sz="3400" b="1" i="0">
                 <a:solidFill>
-                  <a:srgbClr val="123A6B"/>
+                  <a:srgbClr val="0072CE"/>
                 </a:solidFill>
                 <a:latin typeface="Arial"/>
               </a:rPr>
@@ -27798,7 +27182,7 @@
             <a:fld id="{4B0E1F8A-6C1D-4E2A-9F3B-7A5C8D2E1F60}" type="slidenum">
               <a:rPr sz="1600" b="0" i="0">
                 <a:solidFill>
-                  <a:srgbClr val="5B6B82"/>
+                  <a:srgbClr val="0A2240"/>
                 </a:solidFill>
                 <a:latin typeface="Arial"/>
               </a:rPr>
@@ -27964,7 +27348,7 @@
             <a:r>
               <a:rPr sz="2500" b="0" i="0">
                 <a:solidFill>
-                  <a:srgbClr val="5B6B82"/>
+                  <a:srgbClr val="0A2240"/>
                 </a:solidFill>
                 <a:latin typeface="Arial"/>
               </a:rPr>
@@ -28069,7 +27453,7 @@
             <a:r>
               <a:rPr sz="2500" b="0" i="0">
                 <a:solidFill>
-                  <a:srgbClr val="5B6B82"/>
+                  <a:srgbClr val="0A2240"/>
                 </a:solidFill>
                 <a:latin typeface="Arial"/>
               </a:rPr>
@@ -28174,7 +27558,7 @@
             <a:r>
               <a:rPr sz="2500" b="0" i="0">
                 <a:solidFill>
-                  <a:srgbClr val="5B6B82"/>
+                  <a:srgbClr val="0A2240"/>
                 </a:solidFill>
                 <a:latin typeface="Arial"/>
               </a:rPr>
@@ -28211,7 +27595,7 @@
             <a:fld id="{4B0E1F8A-6C1D-4E2A-9F3B-7A5C8D2E1F60}" type="slidenum">
               <a:rPr sz="1600" b="0" i="0">
                 <a:solidFill>
-                  <a:srgbClr val="5B6B82"/>
+                  <a:srgbClr val="0A2240"/>
                 </a:solidFill>
                 <a:latin typeface="Arial"/>
               </a:rPr>
@@ -28449,7 +27833,7 @@
             <a:fld id="{4B0E1F8A-6C1D-4E2A-9F3B-7A5C8D2E1F60}" type="slidenum">
               <a:rPr sz="1600" b="0" i="0">
                 <a:solidFill>
-                  <a:srgbClr val="5B6B82"/>
+                  <a:srgbClr val="0A2240"/>
                 </a:solidFill>
                 <a:latin typeface="Arial"/>
               </a:rPr>
@@ -28871,7 +28255,7 @@
             <a:fld id="{4B0E1F8A-6C1D-4E2A-9F3B-7A5C8D2E1F60}" type="slidenum">
               <a:rPr sz="1600" b="0" i="0">
                 <a:solidFill>
-                  <a:srgbClr val="5B6B82"/>
+                  <a:srgbClr val="0A2240"/>
                 </a:solidFill>
                 <a:latin typeface="Arial"/>
               </a:rPr>
@@ -29109,7 +28493,7 @@
             <a:fld id="{4B0E1F8A-6C1D-4E2A-9F3B-7A5C8D2E1F60}" type="slidenum">
               <a:rPr sz="1600" b="0" i="0">
                 <a:solidFill>
-                  <a:srgbClr val="5B6B82"/>
+                  <a:srgbClr val="0A2240"/>
                 </a:solidFill>
                 <a:latin typeface="Arial"/>
               </a:rPr>
@@ -29347,7 +28731,7 @@
             <a:fld id="{4B0E1F8A-6C1D-4E2A-9F3B-7A5C8D2E1F60}" type="slidenum">
               <a:rPr sz="1600" b="0" i="0">
                 <a:solidFill>
-                  <a:srgbClr val="5B6B82"/>
+                  <a:srgbClr val="0A2240"/>
                 </a:solidFill>
                 <a:latin typeface="Arial"/>
               </a:rPr>
@@ -29443,7 +28827,7 @@
             <a:r>
               <a:rPr sz="3400" b="1" i="0">
                 <a:solidFill>
-                  <a:srgbClr val="5B6B82"/>
+                  <a:srgbClr val="0A2240"/>
                 </a:solidFill>
                 <a:latin typeface="Arial"/>
               </a:rPr>
@@ -29460,14 +28844,14 @@
         </p:nvSpPr>
         <p:spPr>
           <a:xfrm>
-            <a:off x="548640" y="2176271"/>
-            <a:ext cx="1650492" cy="54864"/>
+            <a:off x="457200" y="2176271"/>
+            <a:ext cx="4438811" cy="54864"/>
           </a:xfrm>
           <a:prstGeom prst="rect">
             <a:avLst/>
           </a:prstGeom>
           <a:solidFill>
-            <a:srgbClr val="5B6B82"/>
+            <a:srgbClr val="0A2240"/>
           </a:solidFill>
           <a:ln>
             <a:noFill/>
@@ -29539,8 +28923,8 @@
         </p:nvSpPr>
         <p:spPr>
           <a:xfrm>
-            <a:off x="6324600" y="2176271"/>
-            <a:ext cx="1650492" cy="54864"/>
+            <a:off x="6233160" y="2176271"/>
+            <a:ext cx="3599458" cy="54864"/>
           </a:xfrm>
           <a:prstGeom prst="rect">
             <a:avLst/>
@@ -29813,7 +29197,7 @@
             <a:fld id="{4B0E1F8A-6C1D-4E2A-9F3B-7A5C8D2E1F60}" type="slidenum">
               <a:rPr sz="1600" b="0" i="0">
                 <a:solidFill>
-                  <a:srgbClr val="5B6B82"/>
+                  <a:srgbClr val="0A2240"/>
                 </a:solidFill>
                 <a:latin typeface="Arial"/>
               </a:rPr>
@@ -30051,153 +29435,11 @@
             <a:fld id="{4B0E1F8A-6C1D-4E2A-9F3B-7A5C8D2E1F60}" type="slidenum">
               <a:rPr sz="1600" b="0" i="0">
                 <a:solidFill>
-                  <a:srgbClr val="5B6B82"/>
+                  <a:srgbClr val="0A2240"/>
                 </a:solidFill>
                 <a:latin typeface="Arial"/>
               </a:rPr>
               <a:t>43</a:t>
-            </a:fld>
-          </a:p>
-        </p:txBody>
-      </p:sp>
-    </p:spTree>
-  </p:cSld>
-  <p:clrMapOvr>
-    <a:masterClrMapping/>
-  </p:clrMapOvr>
-</p:sld>
-</file>
-
-<file path=ppt/slides/slide44.xml><?xml version="1.0" encoding="utf-8"?>
-<p:sld xmlns:a="http://schemas.openxmlformats.org/drawingml/2006/main" xmlns:p="http://schemas.openxmlformats.org/presentationml/2006/main" xmlns:r="http://schemas.openxmlformats.org/officeDocument/2006/relationships" showMasterSp="0">
-  <p:cSld>
-    <p:bg>
-      <p:bgPr>
-        <a:solidFill>
-          <a:srgbClr val="FFFFFF"/>
-        </a:solidFill>
-        <a:effectLst/>
-      </p:bgPr>
-    </p:bg>
-    <p:spTree>
-      <p:nvGrpSpPr>
-        <p:cNvPr id="1" name=""/>
-        <p:cNvGrpSpPr/>
-        <p:nvPr/>
-      </p:nvGrpSpPr>
-      <p:grpSpPr/>
-      <p:sp>
-        <p:nvSpPr>
-          <p:cNvPr id="2" name="Rectangle 1"/>
-          <p:cNvSpPr/>
-          <p:nvPr/>
-        </p:nvSpPr>
-        <p:spPr>
-          <a:xfrm>
-            <a:off x="457200" y="2926080"/>
-            <a:ext cx="128016" cy="1005840"/>
-          </a:xfrm>
-          <a:prstGeom prst="rect">
-            <a:avLst/>
-          </a:prstGeom>
-          <a:solidFill>
-            <a:srgbClr val="0072CE"/>
-          </a:solidFill>
-          <a:ln>
-            <a:noFill/>
-          </a:ln>
-          <a:effectLst/>
-        </p:spPr>
-        <p:style>
-          <a:lnRef idx="1">
-            <a:schemeClr val="accent1"/>
-          </a:lnRef>
-          <a:fillRef idx="3">
-            <a:schemeClr val="accent1"/>
-          </a:fillRef>
-          <a:effectRef idx="2">
-            <a:schemeClr val="accent1"/>
-          </a:effectRef>
-          <a:fontRef idx="minor">
-            <a:schemeClr val="lt1"/>
-          </a:fontRef>
-        </p:style>
-        <p:txBody>
-          <a:bodyPr rtlCol="0" anchor="ctr"/>
-          <a:lstStyle/>
-          <a:p>
-            <a:pPr algn="ctr"/>
-          </a:p>
-        </p:txBody>
-      </p:sp>
-      <p:sp>
-        <p:nvSpPr>
-          <p:cNvPr id="3" name="TextBox 2"/>
-          <p:cNvSpPr txBox="1"/>
-          <p:nvPr/>
-        </p:nvSpPr>
-        <p:spPr>
-          <a:xfrm>
-            <a:off x="996696" y="2926080"/>
-            <a:ext cx="11195304" cy="1005840"/>
-          </a:xfrm>
-          <a:prstGeom prst="rect">
-            <a:avLst/>
-          </a:prstGeom>
-          <a:noFill/>
-        </p:spPr>
-        <p:txBody>
-          <a:bodyPr wrap="none" lIns="0" rIns="0">
-            <a:noAutofit/>
-          </a:bodyPr>
-          <a:lstStyle/>
-          <a:p>
-            <a:pPr algn="l"/>
-            <a:r>
-              <a:rPr sz="6000" b="1" i="0">
-                <a:solidFill>
-                  <a:srgbClr val="0A2240"/>
-                </a:solidFill>
-                <a:latin typeface="Arial"/>
-              </a:rPr>
-              <a:t>What will you build?</a:t>
-            </a:r>
-          </a:p>
-        </p:txBody>
-      </p:sp>
-      <p:sp>
-        <p:nvSpPr>
-          <p:cNvPr id="4" name="TextBox 3"/>
-          <p:cNvSpPr/>
-          <p:nvPr>
-            <p:ph type="sldNum" idx="12"/>
-          </p:nvPr>
-        </p:nvSpPr>
-        <p:spPr>
-          <a:xfrm>
-            <a:off x="11186160" y="6035040"/>
-            <a:ext cx="548640" cy="365760"/>
-          </a:xfrm>
-          <a:prstGeom prst="rect">
-            <a:avLst/>
-          </a:prstGeom>
-          <a:noFill/>
-        </p:spPr>
-        <p:txBody>
-          <a:bodyPr wrap="none" lIns="0" rIns="0">
-            <a:noAutofit/>
-          </a:bodyPr>
-          <a:lstStyle/>
-          <a:p>
-            <a:pPr algn="r"/>
-            <a:fld id="{4B0E1F8A-6C1D-4E2A-9F3B-7A5C8D2E1F60}" type="slidenum">
-              <a:rPr sz="1600" b="0" i="0">
-                <a:solidFill>
-                  <a:srgbClr val="5B6B82"/>
-                </a:solidFill>
-                <a:latin typeface="Arial"/>
-              </a:rPr>
-              <a:t>44</a:t>
             </a:fld>
           </a:p>
         </p:txBody>
@@ -30370,7 +29612,7 @@
             <a:fld id="{4B0E1F8A-6C1D-4E2A-9F3B-7A5C8D2E1F60}" type="slidenum">
               <a:rPr sz="1600" b="0" i="0">
                 <a:solidFill>
-                  <a:srgbClr val="5B6B82"/>
+                  <a:srgbClr val="0A2240"/>
                 </a:solidFill>
                 <a:latin typeface="Arial"/>
               </a:rPr>
@@ -30547,7 +29789,7 @@
             <a:fld id="{4B0E1F8A-6C1D-4E2A-9F3B-7A5C8D2E1F60}" type="slidenum">
               <a:rPr sz="1600" b="0" i="0">
                 <a:solidFill>
-                  <a:srgbClr val="5B6B82"/>
+                  <a:srgbClr val="0A2240"/>
                 </a:solidFill>
                 <a:latin typeface="Arial"/>
               </a:rPr>
@@ -30785,7 +30027,7 @@
             <a:fld id="{4B0E1F8A-6C1D-4E2A-9F3B-7A5C8D2E1F60}" type="slidenum">
               <a:rPr sz="1600" b="0" i="0">
                 <a:solidFill>
-                  <a:srgbClr val="5B6B82"/>
+                  <a:srgbClr val="0A2240"/>
                 </a:solidFill>
                 <a:latin typeface="Arial"/>
               </a:rPr>
@@ -30881,7 +30123,7 @@
             <a:r>
               <a:rPr sz="4200" b="1" i="0">
                 <a:solidFill>
-                  <a:srgbClr val="123A6B"/>
+                  <a:srgbClr val="0072CE"/>
                 </a:solidFill>
                 <a:latin typeface="Arial"/>
               </a:rPr>
@@ -30916,7 +30158,7 @@
             <a:r>
               <a:rPr sz="4200" b="1" i="0">
                 <a:solidFill>
-                  <a:srgbClr val="123A6B"/>
+                  <a:srgbClr val="0072CE"/>
                 </a:solidFill>
                 <a:latin typeface="Arial"/>
               </a:rPr>
@@ -30986,7 +30228,7 @@
             <a:r>
               <a:rPr sz="4200" b="1" i="0">
                 <a:solidFill>
-                  <a:srgbClr val="123A6B"/>
+                  <a:srgbClr val="0072CE"/>
                 </a:solidFill>
                 <a:latin typeface="Arial"/>
               </a:rPr>
@@ -31021,7 +30263,7 @@
             <a:r>
               <a:rPr sz="4200" b="1" i="0">
                 <a:solidFill>
-                  <a:srgbClr val="123A6B"/>
+                  <a:srgbClr val="0072CE"/>
                 </a:solidFill>
                 <a:latin typeface="Arial"/>
               </a:rPr>
@@ -31091,7 +30333,7 @@
             <a:r>
               <a:rPr sz="4200" b="1" i="0">
                 <a:solidFill>
-                  <a:srgbClr val="123A6B"/>
+                  <a:srgbClr val="0072CE"/>
                 </a:solidFill>
                 <a:latin typeface="Arial"/>
               </a:rPr>
@@ -31126,7 +30368,7 @@
             <a:r>
               <a:rPr sz="4200" b="1" i="0">
                 <a:solidFill>
-                  <a:srgbClr val="123A6B"/>
+                  <a:srgbClr val="0072CE"/>
                 </a:solidFill>
                 <a:latin typeface="Arial"/>
               </a:rPr>
@@ -31198,7 +30440,7 @@
             <a:fld id="{4B0E1F8A-6C1D-4E2A-9F3B-7A5C8D2E1F60}" type="slidenum">
               <a:rPr sz="1600" b="0" i="0">
                 <a:solidFill>
-                  <a:srgbClr val="5B6B82"/>
+                  <a:srgbClr val="0A2240"/>
                 </a:solidFill>
                 <a:latin typeface="Arial"/>
               </a:rPr>
@@ -31338,7 +30580,7 @@
             <a:r>
               <a:rPr sz="3400" b="0" i="0">
                 <a:solidFill>
-                  <a:srgbClr val="5B6B82"/>
+                  <a:srgbClr val="0A2240"/>
                 </a:solidFill>
                 <a:latin typeface="Arial"/>
               </a:rPr>
@@ -31375,7 +30617,7 @@
             <a:fld id="{4B0E1F8A-6C1D-4E2A-9F3B-7A5C8D2E1F60}" type="slidenum">
               <a:rPr sz="1600" b="0" i="0">
                 <a:solidFill>
-                  <a:srgbClr val="5B6B82"/>
+                  <a:srgbClr val="0A2240"/>
                 </a:solidFill>
                 <a:latin typeface="Arial"/>
               </a:rPr>
